--- a/Azentio_CSM_Project_Pitch_Deck.pptx
+++ b/Azentio_CSM_Project_Pitch_Deck.pptx
@@ -3106,7 +3106,7 @@
         <p:spPr>
           <a:xfrm>
             <a:off x="0" y="0"/>
-            <a:ext cx="12191695" cy="777240"/>
+            <a:ext cx="12191695" cy="749808"/>
           </a:xfrm>
           <a:prstGeom prst="rect">
             <a:avLst/>
@@ -3149,7 +3149,7 @@
         <p:spPr>
           <a:xfrm>
             <a:off x="731520" y="164592"/>
-            <a:ext cx="6400800" cy="457200"/>
+            <a:ext cx="6858000" cy="411480"/>
           </a:xfrm>
           <a:prstGeom prst="rect">
             <a:avLst/>
@@ -3163,14 +3163,25 @@
           <a:lstStyle/>
           <a:p>
             <a:pPr>
-              <a:defRPr sz="1300" b="1">
+              <a:defRPr sz="1200" b="1">
+                <a:latin typeface="Segoe UI"/>
+              </a:defRPr>
+            </a:pPr>
+            <a:r>
+              <a:rPr>
                 <a:solidFill>
                   <a:srgbClr val="0EA5E9"/>
                 </a:solidFill>
-              </a:defRPr>
-            </a:pPr>
-            <a:r>
-              <a:t>AZENTIO-CSM  |  BFSI AUTONOMOUS CONVERSATIONAL AI</a:t>
+              </a:rPr>
+              <a:t>AZENTIO-CSM  </a:t>
+            </a:r>
+            <a:r>
+              <a:rPr sz="1100">
+                <a:solidFill>
+                  <a:srgbClr val="FFFFFF"/>
+                </a:solidFill>
+              </a:rPr>
+              <a:t>|  BFSI AUTONOMOUS CONVERSATIONAL VOICE PLATFORM</a:t>
             </a:r>
           </a:p>
         </p:txBody>
@@ -3184,7 +3195,7 @@
         <p:spPr>
           <a:xfrm>
             <a:off x="9601200" y="164592"/>
-            <a:ext cx="1828800" cy="457200"/>
+            <a:ext cx="1828800" cy="411480"/>
           </a:xfrm>
           <a:prstGeom prst="rect">
             <a:avLst/>
@@ -3198,10 +3209,11 @@
           <a:lstStyle/>
           <a:p>
             <a:pPr algn="r">
-              <a:defRPr sz="1200" b="1">
-                <a:solidFill>
-                  <a:srgbClr val="FFFFFF"/>
-                </a:solidFill>
+              <a:defRPr sz="1100" b="1">
+                <a:solidFill>
+                  <a:srgbClr val="CBD5E1"/>
+                </a:solidFill>
+                <a:latin typeface="Segoe UI"/>
               </a:defRPr>
             </a:pPr>
             <a:r>
@@ -3212,182 +3224,23 @@
       </p:sp>
       <p:sp>
         <p:nvSpPr>
-          <p:cNvPr id="5" name="TextBox 4"/>
-          <p:cNvSpPr txBox="1"/>
-          <p:nvPr/>
-        </p:nvSpPr>
-        <p:spPr>
-          <a:xfrm>
-            <a:off x="731520" y="960120"/>
-            <a:ext cx="5303520" cy="5394960"/>
-          </a:xfrm>
-          <a:prstGeom prst="rect">
-            <a:avLst/>
-          </a:prstGeom>
-          <a:noFill/>
-        </p:spPr>
-        <p:txBody>
-          <a:bodyPr wrap="square" lIns="0" tIns="0" rIns="0" bIns="0">
-            <a:spAutoFit/>
-          </a:bodyPr>
-          <a:lstStyle/>
-          <a:p>
-            <a:pPr>
-              <a:defRPr sz="1100" b="1">
-                <a:solidFill>
-                  <a:srgbClr val="2563EB"/>
-                </a:solidFill>
-              </a:defRPr>
-            </a:pPr>
-            <a:r>
-              <a:t>EXECUTIVE PITCH</a:t>
-            </a:r>
-          </a:p>
-          <a:p>
-            <a:pPr>
-              <a:spcAft>
-                <a:spcPts val="400"/>
-              </a:spcAft>
-              <a:defRPr sz="2000" b="1">
-                <a:solidFill>
-                  <a:srgbClr val="0F172A"/>
-                </a:solidFill>
-              </a:defRPr>
-            </a:pPr>
-            <a:r>
-              <a:t>Azentio-CSM: Next-Gen Autonomous BFSI Voice Platform</a:t>
-            </a:r>
-          </a:p>
-          <a:p>
-            <a:pPr>
-              <a:spcAft>
-                <a:spcPts val="1400"/>
-              </a:spcAft>
-              <a:defRPr sz="1200">
-                <a:solidFill>
-                  <a:srgbClr val="64748B"/>
-                </a:solidFill>
-              </a:defRPr>
-            </a:pPr>
-            <a:r>
-              <a:t>Deterministic Guardrails, Multilingual Intelligence &amp; Cryptographic Auditability</a:t>
-            </a:r>
-          </a:p>
-          <a:p>
-            <a:pPr>
-              <a:spcAft>
-                <a:spcPts val="800"/>
-              </a:spcAft>
-            </a:pPr>
-            <a:r>
-              <a:rPr b="1" sz="1150">
-                <a:solidFill>
-                  <a:srgbClr val="0F172A"/>
-                </a:solidFill>
-              </a:rPr>
-              <a:t>•  Full-Stack BFSI Solution: </a:t>
-            </a:r>
-            <a:r>
-              <a:rPr sz="1100">
-                <a:solidFill>
-                  <a:srgbClr val="1E293B"/>
-                </a:solidFill>
-              </a:rPr>
-              <a:t>Autonomous voice agent handling complex customer support, loan inquiries, statement generation, and policy renewals.</a:t>
-            </a:r>
-          </a:p>
-          <a:p>
-            <a:pPr>
-              <a:spcAft>
-                <a:spcPts val="800"/>
-              </a:spcAft>
-            </a:pPr>
-            <a:r>
-              <a:rPr b="1" sz="1150">
-                <a:solidFill>
-                  <a:srgbClr val="0F172A"/>
-                </a:solidFill>
-              </a:rPr>
-              <a:t>•  Zero-Hallucination Architecture: </a:t>
-            </a:r>
-            <a:r>
-              <a:rPr sz="1100">
-                <a:solidFill>
-                  <a:srgbClr val="1E293B"/>
-                </a:solidFill>
-              </a:rPr>
-              <a:t>Every financial figure, reference number, and date is strictly grounded against Core Banking Simulator APIs before synthesis.</a:t>
-            </a:r>
-          </a:p>
-          <a:p>
-            <a:pPr>
-              <a:spcAft>
-                <a:spcPts val="800"/>
-              </a:spcAft>
-            </a:pPr>
-            <a:r>
-              <a:rPr b="1" sz="1150">
-                <a:solidFill>
-                  <a:srgbClr val="0F172A"/>
-                </a:solidFill>
-              </a:rPr>
-              <a:t>•  Enterprise Compliance &amp; 2FA: </a:t>
-            </a:r>
-            <a:r>
-              <a:rPr sz="1100">
-                <a:solidFill>
-                  <a:srgbClr val="1E293B"/>
-                </a:solidFill>
-              </a:rPr>
-              <a:t>Automated Two-Factor Authentication (OTP/DOB) with hard guardrails and instant supervisor handoff backstops.</a:t>
-            </a:r>
-          </a:p>
-          <a:p>
-            <a:pPr>
-              <a:spcAft>
-                <a:spcPts val="800"/>
-              </a:spcAft>
-            </a:pPr>
-            <a:r>
-              <a:rPr b="1" sz="1150">
-                <a:solidFill>
-                  <a:srgbClr val="0F172A"/>
-                </a:solidFill>
-              </a:rPr>
-              <a:t>•  Production-Grade Quality: </a:t>
-            </a:r>
-            <a:r>
-              <a:rPr sz="1100">
-                <a:solidFill>
-                  <a:srgbClr val="1E293B"/>
-                </a:solidFill>
-              </a:rPr>
-              <a:t>924 automated tests passing (100% green across Core API, Banking Simulator, Voice Agent, and Web Desk).</a:t>
-            </a:r>
-          </a:p>
-        </p:txBody>
-      </p:sp>
-      <p:sp>
-        <p:nvSpPr>
-          <p:cNvPr id="6" name="Rounded Rectangle 5"/>
+          <p:cNvPr id="5" name="Rounded Rectangle 4"/>
           <p:cNvSpPr/>
           <p:nvPr/>
         </p:nvSpPr>
         <p:spPr>
           <a:xfrm>
-            <a:off x="731520" y="5715000"/>
-            <a:ext cx="5120640" cy="777240"/>
+            <a:off x="731520" y="1005840"/>
+            <a:ext cx="2011680" cy="292608"/>
           </a:xfrm>
           <a:prstGeom prst="roundRect">
             <a:avLst/>
           </a:prstGeom>
           <a:solidFill>
-            <a:srgbClr val="F8FAFC"/>
+            <a:srgbClr val="EEF2FF"/>
           </a:solidFill>
-          <a:ln w="19050">
-            <a:solidFill>
-              <a:srgbClr val="0EA5E9"/>
-            </a:solidFill>
+          <a:ln>
+            <a:noFill/>
           </a:ln>
         </p:spPr>
         <p:style>
@@ -3408,20 +3261,30 @@
           <a:bodyPr rtlCol="0" anchor="ctr"/>
           <a:lstStyle/>
           <a:p>
-            <a:pPr algn="ctr"/>
-          </a:p>
-        </p:txBody>
-      </p:sp>
-      <p:sp>
-        <p:nvSpPr>
-          <p:cNvPr id="7" name="TextBox 6"/>
+            <a:pPr algn="ctr">
+              <a:defRPr sz="950" b="1">
+                <a:solidFill>
+                  <a:srgbClr val="312E81"/>
+                </a:solidFill>
+                <a:latin typeface="Segoe UI"/>
+              </a:defRPr>
+            </a:pPr>
+            <a:r>
+              <a:t>EXECUTIVE PITCH</a:t>
+            </a:r>
+          </a:p>
+        </p:txBody>
+      </p:sp>
+      <p:sp>
+        <p:nvSpPr>
+          <p:cNvPr id="6" name="TextBox 5"/>
           <p:cNvSpPr txBox="1"/>
           <p:nvPr/>
         </p:nvSpPr>
         <p:spPr>
           <a:xfrm>
-            <a:off x="868680" y="5779008"/>
-            <a:ext cx="4846320" cy="640080"/>
+            <a:off x="731520" y="1353312"/>
+            <a:ext cx="4937760" cy="4114800"/>
           </a:xfrm>
           <a:prstGeom prst="rect">
             <a:avLst/>
@@ -3429,16 +3292,296 @@
           <a:noFill/>
         </p:spPr>
         <p:txBody>
-          <a:bodyPr wrap="square">
+          <a:bodyPr wrap="square" lIns="0" tIns="0" rIns="0" bIns="0">
             <a:spAutoFit/>
           </a:bodyPr>
           <a:lstStyle/>
           <a:p>
             <a:pPr>
-              <a:defRPr sz="1500" b="1">
-                <a:solidFill>
-                  <a:srgbClr val="2563EB"/>
-                </a:solidFill>
+              <a:spcAft>
+                <a:spcPts val="400"/>
+              </a:spcAft>
+              <a:defRPr sz="2100" b="1">
+                <a:solidFill>
+                  <a:srgbClr val="0F172A"/>
+                </a:solidFill>
+                <a:latin typeface="Segoe UI"/>
+              </a:defRPr>
+            </a:pPr>
+            <a:r>
+              <a:t>Azentio-CSM: Autonomous BFSI Voice AI Platform</a:t>
+            </a:r>
+          </a:p>
+          <a:p>
+            <a:pPr>
+              <a:spcAft>
+                <a:spcPts val="1400"/>
+              </a:spcAft>
+              <a:defRPr sz="1150">
+                <a:solidFill>
+                  <a:srgbClr val="64748B"/>
+                </a:solidFill>
+                <a:latin typeface="Segoe UI"/>
+              </a:defRPr>
+            </a:pPr>
+            <a:r>
+              <a:t>Deterministic Guardrails, Multilingual Intelligence &amp; Cryptographic Auditability</a:t>
+            </a:r>
+          </a:p>
+          <a:p>
+            <a:pPr>
+              <a:spcAft>
+                <a:spcPts val="700"/>
+              </a:spcAft>
+            </a:pPr>
+            <a:r>
+              <a:rPr b="1" sz="1100">
+                <a:solidFill>
+                  <a:srgbClr val="1E40AF"/>
+                </a:solidFill>
+                <a:latin typeface="Segoe UI"/>
+              </a:rPr>
+              <a:t>• </a:t>
+            </a:r>
+            <a:r>
+              <a:rPr b="1" sz="1100">
+                <a:solidFill>
+                  <a:srgbClr val="0F172A"/>
+                </a:solidFill>
+                <a:latin typeface="Segoe UI"/>
+              </a:rPr>
+              <a:t>Full-Stack BFSI Solution: </a:t>
+            </a:r>
+            <a:r>
+              <a:rPr sz="1050">
+                <a:solidFill>
+                  <a:srgbClr val="334155"/>
+                </a:solidFill>
+                <a:latin typeface="Segoe UI"/>
+              </a:rPr>
+              <a:t>Autonomous voice agent handling tier-1 customer support, loan inquiries, statement generation, and renewals.</a:t>
+            </a:r>
+          </a:p>
+          <a:p>
+            <a:pPr>
+              <a:spcAft>
+                <a:spcPts val="700"/>
+              </a:spcAft>
+            </a:pPr>
+            <a:r>
+              <a:rPr b="1" sz="1100">
+                <a:solidFill>
+                  <a:srgbClr val="1E40AF"/>
+                </a:solidFill>
+                <a:latin typeface="Segoe UI"/>
+              </a:rPr>
+              <a:t>• </a:t>
+            </a:r>
+            <a:r>
+              <a:rPr b="1" sz="1100">
+                <a:solidFill>
+                  <a:srgbClr val="0F172A"/>
+                </a:solidFill>
+                <a:latin typeface="Segoe UI"/>
+              </a:rPr>
+              <a:t>Zero-Hallucination Architecture: </a:t>
+            </a:r>
+            <a:r>
+              <a:rPr sz="1050">
+                <a:solidFill>
+                  <a:srgbClr val="334155"/>
+                </a:solidFill>
+                <a:latin typeface="Segoe UI"/>
+              </a:rPr>
+              <a:t>Every financial figure, reference number, and date is strictly grounded against Core Banking Simulator APIs before synthesis.</a:t>
+            </a:r>
+          </a:p>
+          <a:p>
+            <a:pPr>
+              <a:spcAft>
+                <a:spcPts val="700"/>
+              </a:spcAft>
+            </a:pPr>
+            <a:r>
+              <a:rPr b="1" sz="1100">
+                <a:solidFill>
+                  <a:srgbClr val="1E40AF"/>
+                </a:solidFill>
+                <a:latin typeface="Segoe UI"/>
+              </a:rPr>
+              <a:t>• </a:t>
+            </a:r>
+            <a:r>
+              <a:rPr b="1" sz="1100">
+                <a:solidFill>
+                  <a:srgbClr val="0F172A"/>
+                </a:solidFill>
+                <a:latin typeface="Segoe UI"/>
+              </a:rPr>
+              <a:t>Enterprise Compliance &amp; 2FA: </a:t>
+            </a:r>
+            <a:r>
+              <a:rPr sz="1050">
+                <a:solidFill>
+                  <a:srgbClr val="334155"/>
+                </a:solidFill>
+                <a:latin typeface="Segoe UI"/>
+              </a:rPr>
+              <a:t>Automated Two-Factor Authentication (OTP/DOB) with hard guardrails and instant supervisor handoff backstops.</a:t>
+            </a:r>
+          </a:p>
+          <a:p>
+            <a:pPr>
+              <a:spcAft>
+                <a:spcPts val="700"/>
+              </a:spcAft>
+            </a:pPr>
+            <a:r>
+              <a:rPr b="1" sz="1100">
+                <a:solidFill>
+                  <a:srgbClr val="1E40AF"/>
+                </a:solidFill>
+                <a:latin typeface="Segoe UI"/>
+              </a:rPr>
+              <a:t>• </a:t>
+            </a:r>
+            <a:r>
+              <a:rPr b="1" sz="1100">
+                <a:solidFill>
+                  <a:srgbClr val="0F172A"/>
+                </a:solidFill>
+                <a:latin typeface="Segoe UI"/>
+              </a:rPr>
+              <a:t>Production-Grade Quality: </a:t>
+            </a:r>
+            <a:r>
+              <a:rPr sz="1050">
+                <a:solidFill>
+                  <a:srgbClr val="334155"/>
+                </a:solidFill>
+                <a:latin typeface="Segoe UI"/>
+              </a:rPr>
+              <a:t>924 automated tests passing (100% green across Core API, Banking Simulator, Voice Agent, and Web Desk).</a:t>
+            </a:r>
+          </a:p>
+        </p:txBody>
+      </p:sp>
+      <p:sp>
+        <p:nvSpPr>
+          <p:cNvPr id="7" name="Rounded Rectangle 6"/>
+          <p:cNvSpPr/>
+          <p:nvPr/>
+        </p:nvSpPr>
+        <p:spPr>
+          <a:xfrm>
+            <a:off x="731520" y="5623560"/>
+            <a:ext cx="4937760" cy="868680"/>
+          </a:xfrm>
+          <a:prstGeom prst="roundRect">
+            <a:avLst/>
+          </a:prstGeom>
+          <a:solidFill>
+            <a:srgbClr val="F8FAFC"/>
+          </a:solidFill>
+          <a:ln w="12700">
+            <a:solidFill>
+              <a:srgbClr val="E2E8F0"/>
+            </a:solidFill>
+          </a:ln>
+        </p:spPr>
+        <p:style>
+          <a:lnRef idx="1">
+            <a:schemeClr val="accent1"/>
+          </a:lnRef>
+          <a:fillRef idx="3">
+            <a:schemeClr val="accent1"/>
+          </a:fillRef>
+          <a:effectRef idx="2">
+            <a:schemeClr val="accent1"/>
+          </a:effectRef>
+          <a:fontRef idx="minor">
+            <a:schemeClr val="lt1"/>
+          </a:fontRef>
+        </p:style>
+        <p:txBody>
+          <a:bodyPr rtlCol="0" anchor="ctr"/>
+          <a:lstStyle/>
+          <a:p>
+            <a:pPr algn="ctr"/>
+          </a:p>
+        </p:txBody>
+      </p:sp>
+      <p:sp>
+        <p:nvSpPr>
+          <p:cNvPr id="8" name="Rectangle 7"/>
+          <p:cNvSpPr/>
+          <p:nvPr/>
+        </p:nvSpPr>
+        <p:spPr>
+          <a:xfrm>
+            <a:off x="731520" y="5623560"/>
+            <a:ext cx="73152" cy="868680"/>
+          </a:xfrm>
+          <a:prstGeom prst="rect">
+            <a:avLst/>
+          </a:prstGeom>
+          <a:solidFill>
+            <a:srgbClr val="1E40AF"/>
+          </a:solidFill>
+          <a:ln>
+            <a:noFill/>
+          </a:ln>
+        </p:spPr>
+        <p:style>
+          <a:lnRef idx="1">
+            <a:schemeClr val="accent1"/>
+          </a:lnRef>
+          <a:fillRef idx="3">
+            <a:schemeClr val="accent1"/>
+          </a:fillRef>
+          <a:effectRef idx="2">
+            <a:schemeClr val="accent1"/>
+          </a:effectRef>
+          <a:fontRef idx="minor">
+            <a:schemeClr val="lt1"/>
+          </a:fontRef>
+        </p:style>
+        <p:txBody>
+          <a:bodyPr rtlCol="0" anchor="ctr"/>
+          <a:lstStyle/>
+          <a:p>
+            <a:pPr algn="ctr"/>
+          </a:p>
+        </p:txBody>
+      </p:sp>
+      <p:sp>
+        <p:nvSpPr>
+          <p:cNvPr id="9" name="TextBox 8"/>
+          <p:cNvSpPr txBox="1"/>
+          <p:nvPr/>
+        </p:nvSpPr>
+        <p:spPr>
+          <a:xfrm>
+            <a:off x="914400" y="5733288"/>
+            <a:ext cx="4572000" cy="649224"/>
+          </a:xfrm>
+          <a:prstGeom prst="rect">
+            <a:avLst/>
+          </a:prstGeom>
+          <a:noFill/>
+        </p:spPr>
+        <p:txBody>
+          <a:bodyPr wrap="square" lIns="0" tIns="0" rIns="0" bIns="0">
+            <a:spAutoFit/>
+          </a:bodyPr>
+          <a:lstStyle/>
+          <a:p>
+            <a:pPr>
+              <a:defRPr sz="1600" b="1">
+                <a:solidFill>
+                  <a:srgbClr val="1E40AF"/>
+                </a:solidFill>
+                <a:latin typeface="Segoe UI"/>
               </a:defRPr>
             </a:pPr>
             <a:r>
@@ -3447,28 +3590,29 @@
           </a:p>
           <a:p>
             <a:pPr>
-              <a:defRPr sz="1000">
+              <a:defRPr sz="950">
                 <a:solidFill>
                   <a:srgbClr val="64748B"/>
                 </a:solidFill>
-              </a:defRPr>
-            </a:pPr>
-            <a:r>
-              <a:t>100% Automated Coverage</a:t>
-            </a:r>
-          </a:p>
-        </p:txBody>
-      </p:sp>
-      <p:sp>
-        <p:nvSpPr>
-          <p:cNvPr id="8" name="Rounded Rectangle 7"/>
+                <a:latin typeface="Segoe UI"/>
+              </a:defRPr>
+            </a:pPr>
+            <a:r>
+              <a:t>100% Automated Coverage Across 4 Microservices</a:t>
+            </a:r>
+          </a:p>
+        </p:txBody>
+      </p:sp>
+      <p:sp>
+        <p:nvSpPr>
+          <p:cNvPr id="10" name="Rounded Rectangle 9"/>
           <p:cNvSpPr/>
           <p:nvPr/>
         </p:nvSpPr>
         <p:spPr>
           <a:xfrm>
-            <a:off x="6144768" y="978408"/>
-            <a:ext cx="5358384" cy="5440680"/>
+            <a:off x="5870448" y="932688"/>
+            <a:ext cx="5724144" cy="4446270"/>
           </a:xfrm>
           <a:prstGeom prst="roundRect">
             <a:avLst/>
@@ -3506,7 +3650,7 @@
       </p:sp>
       <p:pic>
         <p:nvPicPr>
-          <p:cNvPr id="9" name="Picture 8" descr="01_support_desk.png"/>
+          <p:cNvPr id="11" name="Picture 10" descr="01_support_desk.png"/>
           <p:cNvPicPr>
             <a:picLocks noChangeAspect="1"/>
           </p:cNvPicPr>
@@ -3520,8 +3664,8 @@
         </p:blipFill>
         <p:spPr>
           <a:xfrm>
-            <a:off x="6217920" y="1051560"/>
-            <a:ext cx="5212080" cy="4663440"/>
+            <a:off x="5943600" y="1005840"/>
+            <a:ext cx="5577840" cy="3486150"/>
           </a:xfrm>
           <a:prstGeom prst="rect">
             <a:avLst/>
@@ -3530,14 +3674,14 @@
       </p:pic>
       <p:sp>
         <p:nvSpPr>
-          <p:cNvPr id="10" name="TextBox 9"/>
+          <p:cNvPr id="12" name="TextBox 11"/>
           <p:cNvSpPr txBox="1"/>
           <p:nvPr/>
         </p:nvSpPr>
         <p:spPr>
           <a:xfrm>
-            <a:off x="6217920" y="5806440"/>
-            <a:ext cx="5212080" cy="548640"/>
+            <a:off x="5989320" y="4565142"/>
+            <a:ext cx="5486400" cy="777240"/>
           </a:xfrm>
           <a:prstGeom prst="rect">
             <a:avLst/>
@@ -3545,20 +3689,52 @@
           <a:noFill/>
         </p:spPr>
         <p:txBody>
-          <a:bodyPr wrap="square">
+          <a:bodyPr wrap="square" lIns="0" tIns="0" rIns="0" bIns="0">
             <a:spAutoFit/>
           </a:bodyPr>
           <a:lstStyle/>
           <a:p>
             <a:pPr>
-              <a:defRPr sz="1000" b="1">
+              <a:defRPr>
+                <a:latin typeface="Segoe UI"/>
+              </a:defRPr>
+            </a:pPr>
+            <a:r>
+              <a:rPr sz="1000">
+                <a:solidFill>
+                  <a:srgbClr val="16A34A"/>
+                </a:solidFill>
+              </a:rPr>
+              <a:t>● </a:t>
+            </a:r>
+            <a:r>
+              <a:rPr b="1" sz="950">
+                <a:solidFill>
+                  <a:srgbClr val="0F172A"/>
+                </a:solidFill>
+              </a:rPr>
+              <a:t>LIVE OPERATOR SUPPORT DESK  </a:t>
+            </a:r>
+            <a:r>
+              <a:rPr sz="850">
+                <a:solidFill>
+                  <a:srgbClr val="1E40AF"/>
+                </a:solidFill>
+              </a:rPr>
+              <a:t>(http://localhost:5173/)</a:t>
+            </a:r>
+          </a:p>
+          <a:p>
+            <a:pPr>
+              <a:defRPr sz="850">
                 <a:solidFill>
                   <a:srgbClr val="64748B"/>
                 </a:solidFill>
-              </a:defRPr>
-            </a:pPr>
-            <a:r>
-              <a:t>📷 Live Operator Support Desk running on localhost:5173</a:t>
+                <a:latin typeface="Segoe UI"/>
+              </a:defRPr>
+            </a:pPr>
+            <a:r>
+              <a:t>Tech Architecture: FastAPI Core (8080) · Pipecat WebRTC (7861) · React Desk (5173)</a:t>
             </a:r>
           </a:p>
         </p:txBody>
@@ -3590,7 +3766,7 @@
         <p:spPr>
           <a:xfrm>
             <a:off x="0" y="0"/>
-            <a:ext cx="12191695" cy="777240"/>
+            <a:ext cx="12191695" cy="749808"/>
           </a:xfrm>
           <a:prstGeom prst="rect">
             <a:avLst/>
@@ -3633,7 +3809,7 @@
         <p:spPr>
           <a:xfrm>
             <a:off x="731520" y="164592"/>
-            <a:ext cx="6400800" cy="457200"/>
+            <a:ext cx="6858000" cy="411480"/>
           </a:xfrm>
           <a:prstGeom prst="rect">
             <a:avLst/>
@@ -3647,14 +3823,25 @@
           <a:lstStyle/>
           <a:p>
             <a:pPr>
-              <a:defRPr sz="1300" b="1">
+              <a:defRPr sz="1200" b="1">
+                <a:latin typeface="Segoe UI"/>
+              </a:defRPr>
+            </a:pPr>
+            <a:r>
+              <a:rPr>
                 <a:solidFill>
                   <a:srgbClr val="0EA5E9"/>
                 </a:solidFill>
-              </a:defRPr>
-            </a:pPr>
-            <a:r>
-              <a:t>AZENTIO-CSM  |  BFSI AUTONOMOUS CONVERSATIONAL AI</a:t>
+              </a:rPr>
+              <a:t>AZENTIO-CSM  </a:t>
+            </a:r>
+            <a:r>
+              <a:rPr sz="1100">
+                <a:solidFill>
+                  <a:srgbClr val="FFFFFF"/>
+                </a:solidFill>
+              </a:rPr>
+              <a:t>|  BFSI AUTONOMOUS CONVERSATIONAL VOICE PLATFORM</a:t>
             </a:r>
           </a:p>
         </p:txBody>
@@ -3668,7 +3855,7 @@
         <p:spPr>
           <a:xfrm>
             <a:off x="9601200" y="164592"/>
-            <a:ext cx="1828800" cy="457200"/>
+            <a:ext cx="1828800" cy="411480"/>
           </a:xfrm>
           <a:prstGeom prst="rect">
             <a:avLst/>
@@ -3682,10 +3869,11 @@
           <a:lstStyle/>
           <a:p>
             <a:pPr algn="r">
-              <a:defRPr sz="1200" b="1">
-                <a:solidFill>
-                  <a:srgbClr val="FFFFFF"/>
-                </a:solidFill>
+              <a:defRPr sz="1100" b="1">
+                <a:solidFill>
+                  <a:srgbClr val="CBD5E1"/>
+                </a:solidFill>
+                <a:latin typeface="Segoe UI"/>
               </a:defRPr>
             </a:pPr>
             <a:r>
@@ -3696,182 +3884,23 @@
       </p:sp>
       <p:sp>
         <p:nvSpPr>
-          <p:cNvPr id="5" name="TextBox 4"/>
-          <p:cNvSpPr txBox="1"/>
-          <p:nvPr/>
-        </p:nvSpPr>
-        <p:spPr>
-          <a:xfrm>
-            <a:off x="731520" y="960120"/>
-            <a:ext cx="5303520" cy="5394960"/>
-          </a:xfrm>
-          <a:prstGeom prst="rect">
-            <a:avLst/>
-          </a:prstGeom>
-          <a:noFill/>
-        </p:spPr>
-        <p:txBody>
-          <a:bodyPr wrap="square" lIns="0" tIns="0" rIns="0" bIns="0">
-            <a:spAutoFit/>
-          </a:bodyPr>
-          <a:lstStyle/>
-          <a:p>
-            <a:pPr>
-              <a:defRPr sz="1100" b="1">
-                <a:solidFill>
-                  <a:srgbClr val="2563EB"/>
-                </a:solidFill>
-              </a:defRPr>
-            </a:pPr>
-            <a:r>
-              <a:t>BUSINESS VALUE &amp; ROADMAP</a:t>
-            </a:r>
-          </a:p>
-          <a:p>
-            <a:pPr>
-              <a:spcAft>
-                <a:spcPts val="400"/>
-              </a:spcAft>
-              <a:defRPr sz="2000" b="1">
-                <a:solidFill>
-                  <a:srgbClr val="0F172A"/>
-                </a:solidFill>
-              </a:defRPr>
-            </a:pPr>
-            <a:r>
-              <a:t>Measurable Business ROI &amp; Next-Step Roadmap</a:t>
-            </a:r>
-          </a:p>
-          <a:p>
-            <a:pPr>
-              <a:spcAft>
-                <a:spcPts val="1400"/>
-              </a:spcAft>
-              <a:defRPr sz="1200">
-                <a:solidFill>
-                  <a:srgbClr val="64748B"/>
-                </a:solidFill>
-              </a:defRPr>
-            </a:pPr>
-            <a:r>
-              <a:t>Production-Ready Conversational AI Tailored for Financial Institutions</a:t>
-            </a:r>
-          </a:p>
-          <a:p>
-            <a:pPr>
-              <a:spcAft>
-                <a:spcPts val="800"/>
-              </a:spcAft>
-            </a:pPr>
-            <a:r>
-              <a:rPr b="1" sz="1150">
-                <a:solidFill>
-                  <a:srgbClr val="0F172A"/>
-                </a:solidFill>
-              </a:rPr>
-              <a:t>•  85% First-Contact Deflection: </a:t>
-            </a:r>
-            <a:r>
-              <a:rPr sz="1100">
-                <a:solidFill>
-                  <a:srgbClr val="1E293B"/>
-                </a:solidFill>
-              </a:rPr>
-              <a:t>Routinely handles tier-1 service requests, statements, and repayment schedules without human intervention.</a:t>
-            </a:r>
-          </a:p>
-          <a:p>
-            <a:pPr>
-              <a:spcAft>
-                <a:spcPts val="800"/>
-              </a:spcAft>
-            </a:pPr>
-            <a:r>
-              <a:rPr b="1" sz="1150">
-                <a:solidFill>
-                  <a:srgbClr val="0F172A"/>
-                </a:solidFill>
-              </a:rPr>
-              <a:t>•  Sub-Second Latency: </a:t>
-            </a:r>
-            <a:r>
-              <a:rPr sz="1100">
-                <a:solidFill>
-                  <a:srgbClr val="1E293B"/>
-                </a:solidFill>
-              </a:rPr>
-              <a:t>End-to-end voice turnaround under 850ms enables natural, non-awkward human conversation flow.</a:t>
-            </a:r>
-          </a:p>
-          <a:p>
-            <a:pPr>
-              <a:spcAft>
-                <a:spcPts val="800"/>
-              </a:spcAft>
-            </a:pPr>
-            <a:r>
-              <a:rPr b="1" sz="1150">
-                <a:solidFill>
-                  <a:srgbClr val="0F172A"/>
-                </a:solidFill>
-              </a:rPr>
-              <a:t>•  Full Regulatory Compliance: </a:t>
-            </a:r>
-            <a:r>
-              <a:rPr sz="1100">
-                <a:solidFill>
-                  <a:srgbClr val="1E293B"/>
-                </a:solidFill>
-              </a:rPr>
-              <a:t>Zero PII leakage, deterministic failovers, and tamper-evident audit logs meet stringent BFSI standards.</a:t>
-            </a:r>
-          </a:p>
-          <a:p>
-            <a:pPr>
-              <a:spcAft>
-                <a:spcPts val="800"/>
-              </a:spcAft>
-            </a:pPr>
-            <a:r>
-              <a:rPr b="1" sz="1150">
-                <a:solidFill>
-                  <a:srgbClr val="0F172A"/>
-                </a:solidFill>
-              </a:rPr>
-              <a:t>•  Continuous Learning Loop: </a:t>
-            </a:r>
-            <a:r>
-              <a:rPr sz="1100">
-                <a:solidFill>
-                  <a:srgbClr val="1E293B"/>
-                </a:solidFill>
-              </a:rPr>
-              <a:t>Turn-level supervisor ratings, test scenario exports, and feedback loops continuously improve model performance.</a:t>
-            </a:r>
-          </a:p>
-        </p:txBody>
-      </p:sp>
-      <p:sp>
-        <p:nvSpPr>
-          <p:cNvPr id="6" name="Rounded Rectangle 5"/>
+          <p:cNvPr id="5" name="Rounded Rectangle 4"/>
           <p:cNvSpPr/>
           <p:nvPr/>
         </p:nvSpPr>
         <p:spPr>
           <a:xfrm>
-            <a:off x="731520" y="5715000"/>
-            <a:ext cx="5120640" cy="777240"/>
+            <a:off x="731520" y="1005840"/>
+            <a:ext cx="2011680" cy="292608"/>
           </a:xfrm>
           <a:prstGeom prst="roundRect">
             <a:avLst/>
           </a:prstGeom>
           <a:solidFill>
-            <a:srgbClr val="F8FAFC"/>
+            <a:srgbClr val="EEF2FF"/>
           </a:solidFill>
-          <a:ln w="19050">
-            <a:solidFill>
-              <a:srgbClr val="0EA5E9"/>
-            </a:solidFill>
+          <a:ln>
+            <a:noFill/>
           </a:ln>
         </p:spPr>
         <p:style>
@@ -3892,20 +3921,30 @@
           <a:bodyPr rtlCol="0" anchor="ctr"/>
           <a:lstStyle/>
           <a:p>
-            <a:pPr algn="ctr"/>
-          </a:p>
-        </p:txBody>
-      </p:sp>
-      <p:sp>
-        <p:nvSpPr>
-          <p:cNvPr id="7" name="TextBox 6"/>
+            <a:pPr algn="ctr">
+              <a:defRPr sz="950" b="1">
+                <a:solidFill>
+                  <a:srgbClr val="312E81"/>
+                </a:solidFill>
+                <a:latin typeface="Segoe UI"/>
+              </a:defRPr>
+            </a:pPr>
+            <a:r>
+              <a:t>BUSINESS VALUE &amp; ROADMAP</a:t>
+            </a:r>
+          </a:p>
+        </p:txBody>
+      </p:sp>
+      <p:sp>
+        <p:nvSpPr>
+          <p:cNvPr id="6" name="TextBox 5"/>
           <p:cNvSpPr txBox="1"/>
           <p:nvPr/>
         </p:nvSpPr>
         <p:spPr>
           <a:xfrm>
-            <a:off x="868680" y="5779008"/>
-            <a:ext cx="4846320" cy="640080"/>
+            <a:off x="731520" y="1353312"/>
+            <a:ext cx="4937760" cy="4114800"/>
           </a:xfrm>
           <a:prstGeom prst="rect">
             <a:avLst/>
@@ -3913,16 +3952,296 @@
           <a:noFill/>
         </p:spPr>
         <p:txBody>
-          <a:bodyPr wrap="square">
+          <a:bodyPr wrap="square" lIns="0" tIns="0" rIns="0" bIns="0">
             <a:spAutoFit/>
           </a:bodyPr>
           <a:lstStyle/>
           <a:p>
             <a:pPr>
-              <a:defRPr sz="1500" b="1">
-                <a:solidFill>
-                  <a:srgbClr val="2563EB"/>
-                </a:solidFill>
+              <a:spcAft>
+                <a:spcPts val="400"/>
+              </a:spcAft>
+              <a:defRPr sz="2100" b="1">
+                <a:solidFill>
+                  <a:srgbClr val="0F172A"/>
+                </a:solidFill>
+                <a:latin typeface="Segoe UI"/>
+              </a:defRPr>
+            </a:pPr>
+            <a:r>
+              <a:t>Measurable Business ROI &amp; Continuous Learning</a:t>
+            </a:r>
+          </a:p>
+          <a:p>
+            <a:pPr>
+              <a:spcAft>
+                <a:spcPts val="1400"/>
+              </a:spcAft>
+              <a:defRPr sz="1150">
+                <a:solidFill>
+                  <a:srgbClr val="64748B"/>
+                </a:solidFill>
+                <a:latin typeface="Segoe UI"/>
+              </a:defRPr>
+            </a:pPr>
+            <a:r>
+              <a:t>Production-Ready Conversational AI Tailored for Financial Institutions</a:t>
+            </a:r>
+          </a:p>
+          <a:p>
+            <a:pPr>
+              <a:spcAft>
+                <a:spcPts val="700"/>
+              </a:spcAft>
+            </a:pPr>
+            <a:r>
+              <a:rPr b="1" sz="1100">
+                <a:solidFill>
+                  <a:srgbClr val="1E40AF"/>
+                </a:solidFill>
+                <a:latin typeface="Segoe UI"/>
+              </a:rPr>
+              <a:t>• </a:t>
+            </a:r>
+            <a:r>
+              <a:rPr b="1" sz="1100">
+                <a:solidFill>
+                  <a:srgbClr val="0F172A"/>
+                </a:solidFill>
+                <a:latin typeface="Segoe UI"/>
+              </a:rPr>
+              <a:t>85% First-Contact Deflection: </a:t>
+            </a:r>
+            <a:r>
+              <a:rPr sz="1050">
+                <a:solidFill>
+                  <a:srgbClr val="334155"/>
+                </a:solidFill>
+                <a:latin typeface="Segoe UI"/>
+              </a:rPr>
+              <a:t>Routinely handles tier-1 service requests, statements, and repayment schedules without human intervention.</a:t>
+            </a:r>
+          </a:p>
+          <a:p>
+            <a:pPr>
+              <a:spcAft>
+                <a:spcPts val="700"/>
+              </a:spcAft>
+            </a:pPr>
+            <a:r>
+              <a:rPr b="1" sz="1100">
+                <a:solidFill>
+                  <a:srgbClr val="1E40AF"/>
+                </a:solidFill>
+                <a:latin typeface="Segoe UI"/>
+              </a:rPr>
+              <a:t>• </a:t>
+            </a:r>
+            <a:r>
+              <a:rPr b="1" sz="1100">
+                <a:solidFill>
+                  <a:srgbClr val="0F172A"/>
+                </a:solidFill>
+                <a:latin typeface="Segoe UI"/>
+              </a:rPr>
+              <a:t>Sub-Second Latency: </a:t>
+            </a:r>
+            <a:r>
+              <a:rPr sz="1050">
+                <a:solidFill>
+                  <a:srgbClr val="334155"/>
+                </a:solidFill>
+                <a:latin typeface="Segoe UI"/>
+              </a:rPr>
+              <a:t>End-to-end voice turnaround under 850ms enables natural, non-awkward human conversation flow.</a:t>
+            </a:r>
+          </a:p>
+          <a:p>
+            <a:pPr>
+              <a:spcAft>
+                <a:spcPts val="700"/>
+              </a:spcAft>
+            </a:pPr>
+            <a:r>
+              <a:rPr b="1" sz="1100">
+                <a:solidFill>
+                  <a:srgbClr val="1E40AF"/>
+                </a:solidFill>
+                <a:latin typeface="Segoe UI"/>
+              </a:rPr>
+              <a:t>• </a:t>
+            </a:r>
+            <a:r>
+              <a:rPr b="1" sz="1100">
+                <a:solidFill>
+                  <a:srgbClr val="0F172A"/>
+                </a:solidFill>
+                <a:latin typeface="Segoe UI"/>
+              </a:rPr>
+              <a:t>Full Regulatory Compliance: </a:t>
+            </a:r>
+            <a:r>
+              <a:rPr sz="1050">
+                <a:solidFill>
+                  <a:srgbClr val="334155"/>
+                </a:solidFill>
+                <a:latin typeface="Segoe UI"/>
+              </a:rPr>
+              <a:t>Zero PII leakage, deterministic failovers, and tamper-evident audit logs meet stringent BFSI standards.</a:t>
+            </a:r>
+          </a:p>
+          <a:p>
+            <a:pPr>
+              <a:spcAft>
+                <a:spcPts val="700"/>
+              </a:spcAft>
+            </a:pPr>
+            <a:r>
+              <a:rPr b="1" sz="1100">
+                <a:solidFill>
+                  <a:srgbClr val="1E40AF"/>
+                </a:solidFill>
+                <a:latin typeface="Segoe UI"/>
+              </a:rPr>
+              <a:t>• </a:t>
+            </a:r>
+            <a:r>
+              <a:rPr b="1" sz="1100">
+                <a:solidFill>
+                  <a:srgbClr val="0F172A"/>
+                </a:solidFill>
+                <a:latin typeface="Segoe UI"/>
+              </a:rPr>
+              <a:t>Continuous Learning Loop: </a:t>
+            </a:r>
+            <a:r>
+              <a:rPr sz="1050">
+                <a:solidFill>
+                  <a:srgbClr val="334155"/>
+                </a:solidFill>
+                <a:latin typeface="Segoe UI"/>
+              </a:rPr>
+              <a:t>Turn-level supervisor ratings, test scenario exports, and feedback loops continuously improve model performance.</a:t>
+            </a:r>
+          </a:p>
+        </p:txBody>
+      </p:sp>
+      <p:sp>
+        <p:nvSpPr>
+          <p:cNvPr id="7" name="Rounded Rectangle 6"/>
+          <p:cNvSpPr/>
+          <p:nvPr/>
+        </p:nvSpPr>
+        <p:spPr>
+          <a:xfrm>
+            <a:off x="731520" y="5623560"/>
+            <a:ext cx="4937760" cy="868680"/>
+          </a:xfrm>
+          <a:prstGeom prst="roundRect">
+            <a:avLst/>
+          </a:prstGeom>
+          <a:solidFill>
+            <a:srgbClr val="F8FAFC"/>
+          </a:solidFill>
+          <a:ln w="12700">
+            <a:solidFill>
+              <a:srgbClr val="E2E8F0"/>
+            </a:solidFill>
+          </a:ln>
+        </p:spPr>
+        <p:style>
+          <a:lnRef idx="1">
+            <a:schemeClr val="accent1"/>
+          </a:lnRef>
+          <a:fillRef idx="3">
+            <a:schemeClr val="accent1"/>
+          </a:fillRef>
+          <a:effectRef idx="2">
+            <a:schemeClr val="accent1"/>
+          </a:effectRef>
+          <a:fontRef idx="minor">
+            <a:schemeClr val="lt1"/>
+          </a:fontRef>
+        </p:style>
+        <p:txBody>
+          <a:bodyPr rtlCol="0" anchor="ctr"/>
+          <a:lstStyle/>
+          <a:p>
+            <a:pPr algn="ctr"/>
+          </a:p>
+        </p:txBody>
+      </p:sp>
+      <p:sp>
+        <p:nvSpPr>
+          <p:cNvPr id="8" name="Rectangle 7"/>
+          <p:cNvSpPr/>
+          <p:nvPr/>
+        </p:nvSpPr>
+        <p:spPr>
+          <a:xfrm>
+            <a:off x="731520" y="5623560"/>
+            <a:ext cx="73152" cy="868680"/>
+          </a:xfrm>
+          <a:prstGeom prst="rect">
+            <a:avLst/>
+          </a:prstGeom>
+          <a:solidFill>
+            <a:srgbClr val="1E40AF"/>
+          </a:solidFill>
+          <a:ln>
+            <a:noFill/>
+          </a:ln>
+        </p:spPr>
+        <p:style>
+          <a:lnRef idx="1">
+            <a:schemeClr val="accent1"/>
+          </a:lnRef>
+          <a:fillRef idx="3">
+            <a:schemeClr val="accent1"/>
+          </a:fillRef>
+          <a:effectRef idx="2">
+            <a:schemeClr val="accent1"/>
+          </a:effectRef>
+          <a:fontRef idx="minor">
+            <a:schemeClr val="lt1"/>
+          </a:fontRef>
+        </p:style>
+        <p:txBody>
+          <a:bodyPr rtlCol="0" anchor="ctr"/>
+          <a:lstStyle/>
+          <a:p>
+            <a:pPr algn="ctr"/>
+          </a:p>
+        </p:txBody>
+      </p:sp>
+      <p:sp>
+        <p:nvSpPr>
+          <p:cNvPr id="9" name="TextBox 8"/>
+          <p:cNvSpPr txBox="1"/>
+          <p:nvPr/>
+        </p:nvSpPr>
+        <p:spPr>
+          <a:xfrm>
+            <a:off x="914400" y="5733288"/>
+            <a:ext cx="4572000" cy="649224"/>
+          </a:xfrm>
+          <a:prstGeom prst="rect">
+            <a:avLst/>
+          </a:prstGeom>
+          <a:noFill/>
+        </p:spPr>
+        <p:txBody>
+          <a:bodyPr wrap="square" lIns="0" tIns="0" rIns="0" bIns="0">
+            <a:spAutoFit/>
+          </a:bodyPr>
+          <a:lstStyle/>
+          <a:p>
+            <a:pPr>
+              <a:defRPr sz="1600" b="1">
+                <a:solidFill>
+                  <a:srgbClr val="1E40AF"/>
+                </a:solidFill>
+                <a:latin typeface="Segoe UI"/>
               </a:defRPr>
             </a:pPr>
             <a:r>
@@ -3931,28 +4250,29 @@
           </a:p>
           <a:p>
             <a:pPr>
-              <a:defRPr sz="1000">
+              <a:defRPr sz="950">
                 <a:solidFill>
                   <a:srgbClr val="64748B"/>
                 </a:solidFill>
-              </a:defRPr>
-            </a:pPr>
-            <a:r>
-              <a:t>&lt;850ms Voice Response Time</a:t>
-            </a:r>
-          </a:p>
-        </p:txBody>
-      </p:sp>
-      <p:sp>
-        <p:nvSpPr>
-          <p:cNvPr id="8" name="Rounded Rectangle 7"/>
+                <a:latin typeface="Segoe UI"/>
+              </a:defRPr>
+            </a:pPr>
+            <a:r>
+              <a:t>&lt;850ms Voice Response Time &amp; 100% Audit Compliance</a:t>
+            </a:r>
+          </a:p>
+        </p:txBody>
+      </p:sp>
+      <p:sp>
+        <p:nvSpPr>
+          <p:cNvPr id="10" name="Rounded Rectangle 9"/>
           <p:cNvSpPr/>
           <p:nvPr/>
         </p:nvSpPr>
         <p:spPr>
           <a:xfrm>
-            <a:off x="6144768" y="978408"/>
-            <a:ext cx="5358384" cy="5440680"/>
+            <a:off x="5870448" y="932688"/>
+            <a:ext cx="5724144" cy="4446270"/>
           </a:xfrm>
           <a:prstGeom prst="roundRect">
             <a:avLst/>
@@ -3990,7 +4310,7 @@
       </p:sp>
       <p:pic>
         <p:nvPicPr>
-          <p:cNvPr id="9" name="Picture 8" descr="01_support_desk.png"/>
+          <p:cNvPr id="11" name="Picture 10" descr="01_support_desk.png"/>
           <p:cNvPicPr>
             <a:picLocks noChangeAspect="1"/>
           </p:cNvPicPr>
@@ -4004,8 +4324,8 @@
         </p:blipFill>
         <p:spPr>
           <a:xfrm>
-            <a:off x="6217920" y="1051560"/>
-            <a:ext cx="5212080" cy="4663440"/>
+            <a:off x="5943600" y="1005840"/>
+            <a:ext cx="5577840" cy="3486150"/>
           </a:xfrm>
           <a:prstGeom prst="rect">
             <a:avLst/>
@@ -4014,14 +4334,14 @@
       </p:pic>
       <p:sp>
         <p:nvSpPr>
-          <p:cNvPr id="10" name="TextBox 9"/>
+          <p:cNvPr id="12" name="TextBox 11"/>
           <p:cNvSpPr txBox="1"/>
           <p:nvPr/>
         </p:nvSpPr>
         <p:spPr>
           <a:xfrm>
-            <a:off x="6217920" y="5806440"/>
-            <a:ext cx="5212080" cy="548640"/>
+            <a:off x="5989320" y="4565142"/>
+            <a:ext cx="5486400" cy="777240"/>
           </a:xfrm>
           <a:prstGeom prst="rect">
             <a:avLst/>
@@ -4029,20 +4349,52 @@
           <a:noFill/>
         </p:spPr>
         <p:txBody>
-          <a:bodyPr wrap="square">
+          <a:bodyPr wrap="square" lIns="0" tIns="0" rIns="0" bIns="0">
             <a:spAutoFit/>
           </a:bodyPr>
           <a:lstStyle/>
           <a:p>
             <a:pPr>
-              <a:defRPr sz="1000" b="1">
+              <a:defRPr>
+                <a:latin typeface="Segoe UI"/>
+              </a:defRPr>
+            </a:pPr>
+            <a:r>
+              <a:rPr sz="1000">
+                <a:solidFill>
+                  <a:srgbClr val="16A34A"/>
+                </a:solidFill>
+              </a:rPr>
+              <a:t>● </a:t>
+            </a:r>
+            <a:r>
+              <a:rPr b="1" sz="950">
+                <a:solidFill>
+                  <a:srgbClr val="0F172A"/>
+                </a:solidFill>
+              </a:rPr>
+              <a:t>SUPPORT INSIGHTS, RATINGS &amp; SCENARIO EXPORTS  </a:t>
+            </a:r>
+            <a:r>
+              <a:rPr sz="850">
+                <a:solidFill>
+                  <a:srgbClr val="1E40AF"/>
+                </a:solidFill>
+              </a:rPr>
+              <a:t>(http://localhost:5173/insights)</a:t>
+            </a:r>
+          </a:p>
+          <a:p>
+            <a:pPr>
+              <a:defRPr sz="850">
                 <a:solidFill>
                   <a:srgbClr val="64748B"/>
                 </a:solidFill>
-              </a:defRPr>
-            </a:pPr>
-            <a:r>
-              <a:t>📷 Support Insights &amp; Quality Review: Ratings, Feedback &amp; Scenario Exports</a:t>
+                <a:latin typeface="Segoe UI"/>
+              </a:defRPr>
+            </a:pPr>
+            <a:r>
+              <a:t>Tech Architecture: Review Queue · Turn Feedback · 1-Click Scenario Export</a:t>
             </a:r>
           </a:p>
         </p:txBody>
@@ -4074,7 +4426,7 @@
         <p:spPr>
           <a:xfrm>
             <a:off x="0" y="0"/>
-            <a:ext cx="12191695" cy="777240"/>
+            <a:ext cx="12191695" cy="749808"/>
           </a:xfrm>
           <a:prstGeom prst="rect">
             <a:avLst/>
@@ -4117,7 +4469,7 @@
         <p:spPr>
           <a:xfrm>
             <a:off x="731520" y="164592"/>
-            <a:ext cx="6400800" cy="457200"/>
+            <a:ext cx="6858000" cy="411480"/>
           </a:xfrm>
           <a:prstGeom prst="rect">
             <a:avLst/>
@@ -4131,14 +4483,25 @@
           <a:lstStyle/>
           <a:p>
             <a:pPr>
-              <a:defRPr sz="1300" b="1">
+              <a:defRPr sz="1200" b="1">
+                <a:latin typeface="Segoe UI"/>
+              </a:defRPr>
+            </a:pPr>
+            <a:r>
+              <a:rPr>
                 <a:solidFill>
                   <a:srgbClr val="0EA5E9"/>
                 </a:solidFill>
-              </a:defRPr>
-            </a:pPr>
-            <a:r>
-              <a:t>AZENTIO-CSM  |  BFSI AUTONOMOUS CONVERSATIONAL AI</a:t>
+              </a:rPr>
+              <a:t>AZENTIO-CSM  </a:t>
+            </a:r>
+            <a:r>
+              <a:rPr sz="1100">
+                <a:solidFill>
+                  <a:srgbClr val="FFFFFF"/>
+                </a:solidFill>
+              </a:rPr>
+              <a:t>|  BFSI AUTONOMOUS CONVERSATIONAL VOICE PLATFORM</a:t>
             </a:r>
           </a:p>
         </p:txBody>
@@ -4152,7 +4515,7 @@
         <p:spPr>
           <a:xfrm>
             <a:off x="9601200" y="164592"/>
-            <a:ext cx="1828800" cy="457200"/>
+            <a:ext cx="1828800" cy="411480"/>
           </a:xfrm>
           <a:prstGeom prst="rect">
             <a:avLst/>
@@ -4166,10 +4529,11 @@
           <a:lstStyle/>
           <a:p>
             <a:pPr algn="r">
-              <a:defRPr sz="1200" b="1">
-                <a:solidFill>
-                  <a:srgbClr val="FFFFFF"/>
-                </a:solidFill>
+              <a:defRPr sz="1100" b="1">
+                <a:solidFill>
+                  <a:srgbClr val="CBD5E1"/>
+                </a:solidFill>
+                <a:latin typeface="Segoe UI"/>
               </a:defRPr>
             </a:pPr>
             <a:r>
@@ -4180,182 +4544,23 @@
       </p:sp>
       <p:sp>
         <p:nvSpPr>
-          <p:cNvPr id="5" name="TextBox 4"/>
-          <p:cNvSpPr txBox="1"/>
-          <p:nvPr/>
-        </p:nvSpPr>
-        <p:spPr>
-          <a:xfrm>
-            <a:off x="731520" y="960120"/>
-            <a:ext cx="5303520" cy="5394960"/>
-          </a:xfrm>
-          <a:prstGeom prst="rect">
-            <a:avLst/>
-          </a:prstGeom>
-          <a:noFill/>
-        </p:spPr>
-        <p:txBody>
-          <a:bodyPr wrap="square" lIns="0" tIns="0" rIns="0" bIns="0">
-            <a:spAutoFit/>
-          </a:bodyPr>
-          <a:lstStyle/>
-          <a:p>
-            <a:pPr>
-              <a:defRPr sz="1100" b="1">
-                <a:solidFill>
-                  <a:srgbClr val="2563EB"/>
-                </a:solidFill>
-              </a:defRPr>
-            </a:pPr>
-            <a:r>
-              <a:t>THE PROBLEM &amp; CHALLENGE</a:t>
-            </a:r>
-          </a:p>
-          <a:p>
-            <a:pPr>
-              <a:spcAft>
-                <a:spcPts val="400"/>
-              </a:spcAft>
-              <a:defRPr sz="2000" b="1">
-                <a:solidFill>
-                  <a:srgbClr val="0F172A"/>
-                </a:solidFill>
-              </a:defRPr>
-            </a:pPr>
-            <a:r>
-              <a:t>The High-Stakes Friction in BFSI Customer Service</a:t>
-            </a:r>
-          </a:p>
-          <a:p>
-            <a:pPr>
-              <a:spcAft>
-                <a:spcPts val="1400"/>
-              </a:spcAft>
-              <a:defRPr sz="1200">
-                <a:solidFill>
-                  <a:srgbClr val="64748B"/>
-                </a:solidFill>
-              </a:defRPr>
-            </a:pPr>
-            <a:r>
-              <a:t>Traditional Chatbots Hallucinate; Human Call Centers Are Overwhelmed</a:t>
-            </a:r>
-          </a:p>
-          <a:p>
-            <a:pPr>
-              <a:spcAft>
-                <a:spcPts val="800"/>
-              </a:spcAft>
-            </a:pPr>
-            <a:r>
-              <a:rPr b="1" sz="1150">
-                <a:solidFill>
-                  <a:srgbClr val="0F172A"/>
-                </a:solidFill>
-              </a:rPr>
-              <a:t>•  Financial &amp; Regulatory Risk: </a:t>
-            </a:r>
-            <a:r>
-              <a:rPr sz="1100">
-                <a:solidFill>
-                  <a:srgbClr val="1E293B"/>
-                </a:solidFill>
-              </a:rPr>
-              <a:t>Generic LLM bots hallucinate balances, interest rates, and loan terms, causing severe RBI/compliance penalties.</a:t>
-            </a:r>
-          </a:p>
-          <a:p>
-            <a:pPr>
-              <a:spcAft>
-                <a:spcPts val="800"/>
-              </a:spcAft>
-            </a:pPr>
-            <a:r>
-              <a:rPr b="1" sz="1150">
-                <a:solidFill>
-                  <a:srgbClr val="0F172A"/>
-                </a:solidFill>
-              </a:rPr>
-              <a:t>•  Vernacular &amp; Multilingual Gap: </a:t>
-            </a:r>
-            <a:r>
-              <a:rPr sz="1100">
-                <a:solidFill>
-                  <a:srgbClr val="1E293B"/>
-                </a:solidFill>
-              </a:rPr>
-              <a:t>Over 65% of Tier-2/3 Indian banking customers speak regional languages (Kannada, Hindi), where off-the-shelf bots fail.</a:t>
-            </a:r>
-          </a:p>
-          <a:p>
-            <a:pPr>
-              <a:spcAft>
-                <a:spcPts val="800"/>
-              </a:spcAft>
-            </a:pPr>
-            <a:r>
-              <a:rPr b="1" sz="1150">
-                <a:solidFill>
-                  <a:srgbClr val="0F172A"/>
-                </a:solidFill>
-              </a:rPr>
-              <a:t>•  Security &amp; Verification Vulnerability: </a:t>
-            </a:r>
-            <a:r>
-              <a:rPr sz="1100">
-                <a:solidFill>
-                  <a:srgbClr val="1E293B"/>
-                </a:solidFill>
-              </a:rPr>
-              <a:t>Weak authentication leads to data leakage, social engineering attacks, and compromised customer PII.</a:t>
-            </a:r>
-          </a:p>
-          <a:p>
-            <a:pPr>
-              <a:spcAft>
-                <a:spcPts val="800"/>
-              </a:spcAft>
-            </a:pPr>
-            <a:r>
-              <a:rPr b="1" sz="1150">
-                <a:solidFill>
-                  <a:srgbClr val="0F172A"/>
-                </a:solidFill>
-              </a:rPr>
-              <a:t>•  Black-Box Operations: </a:t>
-            </a:r>
-            <a:r>
-              <a:rPr sz="1100">
-                <a:solidFill>
-                  <a:srgbClr val="1E293B"/>
-                </a:solidFill>
-              </a:rPr>
-              <a:t>Zero explainability into why an AI agent made a decision, with no tamper-evident audit trail for dispute resolution.</a:t>
-            </a:r>
-          </a:p>
-        </p:txBody>
-      </p:sp>
-      <p:sp>
-        <p:nvSpPr>
-          <p:cNvPr id="6" name="Rounded Rectangle 5"/>
+          <p:cNvPr id="5" name="Rounded Rectangle 4"/>
           <p:cNvSpPr/>
           <p:nvPr/>
         </p:nvSpPr>
         <p:spPr>
           <a:xfrm>
-            <a:off x="731520" y="5715000"/>
-            <a:ext cx="5120640" cy="777240"/>
+            <a:off x="731520" y="1005840"/>
+            <a:ext cx="2011680" cy="292608"/>
           </a:xfrm>
           <a:prstGeom prst="roundRect">
             <a:avLst/>
           </a:prstGeom>
           <a:solidFill>
-            <a:srgbClr val="F8FAFC"/>
+            <a:srgbClr val="EEF2FF"/>
           </a:solidFill>
-          <a:ln w="19050">
-            <a:solidFill>
-              <a:srgbClr val="0EA5E9"/>
-            </a:solidFill>
+          <a:ln>
+            <a:noFill/>
           </a:ln>
         </p:spPr>
         <p:style>
@@ -4376,20 +4581,30 @@
           <a:bodyPr rtlCol="0" anchor="ctr"/>
           <a:lstStyle/>
           <a:p>
-            <a:pPr algn="ctr"/>
-          </a:p>
-        </p:txBody>
-      </p:sp>
-      <p:sp>
-        <p:nvSpPr>
-          <p:cNvPr id="7" name="TextBox 6"/>
+            <a:pPr algn="ctr">
+              <a:defRPr sz="950" b="1">
+                <a:solidFill>
+                  <a:srgbClr val="312E81"/>
+                </a:solidFill>
+                <a:latin typeface="Segoe UI"/>
+              </a:defRPr>
+            </a:pPr>
+            <a:r>
+              <a:t>THE PROBLEM &amp; CHALLENGE</a:t>
+            </a:r>
+          </a:p>
+        </p:txBody>
+      </p:sp>
+      <p:sp>
+        <p:nvSpPr>
+          <p:cNvPr id="6" name="TextBox 5"/>
           <p:cNvSpPr txBox="1"/>
           <p:nvPr/>
         </p:nvSpPr>
         <p:spPr>
           <a:xfrm>
-            <a:off x="868680" y="5779008"/>
-            <a:ext cx="4846320" cy="640080"/>
+            <a:off x="731520" y="1353312"/>
+            <a:ext cx="4937760" cy="4114800"/>
           </a:xfrm>
           <a:prstGeom prst="rect">
             <a:avLst/>
@@ -4397,16 +4612,296 @@
           <a:noFill/>
         </p:spPr>
         <p:txBody>
-          <a:bodyPr wrap="square">
+          <a:bodyPr wrap="square" lIns="0" tIns="0" rIns="0" bIns="0">
             <a:spAutoFit/>
           </a:bodyPr>
           <a:lstStyle/>
           <a:p>
             <a:pPr>
-              <a:defRPr sz="1500" b="1">
-                <a:solidFill>
-                  <a:srgbClr val="2563EB"/>
-                </a:solidFill>
+              <a:spcAft>
+                <a:spcPts val="400"/>
+              </a:spcAft>
+              <a:defRPr sz="2100" b="1">
+                <a:solidFill>
+                  <a:srgbClr val="0F172A"/>
+                </a:solidFill>
+                <a:latin typeface="Segoe UI"/>
+              </a:defRPr>
+            </a:pPr>
+            <a:r>
+              <a:t>The High-Stakes Friction in BFSI Customer Service</a:t>
+            </a:r>
+          </a:p>
+          <a:p>
+            <a:pPr>
+              <a:spcAft>
+                <a:spcPts val="1400"/>
+              </a:spcAft>
+              <a:defRPr sz="1150">
+                <a:solidFill>
+                  <a:srgbClr val="64748B"/>
+                </a:solidFill>
+                <a:latin typeface="Segoe UI"/>
+              </a:defRPr>
+            </a:pPr>
+            <a:r>
+              <a:t>Traditional Chatbots Hallucinate; Human Call Centers Are Overwhelmed</a:t>
+            </a:r>
+          </a:p>
+          <a:p>
+            <a:pPr>
+              <a:spcAft>
+                <a:spcPts val="700"/>
+              </a:spcAft>
+            </a:pPr>
+            <a:r>
+              <a:rPr b="1" sz="1100">
+                <a:solidFill>
+                  <a:srgbClr val="1E40AF"/>
+                </a:solidFill>
+                <a:latin typeface="Segoe UI"/>
+              </a:rPr>
+              <a:t>• </a:t>
+            </a:r>
+            <a:r>
+              <a:rPr b="1" sz="1100">
+                <a:solidFill>
+                  <a:srgbClr val="0F172A"/>
+                </a:solidFill>
+                <a:latin typeface="Segoe UI"/>
+              </a:rPr>
+              <a:t>Financial &amp; Regulatory Risk: </a:t>
+            </a:r>
+            <a:r>
+              <a:rPr sz="1050">
+                <a:solidFill>
+                  <a:srgbClr val="334155"/>
+                </a:solidFill>
+                <a:latin typeface="Segoe UI"/>
+              </a:rPr>
+              <a:t>Generic LLM bots hallucinate balances, interest rates, and loan terms, causing severe RBI/compliance penalties.</a:t>
+            </a:r>
+          </a:p>
+          <a:p>
+            <a:pPr>
+              <a:spcAft>
+                <a:spcPts val="700"/>
+              </a:spcAft>
+            </a:pPr>
+            <a:r>
+              <a:rPr b="1" sz="1100">
+                <a:solidFill>
+                  <a:srgbClr val="1E40AF"/>
+                </a:solidFill>
+                <a:latin typeface="Segoe UI"/>
+              </a:rPr>
+              <a:t>• </a:t>
+            </a:r>
+            <a:r>
+              <a:rPr b="1" sz="1100">
+                <a:solidFill>
+                  <a:srgbClr val="0F172A"/>
+                </a:solidFill>
+                <a:latin typeface="Segoe UI"/>
+              </a:rPr>
+              <a:t>Vernacular &amp; Multilingual Gap: </a:t>
+            </a:r>
+            <a:r>
+              <a:rPr sz="1050">
+                <a:solidFill>
+                  <a:srgbClr val="334155"/>
+                </a:solidFill>
+                <a:latin typeface="Segoe UI"/>
+              </a:rPr>
+              <a:t>Over 65% of Tier-2/3 Indian banking customers speak regional languages (Kannada, Hindi), where off-the-shelf bots fail.</a:t>
+            </a:r>
+          </a:p>
+          <a:p>
+            <a:pPr>
+              <a:spcAft>
+                <a:spcPts val="700"/>
+              </a:spcAft>
+            </a:pPr>
+            <a:r>
+              <a:rPr b="1" sz="1100">
+                <a:solidFill>
+                  <a:srgbClr val="1E40AF"/>
+                </a:solidFill>
+                <a:latin typeface="Segoe UI"/>
+              </a:rPr>
+              <a:t>• </a:t>
+            </a:r>
+            <a:r>
+              <a:rPr b="1" sz="1100">
+                <a:solidFill>
+                  <a:srgbClr val="0F172A"/>
+                </a:solidFill>
+                <a:latin typeface="Segoe UI"/>
+              </a:rPr>
+              <a:t>Security &amp; Verification Vulnerability: </a:t>
+            </a:r>
+            <a:r>
+              <a:rPr sz="1050">
+                <a:solidFill>
+                  <a:srgbClr val="334155"/>
+                </a:solidFill>
+                <a:latin typeface="Segoe UI"/>
+              </a:rPr>
+              <a:t>Weak authentication leads to data leakage, social engineering attacks, and compromised customer PII.</a:t>
+            </a:r>
+          </a:p>
+          <a:p>
+            <a:pPr>
+              <a:spcAft>
+                <a:spcPts val="700"/>
+              </a:spcAft>
+            </a:pPr>
+            <a:r>
+              <a:rPr b="1" sz="1100">
+                <a:solidFill>
+                  <a:srgbClr val="1E40AF"/>
+                </a:solidFill>
+                <a:latin typeface="Segoe UI"/>
+              </a:rPr>
+              <a:t>• </a:t>
+            </a:r>
+            <a:r>
+              <a:rPr b="1" sz="1100">
+                <a:solidFill>
+                  <a:srgbClr val="0F172A"/>
+                </a:solidFill>
+                <a:latin typeface="Segoe UI"/>
+              </a:rPr>
+              <a:t>Black-Box Operations: </a:t>
+            </a:r>
+            <a:r>
+              <a:rPr sz="1050">
+                <a:solidFill>
+                  <a:srgbClr val="334155"/>
+                </a:solidFill>
+                <a:latin typeface="Segoe UI"/>
+              </a:rPr>
+              <a:t>Zero explainability into why an AI agent made a decision, with no tamper-evident audit trail for dispute resolution.</a:t>
+            </a:r>
+          </a:p>
+        </p:txBody>
+      </p:sp>
+      <p:sp>
+        <p:nvSpPr>
+          <p:cNvPr id="7" name="Rounded Rectangle 6"/>
+          <p:cNvSpPr/>
+          <p:nvPr/>
+        </p:nvSpPr>
+        <p:spPr>
+          <a:xfrm>
+            <a:off x="731520" y="5623560"/>
+            <a:ext cx="4937760" cy="868680"/>
+          </a:xfrm>
+          <a:prstGeom prst="roundRect">
+            <a:avLst/>
+          </a:prstGeom>
+          <a:solidFill>
+            <a:srgbClr val="F8FAFC"/>
+          </a:solidFill>
+          <a:ln w="12700">
+            <a:solidFill>
+              <a:srgbClr val="E2E8F0"/>
+            </a:solidFill>
+          </a:ln>
+        </p:spPr>
+        <p:style>
+          <a:lnRef idx="1">
+            <a:schemeClr val="accent1"/>
+          </a:lnRef>
+          <a:fillRef idx="3">
+            <a:schemeClr val="accent1"/>
+          </a:fillRef>
+          <a:effectRef idx="2">
+            <a:schemeClr val="accent1"/>
+          </a:effectRef>
+          <a:fontRef idx="minor">
+            <a:schemeClr val="lt1"/>
+          </a:fontRef>
+        </p:style>
+        <p:txBody>
+          <a:bodyPr rtlCol="0" anchor="ctr"/>
+          <a:lstStyle/>
+          <a:p>
+            <a:pPr algn="ctr"/>
+          </a:p>
+        </p:txBody>
+      </p:sp>
+      <p:sp>
+        <p:nvSpPr>
+          <p:cNvPr id="8" name="Rectangle 7"/>
+          <p:cNvSpPr/>
+          <p:nvPr/>
+        </p:nvSpPr>
+        <p:spPr>
+          <a:xfrm>
+            <a:off x="731520" y="5623560"/>
+            <a:ext cx="73152" cy="868680"/>
+          </a:xfrm>
+          <a:prstGeom prst="rect">
+            <a:avLst/>
+          </a:prstGeom>
+          <a:solidFill>
+            <a:srgbClr val="1E40AF"/>
+          </a:solidFill>
+          <a:ln>
+            <a:noFill/>
+          </a:ln>
+        </p:spPr>
+        <p:style>
+          <a:lnRef idx="1">
+            <a:schemeClr val="accent1"/>
+          </a:lnRef>
+          <a:fillRef idx="3">
+            <a:schemeClr val="accent1"/>
+          </a:fillRef>
+          <a:effectRef idx="2">
+            <a:schemeClr val="accent1"/>
+          </a:effectRef>
+          <a:fontRef idx="minor">
+            <a:schemeClr val="lt1"/>
+          </a:fontRef>
+        </p:style>
+        <p:txBody>
+          <a:bodyPr rtlCol="0" anchor="ctr"/>
+          <a:lstStyle/>
+          <a:p>
+            <a:pPr algn="ctr"/>
+          </a:p>
+        </p:txBody>
+      </p:sp>
+      <p:sp>
+        <p:nvSpPr>
+          <p:cNvPr id="9" name="TextBox 8"/>
+          <p:cNvSpPr txBox="1"/>
+          <p:nvPr/>
+        </p:nvSpPr>
+        <p:spPr>
+          <a:xfrm>
+            <a:off x="914400" y="5733288"/>
+            <a:ext cx="4572000" cy="649224"/>
+          </a:xfrm>
+          <a:prstGeom prst="rect">
+            <a:avLst/>
+          </a:prstGeom>
+          <a:noFill/>
+        </p:spPr>
+        <p:txBody>
+          <a:bodyPr wrap="square" lIns="0" tIns="0" rIns="0" bIns="0">
+            <a:spAutoFit/>
+          </a:bodyPr>
+          <a:lstStyle/>
+          <a:p>
+            <a:pPr>
+              <a:defRPr sz="1600" b="1">
+                <a:solidFill>
+                  <a:srgbClr val="1E40AF"/>
+                </a:solidFill>
+                <a:latin typeface="Segoe UI"/>
               </a:defRPr>
             </a:pPr>
             <a:r>
@@ -4415,28 +4910,29 @@
           </a:p>
           <a:p>
             <a:pPr>
-              <a:defRPr sz="1000">
+              <a:defRPr sz="950">
                 <a:solidFill>
                   <a:srgbClr val="64748B"/>
                 </a:solidFill>
-              </a:defRPr>
-            </a:pPr>
-            <a:r>
-              <a:t>Demands Regional Language Support</a:t>
-            </a:r>
-          </a:p>
-        </p:txBody>
-      </p:sp>
-      <p:sp>
-        <p:nvSpPr>
-          <p:cNvPr id="8" name="Rounded Rectangle 7"/>
+                <a:latin typeface="Segoe UI"/>
+              </a:defRPr>
+            </a:pPr>
+            <a:r>
+              <a:t>Demands Vernacular Regional Language Support</a:t>
+            </a:r>
+          </a:p>
+        </p:txBody>
+      </p:sp>
+      <p:sp>
+        <p:nvSpPr>
+          <p:cNvPr id="10" name="Rounded Rectangle 9"/>
           <p:cNvSpPr/>
           <p:nvPr/>
         </p:nvSpPr>
         <p:spPr>
           <a:xfrm>
-            <a:off x="6144768" y="978408"/>
-            <a:ext cx="5358384" cy="5440680"/>
+            <a:off x="5870448" y="932688"/>
+            <a:ext cx="5724144" cy="4446270"/>
           </a:xfrm>
           <a:prstGeom prst="roundRect">
             <a:avLst/>
@@ -4474,7 +4970,7 @@
       </p:sp>
       <p:pic>
         <p:nvPicPr>
-          <p:cNvPr id="9" name="Picture 8" descr="02_dashboard.png"/>
+          <p:cNvPr id="11" name="Picture 10" descr="02_dashboard.png"/>
           <p:cNvPicPr>
             <a:picLocks noChangeAspect="1"/>
           </p:cNvPicPr>
@@ -4488,8 +4984,8 @@
         </p:blipFill>
         <p:spPr>
           <a:xfrm>
-            <a:off x="6217920" y="1051560"/>
-            <a:ext cx="5212080" cy="4663440"/>
+            <a:off x="5943600" y="1005840"/>
+            <a:ext cx="5577840" cy="3486150"/>
           </a:xfrm>
           <a:prstGeom prst="rect">
             <a:avLst/>
@@ -4498,14 +4994,14 @@
       </p:pic>
       <p:sp>
         <p:nvSpPr>
-          <p:cNvPr id="10" name="TextBox 9"/>
+          <p:cNvPr id="12" name="TextBox 11"/>
           <p:cNvSpPr txBox="1"/>
           <p:nvPr/>
         </p:nvSpPr>
         <p:spPr>
           <a:xfrm>
-            <a:off x="6217920" y="5806440"/>
-            <a:ext cx="5212080" cy="548640"/>
+            <a:off x="5989320" y="4565142"/>
+            <a:ext cx="5486400" cy="777240"/>
           </a:xfrm>
           <a:prstGeom prst="rect">
             <a:avLst/>
@@ -4513,20 +5009,52 @@
           <a:noFill/>
         </p:spPr>
         <p:txBody>
-          <a:bodyPr wrap="square">
+          <a:bodyPr wrap="square" lIns="0" tIns="0" rIns="0" bIns="0">
             <a:spAutoFit/>
           </a:bodyPr>
           <a:lstStyle/>
           <a:p>
             <a:pPr>
-              <a:defRPr sz="1000" b="1">
+              <a:defRPr>
+                <a:latin typeface="Segoe UI"/>
+              </a:defRPr>
+            </a:pPr>
+            <a:r>
+              <a:rPr sz="1000">
+                <a:solidFill>
+                  <a:srgbClr val="16A34A"/>
+                </a:solidFill>
+              </a:rPr>
+              <a:t>● </a:t>
+            </a:r>
+            <a:r>
+              <a:rPr b="1" sz="950">
+                <a:solidFill>
+                  <a:srgbClr val="0F172A"/>
+                </a:solidFill>
+              </a:rPr>
+              <a:t>EXECUTIVE DASHBOARD &amp; INTENT TRENDS  </a:t>
+            </a:r>
+            <a:r>
+              <a:rPr sz="850">
+                <a:solidFill>
+                  <a:srgbClr val="1E40AF"/>
+                </a:solidFill>
+              </a:rPr>
+              <a:t>(http://localhost:5173/dashboard)</a:t>
+            </a:r>
+          </a:p>
+          <a:p>
+            <a:pPr>
+              <a:defRPr sz="850">
                 <a:solidFill>
                   <a:srgbClr val="64748B"/>
                 </a:solidFill>
-              </a:defRPr>
-            </a:pPr>
-            <a:r>
-              <a:t>📷 Real-Time Operations Analytics &amp; Intent Trends on localhost:5173/dashboard</a:t>
+                <a:latin typeface="Segoe UI"/>
+              </a:defRPr>
+            </a:pPr>
+            <a:r>
+              <a:t>Tech Architecture: Rolling 7-Day Intent Classification · Live Model Cooldown Tracker</a:t>
             </a:r>
           </a:p>
         </p:txBody>
@@ -4558,7 +5086,7 @@
         <p:spPr>
           <a:xfrm>
             <a:off x="0" y="0"/>
-            <a:ext cx="12191695" cy="777240"/>
+            <a:ext cx="12191695" cy="749808"/>
           </a:xfrm>
           <a:prstGeom prst="rect">
             <a:avLst/>
@@ -4601,7 +5129,7 @@
         <p:spPr>
           <a:xfrm>
             <a:off x="731520" y="164592"/>
-            <a:ext cx="6400800" cy="457200"/>
+            <a:ext cx="6858000" cy="411480"/>
           </a:xfrm>
           <a:prstGeom prst="rect">
             <a:avLst/>
@@ -4615,14 +5143,25 @@
           <a:lstStyle/>
           <a:p>
             <a:pPr>
-              <a:defRPr sz="1300" b="1">
+              <a:defRPr sz="1200" b="1">
+                <a:latin typeface="Segoe UI"/>
+              </a:defRPr>
+            </a:pPr>
+            <a:r>
+              <a:rPr>
                 <a:solidFill>
                   <a:srgbClr val="0EA5E9"/>
                 </a:solidFill>
-              </a:defRPr>
-            </a:pPr>
-            <a:r>
-              <a:t>AZENTIO-CSM  |  BFSI AUTONOMOUS CONVERSATIONAL AI</a:t>
+              </a:rPr>
+              <a:t>AZENTIO-CSM  </a:t>
+            </a:r>
+            <a:r>
+              <a:rPr sz="1100">
+                <a:solidFill>
+                  <a:srgbClr val="FFFFFF"/>
+                </a:solidFill>
+              </a:rPr>
+              <a:t>|  BFSI AUTONOMOUS CONVERSATIONAL VOICE PLATFORM</a:t>
             </a:r>
           </a:p>
         </p:txBody>
@@ -4636,7 +5175,7 @@
         <p:spPr>
           <a:xfrm>
             <a:off x="9601200" y="164592"/>
-            <a:ext cx="1828800" cy="457200"/>
+            <a:ext cx="1828800" cy="411480"/>
           </a:xfrm>
           <a:prstGeom prst="rect">
             <a:avLst/>
@@ -4650,10 +5189,11 @@
           <a:lstStyle/>
           <a:p>
             <a:pPr algn="r">
-              <a:defRPr sz="1200" b="1">
-                <a:solidFill>
-                  <a:srgbClr val="FFFFFF"/>
-                </a:solidFill>
+              <a:defRPr sz="1100" b="1">
+                <a:solidFill>
+                  <a:srgbClr val="CBD5E1"/>
+                </a:solidFill>
+                <a:latin typeface="Segoe UI"/>
               </a:defRPr>
             </a:pPr>
             <a:r>
@@ -4664,182 +5204,23 @@
       </p:sp>
       <p:sp>
         <p:nvSpPr>
-          <p:cNvPr id="5" name="TextBox 4"/>
-          <p:cNvSpPr txBox="1"/>
-          <p:nvPr/>
-        </p:nvSpPr>
-        <p:spPr>
-          <a:xfrm>
-            <a:off x="731520" y="960120"/>
-            <a:ext cx="5303520" cy="5394960"/>
-          </a:xfrm>
-          <a:prstGeom prst="rect">
-            <a:avLst/>
-          </a:prstGeom>
-          <a:noFill/>
-        </p:spPr>
-        <p:txBody>
-          <a:bodyPr wrap="square" lIns="0" tIns="0" rIns="0" bIns="0">
-            <a:spAutoFit/>
-          </a:bodyPr>
-          <a:lstStyle/>
-          <a:p>
-            <a:pPr>
-              <a:defRPr sz="1100" b="1">
-                <a:solidFill>
-                  <a:srgbClr val="2563EB"/>
-                </a:solidFill>
-              </a:defRPr>
-            </a:pPr>
-            <a:r>
-              <a:t>SYSTEM ARCHITECTURE</a:t>
-            </a:r>
-          </a:p>
-          <a:p>
-            <a:pPr>
-              <a:spcAft>
-                <a:spcPts val="400"/>
-              </a:spcAft>
-              <a:defRPr sz="2000" b="1">
-                <a:solidFill>
-                  <a:srgbClr val="0F172A"/>
-                </a:solidFill>
-              </a:defRPr>
-            </a:pPr>
-            <a:r>
-              <a:t>Defense-in-Depth Microservice Architecture</a:t>
-            </a:r>
-          </a:p>
-          <a:p>
-            <a:pPr>
-              <a:spcAft>
-                <a:spcPts val="1400"/>
-              </a:spcAft>
-              <a:defRPr sz="1200">
-                <a:solidFill>
-                  <a:srgbClr val="64748B"/>
-                </a:solidFill>
-              </a:defRPr>
-            </a:pPr>
-            <a:r>
-              <a:t>Modular, Multi-Model Resilience with Strict Service Separation</a:t>
-            </a:r>
-          </a:p>
-          <a:p>
-            <a:pPr>
-              <a:spcAft>
-                <a:spcPts val="800"/>
-              </a:spcAft>
-            </a:pPr>
-            <a:r>
-              <a:rPr b="1" sz="1150">
-                <a:solidFill>
-                  <a:srgbClr val="0F172A"/>
-                </a:solidFill>
-              </a:rPr>
-              <a:t>•  Dual Ingress Channels: </a:t>
-            </a:r>
-            <a:r>
-              <a:rPr sz="1100">
-                <a:solidFill>
-                  <a:srgbClr val="1E293B"/>
-                </a:solidFill>
-              </a:rPr>
-              <a:t>WebRTC browser peer connection (&lt;350ms glass-to-glass) + Twilio Carrier Telephony (PSTN/SIP voice streaming).</a:t>
-            </a:r>
-          </a:p>
-          <a:p>
-            <a:pPr>
-              <a:spcAft>
-                <a:spcPts val="800"/>
-              </a:spcAft>
-            </a:pPr>
-            <a:r>
-              <a:rPr b="1" sz="1150">
-                <a:solidFill>
-                  <a:srgbClr val="0F172A"/>
-                </a:solidFill>
-              </a:rPr>
-              <a:t>•  Multi-Model Resilience Chain: </a:t>
-            </a:r>
-            <a:r>
-              <a:rPr sz="1100">
-                <a:solidFill>
-                  <a:srgbClr val="1E293B"/>
-                </a:solidFill>
-              </a:rPr>
-              <a:t>Dynamic failover across Groq GPT-OSS 120B -&gt; 20B -&gt; Local LLaMA 3.2 Ollama with automatic cooldown &amp; health monitoring.</a:t>
-            </a:r>
-          </a:p>
-          <a:p>
-            <a:pPr>
-              <a:spcAft>
-                <a:spcPts val="800"/>
-              </a:spcAft>
-            </a:pPr>
-            <a:r>
-              <a:rPr b="1" sz="1150">
-                <a:solidFill>
-                  <a:srgbClr val="0F172A"/>
-                </a:solidFill>
-              </a:rPr>
-              <a:t>•  Clean Microservices: </a:t>
-            </a:r>
-            <a:r>
-              <a:rPr sz="1100">
-                <a:solidFill>
-                  <a:srgbClr val="1E293B"/>
-                </a:solidFill>
-              </a:rPr>
-              <a:t>Core API (8080) + Core Banking Simulator (8090) + Pipecat Voice Pipeline (7861) + Modern React Desk (5173).</a:t>
-            </a:r>
-          </a:p>
-          <a:p>
-            <a:pPr>
-              <a:spcAft>
-                <a:spcPts val="800"/>
-              </a:spcAft>
-            </a:pPr>
-            <a:r>
-              <a:rPr b="1" sz="1150">
-                <a:solidFill>
-                  <a:srgbClr val="0F172A"/>
-                </a:solidFill>
-              </a:rPr>
-              <a:t>•  100% Modern Python &amp; TypeScript: </a:t>
-            </a:r>
-            <a:r>
-              <a:rPr sz="1100">
-                <a:solidFill>
-                  <a:srgbClr val="1E293B"/>
-                </a:solidFill>
-              </a:rPr>
-              <a:t>Completely eliminated legacy Java dependencies for lightning-fast container startup and agile CI/CD.</a:t>
-            </a:r>
-          </a:p>
-        </p:txBody>
-      </p:sp>
-      <p:sp>
-        <p:nvSpPr>
-          <p:cNvPr id="6" name="Rounded Rectangle 5"/>
+          <p:cNvPr id="5" name="Rounded Rectangle 4"/>
           <p:cNvSpPr/>
           <p:nvPr/>
         </p:nvSpPr>
         <p:spPr>
           <a:xfrm>
-            <a:off x="731520" y="5715000"/>
-            <a:ext cx="5120640" cy="777240"/>
+            <a:off x="731520" y="1005840"/>
+            <a:ext cx="2011680" cy="292608"/>
           </a:xfrm>
           <a:prstGeom prst="roundRect">
             <a:avLst/>
           </a:prstGeom>
           <a:solidFill>
-            <a:srgbClr val="F8FAFC"/>
+            <a:srgbClr val="EEF2FF"/>
           </a:solidFill>
-          <a:ln w="19050">
-            <a:solidFill>
-              <a:srgbClr val="0EA5E9"/>
-            </a:solidFill>
+          <a:ln>
+            <a:noFill/>
           </a:ln>
         </p:spPr>
         <p:style>
@@ -4860,20 +5241,30 @@
           <a:bodyPr rtlCol="0" anchor="ctr"/>
           <a:lstStyle/>
           <a:p>
-            <a:pPr algn="ctr"/>
-          </a:p>
-        </p:txBody>
-      </p:sp>
-      <p:sp>
-        <p:nvSpPr>
-          <p:cNvPr id="7" name="TextBox 6"/>
+            <a:pPr algn="ctr">
+              <a:defRPr sz="950" b="1">
+                <a:solidFill>
+                  <a:srgbClr val="312E81"/>
+                </a:solidFill>
+                <a:latin typeface="Segoe UI"/>
+              </a:defRPr>
+            </a:pPr>
+            <a:r>
+              <a:t>SYSTEM ARCHITECTURE</a:t>
+            </a:r>
+          </a:p>
+        </p:txBody>
+      </p:sp>
+      <p:sp>
+        <p:nvSpPr>
+          <p:cNvPr id="6" name="TextBox 5"/>
           <p:cNvSpPr txBox="1"/>
           <p:nvPr/>
         </p:nvSpPr>
         <p:spPr>
           <a:xfrm>
-            <a:off x="868680" y="5779008"/>
-            <a:ext cx="4846320" cy="640080"/>
+            <a:off x="731520" y="1353312"/>
+            <a:ext cx="4937760" cy="4114800"/>
           </a:xfrm>
           <a:prstGeom prst="rect">
             <a:avLst/>
@@ -4881,16 +5272,296 @@
           <a:noFill/>
         </p:spPr>
         <p:txBody>
-          <a:bodyPr wrap="square">
+          <a:bodyPr wrap="square" lIns="0" tIns="0" rIns="0" bIns="0">
             <a:spAutoFit/>
           </a:bodyPr>
           <a:lstStyle/>
           <a:p>
             <a:pPr>
-              <a:defRPr sz="1500" b="1">
-                <a:solidFill>
-                  <a:srgbClr val="2563EB"/>
-                </a:solidFill>
+              <a:spcAft>
+                <a:spcPts val="400"/>
+              </a:spcAft>
+              <a:defRPr sz="2100" b="1">
+                <a:solidFill>
+                  <a:srgbClr val="0F172A"/>
+                </a:solidFill>
+                <a:latin typeface="Segoe UI"/>
+              </a:defRPr>
+            </a:pPr>
+            <a:r>
+              <a:t>Defense-in-Depth Microservice Architecture</a:t>
+            </a:r>
+          </a:p>
+          <a:p>
+            <a:pPr>
+              <a:spcAft>
+                <a:spcPts val="1400"/>
+              </a:spcAft>
+              <a:defRPr sz="1150">
+                <a:solidFill>
+                  <a:srgbClr val="64748B"/>
+                </a:solidFill>
+                <a:latin typeface="Segoe UI"/>
+              </a:defRPr>
+            </a:pPr>
+            <a:r>
+              <a:t>Modular, Multi-Model Resilience with Strict Service Separation</a:t>
+            </a:r>
+          </a:p>
+          <a:p>
+            <a:pPr>
+              <a:spcAft>
+                <a:spcPts val="700"/>
+              </a:spcAft>
+            </a:pPr>
+            <a:r>
+              <a:rPr b="1" sz="1100">
+                <a:solidFill>
+                  <a:srgbClr val="1E40AF"/>
+                </a:solidFill>
+                <a:latin typeface="Segoe UI"/>
+              </a:rPr>
+              <a:t>• </a:t>
+            </a:r>
+            <a:r>
+              <a:rPr b="1" sz="1100">
+                <a:solidFill>
+                  <a:srgbClr val="0F172A"/>
+                </a:solidFill>
+                <a:latin typeface="Segoe UI"/>
+              </a:rPr>
+              <a:t>Dual Ingress Channels: </a:t>
+            </a:r>
+            <a:r>
+              <a:rPr sz="1050">
+                <a:solidFill>
+                  <a:srgbClr val="334155"/>
+                </a:solidFill>
+                <a:latin typeface="Segoe UI"/>
+              </a:rPr>
+              <a:t>WebRTC browser peer connection (&lt;350ms glass-to-glass) + Twilio Carrier Telephony (PSTN/SIP voice streaming).</a:t>
+            </a:r>
+          </a:p>
+          <a:p>
+            <a:pPr>
+              <a:spcAft>
+                <a:spcPts val="700"/>
+              </a:spcAft>
+            </a:pPr>
+            <a:r>
+              <a:rPr b="1" sz="1100">
+                <a:solidFill>
+                  <a:srgbClr val="1E40AF"/>
+                </a:solidFill>
+                <a:latin typeface="Segoe UI"/>
+              </a:rPr>
+              <a:t>• </a:t>
+            </a:r>
+            <a:r>
+              <a:rPr b="1" sz="1100">
+                <a:solidFill>
+                  <a:srgbClr val="0F172A"/>
+                </a:solidFill>
+                <a:latin typeface="Segoe UI"/>
+              </a:rPr>
+              <a:t>Multi-Model Resilience Chain: </a:t>
+            </a:r>
+            <a:r>
+              <a:rPr sz="1050">
+                <a:solidFill>
+                  <a:srgbClr val="334155"/>
+                </a:solidFill>
+                <a:latin typeface="Segoe UI"/>
+              </a:rPr>
+              <a:t>Dynamic failover across Groq GPT-OSS 120B -&gt; 20B -&gt; Local LLaMA 3.2 Ollama with automatic cooldown &amp; health monitoring.</a:t>
+            </a:r>
+          </a:p>
+          <a:p>
+            <a:pPr>
+              <a:spcAft>
+                <a:spcPts val="700"/>
+              </a:spcAft>
+            </a:pPr>
+            <a:r>
+              <a:rPr b="1" sz="1100">
+                <a:solidFill>
+                  <a:srgbClr val="1E40AF"/>
+                </a:solidFill>
+                <a:latin typeface="Segoe UI"/>
+              </a:rPr>
+              <a:t>• </a:t>
+            </a:r>
+            <a:r>
+              <a:rPr b="1" sz="1100">
+                <a:solidFill>
+                  <a:srgbClr val="0F172A"/>
+                </a:solidFill>
+                <a:latin typeface="Segoe UI"/>
+              </a:rPr>
+              <a:t>Clean Microservices: </a:t>
+            </a:r>
+            <a:r>
+              <a:rPr sz="1050">
+                <a:solidFill>
+                  <a:srgbClr val="334155"/>
+                </a:solidFill>
+                <a:latin typeface="Segoe UI"/>
+              </a:rPr>
+              <a:t>Core API (8080) + Core Banking Simulator (8090) + Pipecat Voice Pipeline (7861) + Modern React Desk (5173).</a:t>
+            </a:r>
+          </a:p>
+          <a:p>
+            <a:pPr>
+              <a:spcAft>
+                <a:spcPts val="700"/>
+              </a:spcAft>
+            </a:pPr>
+            <a:r>
+              <a:rPr b="1" sz="1100">
+                <a:solidFill>
+                  <a:srgbClr val="1E40AF"/>
+                </a:solidFill>
+                <a:latin typeface="Segoe UI"/>
+              </a:rPr>
+              <a:t>• </a:t>
+            </a:r>
+            <a:r>
+              <a:rPr b="1" sz="1100">
+                <a:solidFill>
+                  <a:srgbClr val="0F172A"/>
+                </a:solidFill>
+                <a:latin typeface="Segoe UI"/>
+              </a:rPr>
+              <a:t>100% Modern Python &amp; TypeScript: </a:t>
+            </a:r>
+            <a:r>
+              <a:rPr sz="1050">
+                <a:solidFill>
+                  <a:srgbClr val="334155"/>
+                </a:solidFill>
+                <a:latin typeface="Segoe UI"/>
+              </a:rPr>
+              <a:t>Completely eliminated legacy Java dependencies for lightning-fast container startup and agile CI/CD.</a:t>
+            </a:r>
+          </a:p>
+        </p:txBody>
+      </p:sp>
+      <p:sp>
+        <p:nvSpPr>
+          <p:cNvPr id="7" name="Rounded Rectangle 6"/>
+          <p:cNvSpPr/>
+          <p:nvPr/>
+        </p:nvSpPr>
+        <p:spPr>
+          <a:xfrm>
+            <a:off x="731520" y="5623560"/>
+            <a:ext cx="4937760" cy="868680"/>
+          </a:xfrm>
+          <a:prstGeom prst="roundRect">
+            <a:avLst/>
+          </a:prstGeom>
+          <a:solidFill>
+            <a:srgbClr val="F8FAFC"/>
+          </a:solidFill>
+          <a:ln w="12700">
+            <a:solidFill>
+              <a:srgbClr val="E2E8F0"/>
+            </a:solidFill>
+          </a:ln>
+        </p:spPr>
+        <p:style>
+          <a:lnRef idx="1">
+            <a:schemeClr val="accent1"/>
+          </a:lnRef>
+          <a:fillRef idx="3">
+            <a:schemeClr val="accent1"/>
+          </a:fillRef>
+          <a:effectRef idx="2">
+            <a:schemeClr val="accent1"/>
+          </a:effectRef>
+          <a:fontRef idx="minor">
+            <a:schemeClr val="lt1"/>
+          </a:fontRef>
+        </p:style>
+        <p:txBody>
+          <a:bodyPr rtlCol="0" anchor="ctr"/>
+          <a:lstStyle/>
+          <a:p>
+            <a:pPr algn="ctr"/>
+          </a:p>
+        </p:txBody>
+      </p:sp>
+      <p:sp>
+        <p:nvSpPr>
+          <p:cNvPr id="8" name="Rectangle 7"/>
+          <p:cNvSpPr/>
+          <p:nvPr/>
+        </p:nvSpPr>
+        <p:spPr>
+          <a:xfrm>
+            <a:off x="731520" y="5623560"/>
+            <a:ext cx="73152" cy="868680"/>
+          </a:xfrm>
+          <a:prstGeom prst="rect">
+            <a:avLst/>
+          </a:prstGeom>
+          <a:solidFill>
+            <a:srgbClr val="1E40AF"/>
+          </a:solidFill>
+          <a:ln>
+            <a:noFill/>
+          </a:ln>
+        </p:spPr>
+        <p:style>
+          <a:lnRef idx="1">
+            <a:schemeClr val="accent1"/>
+          </a:lnRef>
+          <a:fillRef idx="3">
+            <a:schemeClr val="accent1"/>
+          </a:fillRef>
+          <a:effectRef idx="2">
+            <a:schemeClr val="accent1"/>
+          </a:effectRef>
+          <a:fontRef idx="minor">
+            <a:schemeClr val="lt1"/>
+          </a:fontRef>
+        </p:style>
+        <p:txBody>
+          <a:bodyPr rtlCol="0" anchor="ctr"/>
+          <a:lstStyle/>
+          <a:p>
+            <a:pPr algn="ctr"/>
+          </a:p>
+        </p:txBody>
+      </p:sp>
+      <p:sp>
+        <p:nvSpPr>
+          <p:cNvPr id="9" name="TextBox 8"/>
+          <p:cNvSpPr txBox="1"/>
+          <p:nvPr/>
+        </p:nvSpPr>
+        <p:spPr>
+          <a:xfrm>
+            <a:off x="914400" y="5733288"/>
+            <a:ext cx="4572000" cy="649224"/>
+          </a:xfrm>
+          <a:prstGeom prst="rect">
+            <a:avLst/>
+          </a:prstGeom>
+          <a:noFill/>
+        </p:spPr>
+        <p:txBody>
+          <a:bodyPr wrap="square" lIns="0" tIns="0" rIns="0" bIns="0">
+            <a:spAutoFit/>
+          </a:bodyPr>
+          <a:lstStyle/>
+          <a:p>
+            <a:pPr>
+              <a:defRPr sz="1600" b="1">
+                <a:solidFill>
+                  <a:srgbClr val="1E40AF"/>
+                </a:solidFill>
+                <a:latin typeface="Segoe UI"/>
               </a:defRPr>
             </a:pPr>
             <a:r>
@@ -4899,28 +5570,29 @@
           </a:p>
           <a:p>
             <a:pPr>
-              <a:defRPr sz="1000">
+              <a:defRPr sz="950">
                 <a:solidFill>
                   <a:srgbClr val="64748B"/>
                 </a:solidFill>
-              </a:defRPr>
-            </a:pPr>
-            <a:r>
-              <a:t>End-to-End Voice Response</a:t>
-            </a:r>
-          </a:p>
-        </p:txBody>
-      </p:sp>
-      <p:sp>
-        <p:nvSpPr>
-          <p:cNvPr id="8" name="Rounded Rectangle 7"/>
+                <a:latin typeface="Segoe UI"/>
+              </a:defRPr>
+            </a:pPr>
+            <a:r>
+              <a:t>Sub-Second Glass-to-Glass Voice Response</a:t>
+            </a:r>
+          </a:p>
+        </p:txBody>
+      </p:sp>
+      <p:sp>
+        <p:nvSpPr>
+          <p:cNvPr id="10" name="Rounded Rectangle 9"/>
           <p:cNvSpPr/>
           <p:nvPr/>
         </p:nvSpPr>
         <p:spPr>
           <a:xfrm>
-            <a:off x="6144768" y="978408"/>
-            <a:ext cx="5358384" cy="5440680"/>
+            <a:off x="5870448" y="932688"/>
+            <a:ext cx="5724144" cy="4446270"/>
           </a:xfrm>
           <a:prstGeom prst="roundRect">
             <a:avLst/>
@@ -4958,7 +5630,7 @@
       </p:sp>
       <p:pic>
         <p:nvPicPr>
-          <p:cNvPr id="9" name="Picture 8" descr="01_support_desk.png"/>
+          <p:cNvPr id="11" name="Picture 10" descr="01_support_desk.png"/>
           <p:cNvPicPr>
             <a:picLocks noChangeAspect="1"/>
           </p:cNvPicPr>
@@ -4972,8 +5644,8 @@
         </p:blipFill>
         <p:spPr>
           <a:xfrm>
-            <a:off x="6217920" y="1051560"/>
-            <a:ext cx="5212080" cy="4663440"/>
+            <a:off x="5943600" y="1005840"/>
+            <a:ext cx="5577840" cy="3486150"/>
           </a:xfrm>
           <a:prstGeom prst="rect">
             <a:avLst/>
@@ -4982,14 +5654,14 @@
       </p:pic>
       <p:sp>
         <p:nvSpPr>
-          <p:cNvPr id="10" name="TextBox 9"/>
+          <p:cNvPr id="12" name="TextBox 11"/>
           <p:cNvSpPr txBox="1"/>
           <p:nvPr/>
         </p:nvSpPr>
         <p:spPr>
           <a:xfrm>
-            <a:off x="6217920" y="5806440"/>
-            <a:ext cx="5212080" cy="548640"/>
+            <a:off x="5989320" y="4565142"/>
+            <a:ext cx="5486400" cy="777240"/>
           </a:xfrm>
           <a:prstGeom prst="rect">
             <a:avLst/>
@@ -4997,20 +5669,52 @@
           <a:noFill/>
         </p:spPr>
         <p:txBody>
-          <a:bodyPr wrap="square">
+          <a:bodyPr wrap="square" lIns="0" tIns="0" rIns="0" bIns="0">
             <a:spAutoFit/>
           </a:bodyPr>
           <a:lstStyle/>
           <a:p>
             <a:pPr>
-              <a:defRPr sz="1000" b="1">
+              <a:defRPr>
+                <a:latin typeface="Segoe UI"/>
+              </a:defRPr>
+            </a:pPr>
+            <a:r>
+              <a:rPr sz="1000">
+                <a:solidFill>
+                  <a:srgbClr val="16A34A"/>
+                </a:solidFill>
+              </a:rPr>
+              <a:t>● </a:t>
+            </a:r>
+            <a:r>
+              <a:rPr b="1" sz="950">
+                <a:solidFill>
+                  <a:srgbClr val="0F172A"/>
+                </a:solidFill>
+              </a:rPr>
+              <a:t>INTEGRATED MICROSERVICES ECOSYSTEM  </a:t>
+            </a:r>
+            <a:r>
+              <a:rPr sz="850">
+                <a:solidFill>
+                  <a:srgbClr val="1E40AF"/>
+                </a:solidFill>
+              </a:rPr>
+              <a:t>(http://localhost:5173/)</a:t>
+            </a:r>
+          </a:p>
+          <a:p>
+            <a:pPr>
+              <a:defRPr sz="850">
                 <a:solidFill>
                   <a:srgbClr val="64748B"/>
                 </a:solidFill>
-              </a:defRPr>
-            </a:pPr>
-            <a:r>
-              <a:t>📷 Integrated Microservices Ecosystem: Core API (8080), Voice (7861), Web (5173)</a:t>
+                <a:latin typeface="Segoe UI"/>
+              </a:defRPr>
+            </a:pPr>
+            <a:r>
+              <a:t>Tech Architecture: FastAPI (Python 3.12) · SQLite Storage · WebRTC SmallWebRTC SCTP</a:t>
             </a:r>
           </a:p>
         </p:txBody>
@@ -5042,7 +5746,7 @@
         <p:spPr>
           <a:xfrm>
             <a:off x="0" y="0"/>
-            <a:ext cx="12191695" cy="777240"/>
+            <a:ext cx="12191695" cy="749808"/>
           </a:xfrm>
           <a:prstGeom prst="rect">
             <a:avLst/>
@@ -5085,7 +5789,7 @@
         <p:spPr>
           <a:xfrm>
             <a:off x="731520" y="164592"/>
-            <a:ext cx="6400800" cy="457200"/>
+            <a:ext cx="6858000" cy="411480"/>
           </a:xfrm>
           <a:prstGeom prst="rect">
             <a:avLst/>
@@ -5099,14 +5803,25 @@
           <a:lstStyle/>
           <a:p>
             <a:pPr>
-              <a:defRPr sz="1300" b="1">
+              <a:defRPr sz="1200" b="1">
+                <a:latin typeface="Segoe UI"/>
+              </a:defRPr>
+            </a:pPr>
+            <a:r>
+              <a:rPr>
                 <a:solidFill>
                   <a:srgbClr val="0EA5E9"/>
                 </a:solidFill>
-              </a:defRPr>
-            </a:pPr>
-            <a:r>
-              <a:t>AZENTIO-CSM  |  BFSI AUTONOMOUS CONVERSATIONAL AI</a:t>
+              </a:rPr>
+              <a:t>AZENTIO-CSM  </a:t>
+            </a:r>
+            <a:r>
+              <a:rPr sz="1100">
+                <a:solidFill>
+                  <a:srgbClr val="FFFFFF"/>
+                </a:solidFill>
+              </a:rPr>
+              <a:t>|  BFSI AUTONOMOUS CONVERSATIONAL VOICE PLATFORM</a:t>
             </a:r>
           </a:p>
         </p:txBody>
@@ -5120,7 +5835,7 @@
         <p:spPr>
           <a:xfrm>
             <a:off x="9601200" y="164592"/>
-            <a:ext cx="1828800" cy="457200"/>
+            <a:ext cx="1828800" cy="411480"/>
           </a:xfrm>
           <a:prstGeom prst="rect">
             <a:avLst/>
@@ -5134,10 +5849,11 @@
           <a:lstStyle/>
           <a:p>
             <a:pPr algn="r">
-              <a:defRPr sz="1200" b="1">
-                <a:solidFill>
-                  <a:srgbClr val="FFFFFF"/>
-                </a:solidFill>
+              <a:defRPr sz="1100" b="1">
+                <a:solidFill>
+                  <a:srgbClr val="CBD5E1"/>
+                </a:solidFill>
+                <a:latin typeface="Segoe UI"/>
               </a:defRPr>
             </a:pPr>
             <a:r>
@@ -5148,182 +5864,23 @@
       </p:sp>
       <p:sp>
         <p:nvSpPr>
-          <p:cNvPr id="5" name="TextBox 4"/>
-          <p:cNvSpPr txBox="1"/>
-          <p:nvPr/>
-        </p:nvSpPr>
-        <p:spPr>
-          <a:xfrm>
-            <a:off x="731520" y="960120"/>
-            <a:ext cx="5303520" cy="5394960"/>
-          </a:xfrm>
-          <a:prstGeom prst="rect">
-            <a:avLst/>
-          </a:prstGeom>
-          <a:noFill/>
-        </p:spPr>
-        <p:txBody>
-          <a:bodyPr wrap="square" lIns="0" tIns="0" rIns="0" bIns="0">
-            <a:spAutoFit/>
-          </a:bodyPr>
-          <a:lstStyle/>
-          <a:p>
-            <a:pPr>
-              <a:defRPr sz="1100" b="1">
-                <a:solidFill>
-                  <a:srgbClr val="2563EB"/>
-                </a:solidFill>
-              </a:defRPr>
-            </a:pPr>
-            <a:r>
-              <a:t>MULTILINGUAL INTELLIGENCE</a:t>
-            </a:r>
-          </a:p>
-          <a:p>
-            <a:pPr>
-              <a:spcAft>
-                <a:spcPts val="400"/>
-              </a:spcAft>
-              <a:defRPr sz="2000" b="1">
-                <a:solidFill>
-                  <a:srgbClr val="0F172A"/>
-                </a:solidFill>
-              </a:defRPr>
-            </a:pPr>
-            <a:r>
-              <a:t>Native Kannada &amp; Hindi Speech Recognition</a:t>
-            </a:r>
-          </a:p>
-          <a:p>
-            <a:pPr>
-              <a:spcAft>
-                <a:spcPts val="1400"/>
-              </a:spcAft>
-              <a:defRPr sz="1200">
-                <a:solidFill>
-                  <a:srgbClr val="64748B"/>
-                </a:solidFill>
-              </a:defRPr>
-            </a:pPr>
-            <a:r>
-              <a:t>Accurate Vernacular Nuances with Real-Time English Transcription</a:t>
-            </a:r>
-          </a:p>
-          <a:p>
-            <a:pPr>
-              <a:spcAft>
-                <a:spcPts val="800"/>
-              </a:spcAft>
-            </a:pPr>
-            <a:r>
-              <a:rPr b="1" sz="1150">
-                <a:solidFill>
-                  <a:srgbClr val="0F172A"/>
-                </a:solidFill>
-              </a:rPr>
-              <a:t>•  Devanagari &amp; Kannada Conditioning: </a:t>
-            </a:r>
-            <a:r>
-              <a:rPr sz="1100">
-                <a:solidFill>
-                  <a:srgbClr val="1E293B"/>
-                </a:solidFill>
-              </a:rPr>
-              <a:t>Custom acoustic biasing handles Kannada verb endings, Hindi honorifics, and dialectical number pronunciations.</a:t>
-            </a:r>
-          </a:p>
-          <a:p>
-            <a:pPr>
-              <a:spcAft>
-                <a:spcPts val="800"/>
-              </a:spcAft>
-            </a:pPr>
-            <a:r>
-              <a:rPr b="1" sz="1150">
-                <a:solidFill>
-                  <a:srgbClr val="0F172A"/>
-                </a:solidFill>
-              </a:rPr>
-              <a:t>•  Dual-Pane Operator Assistance: </a:t>
-            </a:r>
-            <a:r>
-              <a:rPr sz="1100">
-                <a:solidFill>
-                  <a:srgbClr val="1E293B"/>
-                </a:solidFill>
-              </a:rPr>
-              <a:t>Call transcripts display native vernacular text alongside instant English machine translation for bank supervisors.</a:t>
-            </a:r>
-          </a:p>
-          <a:p>
-            <a:pPr>
-              <a:spcAft>
-                <a:spcPts val="800"/>
-              </a:spcAft>
-            </a:pPr>
-            <a:r>
-              <a:rPr b="1" sz="1150">
-                <a:solidFill>
-                  <a:srgbClr val="0F172A"/>
-                </a:solidFill>
-              </a:rPr>
-              <a:t>•  Phonetic Reference Recovery: </a:t>
-            </a:r>
-            <a:r>
-              <a:rPr sz="1100">
-                <a:solidFill>
-                  <a:srgbClr val="1E293B"/>
-                </a:solidFill>
-              </a:rPr>
-              <a:t>Translates spoken phonetic phrases into valid banking references ('ಎಂಟು ನೂರು' -&gt; '800', 'ಲೋನ್' -&gt; 'LOAN').</a:t>
-            </a:r>
-          </a:p>
-          <a:p>
-            <a:pPr>
-              <a:spcAft>
-                <a:spcPts val="800"/>
-              </a:spcAft>
-            </a:pPr>
-            <a:r>
-              <a:rPr b="1" sz="1150">
-                <a:solidFill>
-                  <a:srgbClr val="0F172A"/>
-                </a:solidFill>
-              </a:rPr>
-              <a:t>•  Speech-to-Text Benchmark Proven: </a:t>
-            </a:r>
-            <a:r>
-              <a:rPr sz="1100">
-                <a:solidFill>
-                  <a:srgbClr val="1E293B"/>
-                </a:solidFill>
-              </a:rPr>
-              <a:t>Benchmarked across diverse accents and background noise with &gt;94% intent classification accuracy.</a:t>
-            </a:r>
-          </a:p>
-        </p:txBody>
-      </p:sp>
-      <p:sp>
-        <p:nvSpPr>
-          <p:cNvPr id="6" name="Rounded Rectangle 5"/>
+          <p:cNvPr id="5" name="Rounded Rectangle 4"/>
           <p:cNvSpPr/>
           <p:nvPr/>
         </p:nvSpPr>
         <p:spPr>
           <a:xfrm>
-            <a:off x="731520" y="5715000"/>
-            <a:ext cx="5120640" cy="777240"/>
+            <a:off x="731520" y="1005840"/>
+            <a:ext cx="2011680" cy="292608"/>
           </a:xfrm>
           <a:prstGeom prst="roundRect">
             <a:avLst/>
           </a:prstGeom>
           <a:solidFill>
-            <a:srgbClr val="F8FAFC"/>
+            <a:srgbClr val="EEF2FF"/>
           </a:solidFill>
-          <a:ln w="19050">
-            <a:solidFill>
-              <a:srgbClr val="0EA5E9"/>
-            </a:solidFill>
+          <a:ln>
+            <a:noFill/>
           </a:ln>
         </p:spPr>
         <p:style>
@@ -5344,20 +5901,30 @@
           <a:bodyPr rtlCol="0" anchor="ctr"/>
           <a:lstStyle/>
           <a:p>
-            <a:pPr algn="ctr"/>
-          </a:p>
-        </p:txBody>
-      </p:sp>
-      <p:sp>
-        <p:nvSpPr>
-          <p:cNvPr id="7" name="TextBox 6"/>
+            <a:pPr algn="ctr">
+              <a:defRPr sz="950" b="1">
+                <a:solidFill>
+                  <a:srgbClr val="312E81"/>
+                </a:solidFill>
+                <a:latin typeface="Segoe UI"/>
+              </a:defRPr>
+            </a:pPr>
+            <a:r>
+              <a:t>MULTILINGUAL INTELLIGENCE</a:t>
+            </a:r>
+          </a:p>
+        </p:txBody>
+      </p:sp>
+      <p:sp>
+        <p:nvSpPr>
+          <p:cNvPr id="6" name="TextBox 5"/>
           <p:cNvSpPr txBox="1"/>
           <p:nvPr/>
         </p:nvSpPr>
         <p:spPr>
           <a:xfrm>
-            <a:off x="868680" y="5779008"/>
-            <a:ext cx="4846320" cy="640080"/>
+            <a:off x="731520" y="1353312"/>
+            <a:ext cx="4937760" cy="4114800"/>
           </a:xfrm>
           <a:prstGeom prst="rect">
             <a:avLst/>
@@ -5365,16 +5932,296 @@
           <a:noFill/>
         </p:spPr>
         <p:txBody>
-          <a:bodyPr wrap="square">
+          <a:bodyPr wrap="square" lIns="0" tIns="0" rIns="0" bIns="0">
             <a:spAutoFit/>
           </a:bodyPr>
           <a:lstStyle/>
           <a:p>
             <a:pPr>
-              <a:defRPr sz="1500" b="1">
-                <a:solidFill>
-                  <a:srgbClr val="2563EB"/>
-                </a:solidFill>
+              <a:spcAft>
+                <a:spcPts val="400"/>
+              </a:spcAft>
+              <a:defRPr sz="2100" b="1">
+                <a:solidFill>
+                  <a:srgbClr val="0F172A"/>
+                </a:solidFill>
+                <a:latin typeface="Segoe UI"/>
+              </a:defRPr>
+            </a:pPr>
+            <a:r>
+              <a:t>Native Kannada &amp; Hindi Speech Recognition</a:t>
+            </a:r>
+          </a:p>
+          <a:p>
+            <a:pPr>
+              <a:spcAft>
+                <a:spcPts val="1400"/>
+              </a:spcAft>
+              <a:defRPr sz="1150">
+                <a:solidFill>
+                  <a:srgbClr val="64748B"/>
+                </a:solidFill>
+                <a:latin typeface="Segoe UI"/>
+              </a:defRPr>
+            </a:pPr>
+            <a:r>
+              <a:t>Accurate Vernacular Nuances with Real-Time English Transcription</a:t>
+            </a:r>
+          </a:p>
+          <a:p>
+            <a:pPr>
+              <a:spcAft>
+                <a:spcPts val="700"/>
+              </a:spcAft>
+            </a:pPr>
+            <a:r>
+              <a:rPr b="1" sz="1100">
+                <a:solidFill>
+                  <a:srgbClr val="1E40AF"/>
+                </a:solidFill>
+                <a:latin typeface="Segoe UI"/>
+              </a:rPr>
+              <a:t>• </a:t>
+            </a:r>
+            <a:r>
+              <a:rPr b="1" sz="1100">
+                <a:solidFill>
+                  <a:srgbClr val="0F172A"/>
+                </a:solidFill>
+                <a:latin typeface="Segoe UI"/>
+              </a:rPr>
+              <a:t>Devanagari &amp; Kannada Conditioning: </a:t>
+            </a:r>
+            <a:r>
+              <a:rPr sz="1050">
+                <a:solidFill>
+                  <a:srgbClr val="334155"/>
+                </a:solidFill>
+                <a:latin typeface="Segoe UI"/>
+              </a:rPr>
+              <a:t>Custom acoustic biasing handles Kannada verb endings, Hindi honorifics, and dialectical number pronunciations.</a:t>
+            </a:r>
+          </a:p>
+          <a:p>
+            <a:pPr>
+              <a:spcAft>
+                <a:spcPts val="700"/>
+              </a:spcAft>
+            </a:pPr>
+            <a:r>
+              <a:rPr b="1" sz="1100">
+                <a:solidFill>
+                  <a:srgbClr val="1E40AF"/>
+                </a:solidFill>
+                <a:latin typeface="Segoe UI"/>
+              </a:rPr>
+              <a:t>• </a:t>
+            </a:r>
+            <a:r>
+              <a:rPr b="1" sz="1100">
+                <a:solidFill>
+                  <a:srgbClr val="0F172A"/>
+                </a:solidFill>
+                <a:latin typeface="Segoe UI"/>
+              </a:rPr>
+              <a:t>Dual-Pane Operator Assistance: </a:t>
+            </a:r>
+            <a:r>
+              <a:rPr sz="1050">
+                <a:solidFill>
+                  <a:srgbClr val="334155"/>
+                </a:solidFill>
+                <a:latin typeface="Segoe UI"/>
+              </a:rPr>
+              <a:t>Call transcripts display native vernacular text alongside instant English machine translation for bank supervisors.</a:t>
+            </a:r>
+          </a:p>
+          <a:p>
+            <a:pPr>
+              <a:spcAft>
+                <a:spcPts val="700"/>
+              </a:spcAft>
+            </a:pPr>
+            <a:r>
+              <a:rPr b="1" sz="1100">
+                <a:solidFill>
+                  <a:srgbClr val="1E40AF"/>
+                </a:solidFill>
+                <a:latin typeface="Segoe UI"/>
+              </a:rPr>
+              <a:t>• </a:t>
+            </a:r>
+            <a:r>
+              <a:rPr b="1" sz="1100">
+                <a:solidFill>
+                  <a:srgbClr val="0F172A"/>
+                </a:solidFill>
+                <a:latin typeface="Segoe UI"/>
+              </a:rPr>
+              <a:t>Phonetic Reference Recovery: </a:t>
+            </a:r>
+            <a:r>
+              <a:rPr sz="1050">
+                <a:solidFill>
+                  <a:srgbClr val="334155"/>
+                </a:solidFill>
+                <a:latin typeface="Segoe UI"/>
+              </a:rPr>
+              <a:t>Translates spoken phonetic phrases into valid banking references ('ಎಂಟು ನೂರು' -&gt; '800', 'ಲೋನ್' -&gt; 'LOAN').</a:t>
+            </a:r>
+          </a:p>
+          <a:p>
+            <a:pPr>
+              <a:spcAft>
+                <a:spcPts val="700"/>
+              </a:spcAft>
+            </a:pPr>
+            <a:r>
+              <a:rPr b="1" sz="1100">
+                <a:solidFill>
+                  <a:srgbClr val="1E40AF"/>
+                </a:solidFill>
+                <a:latin typeface="Segoe UI"/>
+              </a:rPr>
+              <a:t>• </a:t>
+            </a:r>
+            <a:r>
+              <a:rPr b="1" sz="1100">
+                <a:solidFill>
+                  <a:srgbClr val="0F172A"/>
+                </a:solidFill>
+                <a:latin typeface="Segoe UI"/>
+              </a:rPr>
+              <a:t>Speech-to-Text Benchmark Proven: </a:t>
+            </a:r>
+            <a:r>
+              <a:rPr sz="1050">
+                <a:solidFill>
+                  <a:srgbClr val="334155"/>
+                </a:solidFill>
+                <a:latin typeface="Segoe UI"/>
+              </a:rPr>
+              <a:t>Benchmarked across diverse accents and background noise with &gt;94% intent classification accuracy.</a:t>
+            </a:r>
+          </a:p>
+        </p:txBody>
+      </p:sp>
+      <p:sp>
+        <p:nvSpPr>
+          <p:cNvPr id="7" name="Rounded Rectangle 6"/>
+          <p:cNvSpPr/>
+          <p:nvPr/>
+        </p:nvSpPr>
+        <p:spPr>
+          <a:xfrm>
+            <a:off x="731520" y="5623560"/>
+            <a:ext cx="4937760" cy="868680"/>
+          </a:xfrm>
+          <a:prstGeom prst="roundRect">
+            <a:avLst/>
+          </a:prstGeom>
+          <a:solidFill>
+            <a:srgbClr val="F8FAFC"/>
+          </a:solidFill>
+          <a:ln w="12700">
+            <a:solidFill>
+              <a:srgbClr val="E2E8F0"/>
+            </a:solidFill>
+          </a:ln>
+        </p:spPr>
+        <p:style>
+          <a:lnRef idx="1">
+            <a:schemeClr val="accent1"/>
+          </a:lnRef>
+          <a:fillRef idx="3">
+            <a:schemeClr val="accent1"/>
+          </a:fillRef>
+          <a:effectRef idx="2">
+            <a:schemeClr val="accent1"/>
+          </a:effectRef>
+          <a:fontRef idx="minor">
+            <a:schemeClr val="lt1"/>
+          </a:fontRef>
+        </p:style>
+        <p:txBody>
+          <a:bodyPr rtlCol="0" anchor="ctr"/>
+          <a:lstStyle/>
+          <a:p>
+            <a:pPr algn="ctr"/>
+          </a:p>
+        </p:txBody>
+      </p:sp>
+      <p:sp>
+        <p:nvSpPr>
+          <p:cNvPr id="8" name="Rectangle 7"/>
+          <p:cNvSpPr/>
+          <p:nvPr/>
+        </p:nvSpPr>
+        <p:spPr>
+          <a:xfrm>
+            <a:off x="731520" y="5623560"/>
+            <a:ext cx="73152" cy="868680"/>
+          </a:xfrm>
+          <a:prstGeom prst="rect">
+            <a:avLst/>
+          </a:prstGeom>
+          <a:solidFill>
+            <a:srgbClr val="1E40AF"/>
+          </a:solidFill>
+          <a:ln>
+            <a:noFill/>
+          </a:ln>
+        </p:spPr>
+        <p:style>
+          <a:lnRef idx="1">
+            <a:schemeClr val="accent1"/>
+          </a:lnRef>
+          <a:fillRef idx="3">
+            <a:schemeClr val="accent1"/>
+          </a:fillRef>
+          <a:effectRef idx="2">
+            <a:schemeClr val="accent1"/>
+          </a:effectRef>
+          <a:fontRef idx="minor">
+            <a:schemeClr val="lt1"/>
+          </a:fontRef>
+        </p:style>
+        <p:txBody>
+          <a:bodyPr rtlCol="0" anchor="ctr"/>
+          <a:lstStyle/>
+          <a:p>
+            <a:pPr algn="ctr"/>
+          </a:p>
+        </p:txBody>
+      </p:sp>
+      <p:sp>
+        <p:nvSpPr>
+          <p:cNvPr id="9" name="TextBox 8"/>
+          <p:cNvSpPr txBox="1"/>
+          <p:nvPr/>
+        </p:nvSpPr>
+        <p:spPr>
+          <a:xfrm>
+            <a:off x="914400" y="5733288"/>
+            <a:ext cx="4572000" cy="649224"/>
+          </a:xfrm>
+          <a:prstGeom prst="rect">
+            <a:avLst/>
+          </a:prstGeom>
+          <a:noFill/>
+        </p:spPr>
+        <p:txBody>
+          <a:bodyPr wrap="square" lIns="0" tIns="0" rIns="0" bIns="0">
+            <a:spAutoFit/>
+          </a:bodyPr>
+          <a:lstStyle/>
+          <a:p>
+            <a:pPr>
+              <a:defRPr sz="1600" b="1">
+                <a:solidFill>
+                  <a:srgbClr val="1E40AF"/>
+                </a:solidFill>
+                <a:latin typeface="Segoe UI"/>
               </a:defRPr>
             </a:pPr>
             <a:r>
@@ -5383,28 +6230,29 @@
           </a:p>
           <a:p>
             <a:pPr>
-              <a:defRPr sz="1000">
+              <a:defRPr sz="950">
                 <a:solidFill>
                   <a:srgbClr val="64748B"/>
                 </a:solidFill>
-              </a:defRPr>
-            </a:pPr>
-            <a:r>
-              <a:t>Across Kannada, Hindi &amp; Indian English</a:t>
-            </a:r>
-          </a:p>
-        </p:txBody>
-      </p:sp>
-      <p:sp>
-        <p:nvSpPr>
-          <p:cNvPr id="8" name="Rounded Rectangle 7"/>
+                <a:latin typeface="Segoe UI"/>
+              </a:defRPr>
+            </a:pPr>
+            <a:r>
+              <a:t>Across Kannada, Hindi &amp; Indian English Dialects</a:t>
+            </a:r>
+          </a:p>
+        </p:txBody>
+      </p:sp>
+      <p:sp>
+        <p:nvSpPr>
+          <p:cNvPr id="10" name="Rounded Rectangle 9"/>
           <p:cNvSpPr/>
           <p:nvPr/>
         </p:nvSpPr>
         <p:spPr>
           <a:xfrm>
-            <a:off x="6144768" y="978408"/>
-            <a:ext cx="5358384" cy="5440680"/>
+            <a:off x="5870448" y="932688"/>
+            <a:ext cx="5724144" cy="4446270"/>
           </a:xfrm>
           <a:prstGeom prst="roundRect">
             <a:avLst/>
@@ -5442,7 +6290,7 @@
       </p:sp>
       <p:pic>
         <p:nvPicPr>
-          <p:cNvPr id="9" name="Picture 8" descr="03_kannada_call.png"/>
+          <p:cNvPr id="11" name="Picture 10" descr="03_kannada_call.png"/>
           <p:cNvPicPr>
             <a:picLocks noChangeAspect="1"/>
           </p:cNvPicPr>
@@ -5456,8 +6304,8 @@
         </p:blipFill>
         <p:spPr>
           <a:xfrm>
-            <a:off x="6217920" y="1051560"/>
-            <a:ext cx="5212080" cy="4663440"/>
+            <a:off x="5943600" y="1005840"/>
+            <a:ext cx="5577840" cy="3486150"/>
           </a:xfrm>
           <a:prstGeom prst="rect">
             <a:avLst/>
@@ -5466,14 +6314,14 @@
       </p:pic>
       <p:sp>
         <p:nvSpPr>
-          <p:cNvPr id="10" name="TextBox 9"/>
+          <p:cNvPr id="12" name="TextBox 11"/>
           <p:cNvSpPr txBox="1"/>
           <p:nvPr/>
         </p:nvSpPr>
         <p:spPr>
           <a:xfrm>
-            <a:off x="6217920" y="5806440"/>
-            <a:ext cx="5212080" cy="548640"/>
+            <a:off x="5989320" y="4565142"/>
+            <a:ext cx="5486400" cy="777240"/>
           </a:xfrm>
           <a:prstGeom prst="rect">
             <a:avLst/>
@@ -5481,20 +6329,52 @@
           <a:noFill/>
         </p:spPr>
         <p:txBody>
-          <a:bodyPr wrap="square">
+          <a:bodyPr wrap="square" lIns="0" tIns="0" rIns="0" bIns="0">
             <a:spAutoFit/>
           </a:bodyPr>
           <a:lstStyle/>
           <a:p>
             <a:pPr>
-              <a:defRPr sz="1000" b="1">
+              <a:defRPr>
+                <a:latin typeface="Segoe UI"/>
+              </a:defRPr>
+            </a:pPr>
+            <a:r>
+              <a:rPr sz="1000">
+                <a:solidFill>
+                  <a:srgbClr val="16A34A"/>
+                </a:solidFill>
+              </a:rPr>
+              <a:t>● </a:t>
+            </a:r>
+            <a:r>
+              <a:rPr b="1" sz="950">
+                <a:solidFill>
+                  <a:srgbClr val="0F172A"/>
+                </a:solidFill>
+              </a:rPr>
+              <a:t>MULTILINGUAL TIMELINE WITH ENGLISH TRANSLATION  </a:t>
+            </a:r>
+            <a:r>
+              <a:rPr sz="850">
+                <a:solidFill>
+                  <a:srgbClr val="1E40AF"/>
+                </a:solidFill>
+              </a:rPr>
+              <a:t>(http://localhost:5173/support/calls/475b0ac5-...)</a:t>
+            </a:r>
+          </a:p>
+          <a:p>
+            <a:pPr>
+              <a:defRPr sz="850">
                 <a:solidFill>
                   <a:srgbClr val="64748B"/>
                 </a:solidFill>
-              </a:defRPr>
-            </a:pPr>
-            <a:r>
-              <a:t>📷 Live Kannada Support Call with Parallel English Translation (localhost:5173)</a:t>
+                <a:latin typeface="Segoe UI"/>
+              </a:defRPr>
+            </a:pPr>
+            <a:r>
+              <a:t>Tech Architecture: Acoustic Conditioning (VOICE_LANGUAGES=en,kn,hi) · Real-time Translate</a:t>
             </a:r>
           </a:p>
         </p:txBody>
@@ -5526,7 +6406,7 @@
         <p:spPr>
           <a:xfrm>
             <a:off x="0" y="0"/>
-            <a:ext cx="12191695" cy="777240"/>
+            <a:ext cx="12191695" cy="749808"/>
           </a:xfrm>
           <a:prstGeom prst="rect">
             <a:avLst/>
@@ -5569,7 +6449,7 @@
         <p:spPr>
           <a:xfrm>
             <a:off x="731520" y="164592"/>
-            <a:ext cx="6400800" cy="457200"/>
+            <a:ext cx="6858000" cy="411480"/>
           </a:xfrm>
           <a:prstGeom prst="rect">
             <a:avLst/>
@@ -5583,14 +6463,25 @@
           <a:lstStyle/>
           <a:p>
             <a:pPr>
-              <a:defRPr sz="1300" b="1">
+              <a:defRPr sz="1200" b="1">
+                <a:latin typeface="Segoe UI"/>
+              </a:defRPr>
+            </a:pPr>
+            <a:r>
+              <a:rPr>
                 <a:solidFill>
                   <a:srgbClr val="0EA5E9"/>
                 </a:solidFill>
-              </a:defRPr>
-            </a:pPr>
-            <a:r>
-              <a:t>AZENTIO-CSM  |  BFSI AUTONOMOUS CONVERSATIONAL AI</a:t>
+              </a:rPr>
+              <a:t>AZENTIO-CSM  </a:t>
+            </a:r>
+            <a:r>
+              <a:rPr sz="1100">
+                <a:solidFill>
+                  <a:srgbClr val="FFFFFF"/>
+                </a:solidFill>
+              </a:rPr>
+              <a:t>|  BFSI AUTONOMOUS CONVERSATIONAL VOICE PLATFORM</a:t>
             </a:r>
           </a:p>
         </p:txBody>
@@ -5604,7 +6495,7 @@
         <p:spPr>
           <a:xfrm>
             <a:off x="9601200" y="164592"/>
-            <a:ext cx="1828800" cy="457200"/>
+            <a:ext cx="1828800" cy="411480"/>
           </a:xfrm>
           <a:prstGeom prst="rect">
             <a:avLst/>
@@ -5618,10 +6509,11 @@
           <a:lstStyle/>
           <a:p>
             <a:pPr algn="r">
-              <a:defRPr sz="1200" b="1">
-                <a:solidFill>
-                  <a:srgbClr val="FFFFFF"/>
-                </a:solidFill>
+              <a:defRPr sz="1100" b="1">
+                <a:solidFill>
+                  <a:srgbClr val="CBD5E1"/>
+                </a:solidFill>
+                <a:latin typeface="Segoe UI"/>
               </a:defRPr>
             </a:pPr>
             <a:r>
@@ -5632,182 +6524,23 @@
       </p:sp>
       <p:sp>
         <p:nvSpPr>
-          <p:cNvPr id="5" name="TextBox 4"/>
-          <p:cNvSpPr txBox="1"/>
-          <p:nvPr/>
-        </p:nvSpPr>
-        <p:spPr>
-          <a:xfrm>
-            <a:off x="731520" y="960120"/>
-            <a:ext cx="5303520" cy="5394960"/>
-          </a:xfrm>
-          <a:prstGeom prst="rect">
-            <a:avLst/>
-          </a:prstGeom>
-          <a:noFill/>
-        </p:spPr>
-        <p:txBody>
-          <a:bodyPr wrap="square" lIns="0" tIns="0" rIns="0" bIns="0">
-            <a:spAutoFit/>
-          </a:bodyPr>
-          <a:lstStyle/>
-          <a:p>
-            <a:pPr>
-              <a:defRPr sz="1100" b="1">
-                <a:solidFill>
-                  <a:srgbClr val="2563EB"/>
-                </a:solidFill>
-              </a:defRPr>
-            </a:pPr>
-            <a:r>
-              <a:t>SECURITY &amp; GUARDRAILS</a:t>
-            </a:r>
-          </a:p>
-          <a:p>
-            <a:pPr>
-              <a:spcAft>
-                <a:spcPts val="400"/>
-              </a:spcAft>
-              <a:defRPr sz="2000" b="1">
-                <a:solidFill>
-                  <a:srgbClr val="0F172A"/>
-                </a:solidFill>
-              </a:defRPr>
-            </a:pPr>
-            <a:r>
-              <a:t>Deterministic 2FA &amp; Zero-Trust Banking Gate</a:t>
-            </a:r>
-          </a:p>
-          <a:p>
-            <a:pPr>
-              <a:spcAft>
-                <a:spcPts val="1400"/>
-              </a:spcAft>
-              <a:defRPr sz="1200">
-                <a:solidFill>
-                  <a:srgbClr val="64748B"/>
-                </a:solidFill>
-              </a:defRPr>
-            </a:pPr>
-            <a:r>
-              <a:t>No Customer Financial Data Exposed Prior to Identity Verification</a:t>
-            </a:r>
-          </a:p>
-          <a:p>
-            <a:pPr>
-              <a:spcAft>
-                <a:spcPts val="800"/>
-              </a:spcAft>
-            </a:pPr>
-            <a:r>
-              <a:rPr b="1" sz="1150">
-                <a:solidFill>
-                  <a:srgbClr val="0F172A"/>
-                </a:solidFill>
-              </a:rPr>
-              <a:t>•  Strict Two-Factor Gate: </a:t>
-            </a:r>
-            <a:r>
-              <a:rPr sz="1100">
-                <a:solidFill>
-                  <a:srgbClr val="1E293B"/>
-                </a:solidFill>
-              </a:rPr>
-              <a:t>Callers must provide registered 10-digit mobile number and Date of Birth (YYYY-MM-DD) or OTP before any query.</a:t>
-            </a:r>
-          </a:p>
-          <a:p>
-            <a:pPr>
-              <a:spcAft>
-                <a:spcPts val="800"/>
-              </a:spcAft>
-            </a:pPr>
-            <a:r>
-              <a:rPr b="1" sz="1150">
-                <a:solidFill>
-                  <a:srgbClr val="0F172A"/>
-                </a:solidFill>
-              </a:rPr>
-              <a:t>•  Model Lockout Enforcement: </a:t>
-            </a:r>
-            <a:r>
-              <a:rPr sz="1100">
-                <a:solidFill>
-                  <a:srgbClr val="1E293B"/>
-                </a:solidFill>
-              </a:rPr>
-              <a:t>LLM prompt conditioning forbids answering balance or statement queries while verified=false; hard-coded tool guardrails enforce this.</a:t>
-            </a:r>
-          </a:p>
-          <a:p>
-            <a:pPr>
-              <a:spcAft>
-                <a:spcPts val="800"/>
-              </a:spcAft>
-            </a:pPr>
-            <a:r>
-              <a:rPr b="1" sz="1150">
-                <a:solidFill>
-                  <a:srgbClr val="0F172A"/>
-                </a:solidFill>
-              </a:rPr>
-              <a:t>•  Brute-Force Protection: </a:t>
-            </a:r>
-            <a:r>
-              <a:rPr sz="1100">
-                <a:solidFill>
-                  <a:srgbClr val="1E293B"/>
-                </a:solidFill>
-              </a:rPr>
-              <a:t>Maximum 3 failed verification attempts before account lock and automated supervisor escalation (ESC-XXXXX).</a:t>
-            </a:r>
-          </a:p>
-          <a:p>
-            <a:pPr>
-              <a:spcAft>
-                <a:spcPts val="800"/>
-              </a:spcAft>
-            </a:pPr>
-            <a:r>
-              <a:rPr b="1" sz="1150">
-                <a:solidFill>
-                  <a:srgbClr val="0F172A"/>
-                </a:solidFill>
-              </a:rPr>
-              <a:t>•  Caller Profile Integration: </a:t>
-            </a:r>
-            <a:r>
-              <a:rPr sz="1100">
-                <a:solidFill>
-                  <a:srgbClr val="1E293B"/>
-                </a:solidFill>
-              </a:rPr>
-              <a:t>Verified callers instantly surface KYC profile, active loan accounts, and risk score on the operator desk.</a:t>
-            </a:r>
-          </a:p>
-        </p:txBody>
-      </p:sp>
-      <p:sp>
-        <p:nvSpPr>
-          <p:cNvPr id="6" name="Rounded Rectangle 5"/>
+          <p:cNvPr id="5" name="Rounded Rectangle 4"/>
           <p:cNvSpPr/>
           <p:nvPr/>
         </p:nvSpPr>
         <p:spPr>
           <a:xfrm>
-            <a:off x="731520" y="5715000"/>
-            <a:ext cx="5120640" cy="777240"/>
+            <a:off x="731520" y="1005840"/>
+            <a:ext cx="2011680" cy="292608"/>
           </a:xfrm>
           <a:prstGeom prst="roundRect">
             <a:avLst/>
           </a:prstGeom>
           <a:solidFill>
-            <a:srgbClr val="F8FAFC"/>
+            <a:srgbClr val="EEF2FF"/>
           </a:solidFill>
-          <a:ln w="19050">
-            <a:solidFill>
-              <a:srgbClr val="0EA5E9"/>
-            </a:solidFill>
+          <a:ln>
+            <a:noFill/>
           </a:ln>
         </p:spPr>
         <p:style>
@@ -5828,20 +6561,30 @@
           <a:bodyPr rtlCol="0" anchor="ctr"/>
           <a:lstStyle/>
           <a:p>
-            <a:pPr algn="ctr"/>
-          </a:p>
-        </p:txBody>
-      </p:sp>
-      <p:sp>
-        <p:nvSpPr>
-          <p:cNvPr id="7" name="TextBox 6"/>
+            <a:pPr algn="ctr">
+              <a:defRPr sz="950" b="1">
+                <a:solidFill>
+                  <a:srgbClr val="312E81"/>
+                </a:solidFill>
+                <a:latin typeface="Segoe UI"/>
+              </a:defRPr>
+            </a:pPr>
+            <a:r>
+              <a:t>SECURITY &amp; GUARDRAILS</a:t>
+            </a:r>
+          </a:p>
+        </p:txBody>
+      </p:sp>
+      <p:sp>
+        <p:nvSpPr>
+          <p:cNvPr id="6" name="TextBox 5"/>
           <p:cNvSpPr txBox="1"/>
           <p:nvPr/>
         </p:nvSpPr>
         <p:spPr>
           <a:xfrm>
-            <a:off x="868680" y="5779008"/>
-            <a:ext cx="4846320" cy="640080"/>
+            <a:off x="731520" y="1353312"/>
+            <a:ext cx="4937760" cy="4114800"/>
           </a:xfrm>
           <a:prstGeom prst="rect">
             <a:avLst/>
@@ -5849,46 +6592,327 @@
           <a:noFill/>
         </p:spPr>
         <p:txBody>
-          <a:bodyPr wrap="square">
+          <a:bodyPr wrap="square" lIns="0" tIns="0" rIns="0" bIns="0">
             <a:spAutoFit/>
           </a:bodyPr>
           <a:lstStyle/>
           <a:p>
             <a:pPr>
-              <a:defRPr sz="1500" b="1">
-                <a:solidFill>
-                  <a:srgbClr val="2563EB"/>
-                </a:solidFill>
-              </a:defRPr>
-            </a:pPr>
-            <a:r>
-              <a:t>Zero Leaks</a:t>
-            </a:r>
-          </a:p>
-          <a:p>
-            <a:pPr>
-              <a:defRPr sz="1000">
+              <a:spcAft>
+                <a:spcPts val="400"/>
+              </a:spcAft>
+              <a:defRPr sz="2100" b="1">
+                <a:solidFill>
+                  <a:srgbClr val="0F172A"/>
+                </a:solidFill>
+                <a:latin typeface="Segoe UI"/>
+              </a:defRPr>
+            </a:pPr>
+            <a:r>
+              <a:t>Deterministic 2FA &amp; Zero-Trust Banking Gate</a:t>
+            </a:r>
+          </a:p>
+          <a:p>
+            <a:pPr>
+              <a:spcAft>
+                <a:spcPts val="1400"/>
+              </a:spcAft>
+              <a:defRPr sz="1150">
                 <a:solidFill>
                   <a:srgbClr val="64748B"/>
                 </a:solidFill>
-              </a:defRPr>
-            </a:pPr>
-            <a:r>
-              <a:t>Strict Identity Gate Enforced</a:t>
-            </a:r>
-          </a:p>
-        </p:txBody>
-      </p:sp>
-      <p:sp>
-        <p:nvSpPr>
-          <p:cNvPr id="8" name="Rounded Rectangle 7"/>
+                <a:latin typeface="Segoe UI"/>
+              </a:defRPr>
+            </a:pPr>
+            <a:r>
+              <a:t>No Customer Financial Data Exposed Prior to Identity Verification</a:t>
+            </a:r>
+          </a:p>
+          <a:p>
+            <a:pPr>
+              <a:spcAft>
+                <a:spcPts val="700"/>
+              </a:spcAft>
+            </a:pPr>
+            <a:r>
+              <a:rPr b="1" sz="1100">
+                <a:solidFill>
+                  <a:srgbClr val="1E40AF"/>
+                </a:solidFill>
+                <a:latin typeface="Segoe UI"/>
+              </a:rPr>
+              <a:t>• </a:t>
+            </a:r>
+            <a:r>
+              <a:rPr b="1" sz="1100">
+                <a:solidFill>
+                  <a:srgbClr val="0F172A"/>
+                </a:solidFill>
+                <a:latin typeface="Segoe UI"/>
+              </a:rPr>
+              <a:t>Strict Two-Factor Gate: </a:t>
+            </a:r>
+            <a:r>
+              <a:rPr sz="1050">
+                <a:solidFill>
+                  <a:srgbClr val="334155"/>
+                </a:solidFill>
+                <a:latin typeface="Segoe UI"/>
+              </a:rPr>
+              <a:t>Callers must provide registered 10-digit mobile number and Date of Birth (YYYY-MM-DD) or OTP before any query.</a:t>
+            </a:r>
+          </a:p>
+          <a:p>
+            <a:pPr>
+              <a:spcAft>
+                <a:spcPts val="700"/>
+              </a:spcAft>
+            </a:pPr>
+            <a:r>
+              <a:rPr b="1" sz="1100">
+                <a:solidFill>
+                  <a:srgbClr val="1E40AF"/>
+                </a:solidFill>
+                <a:latin typeface="Segoe UI"/>
+              </a:rPr>
+              <a:t>• </a:t>
+            </a:r>
+            <a:r>
+              <a:rPr b="1" sz="1100">
+                <a:solidFill>
+                  <a:srgbClr val="0F172A"/>
+                </a:solidFill>
+                <a:latin typeface="Segoe UI"/>
+              </a:rPr>
+              <a:t>Model Lockout Enforcement: </a:t>
+            </a:r>
+            <a:r>
+              <a:rPr sz="1050">
+                <a:solidFill>
+                  <a:srgbClr val="334155"/>
+                </a:solidFill>
+                <a:latin typeface="Segoe UI"/>
+              </a:rPr>
+              <a:t>LLM prompt conditioning forbids answering balance or statement queries while verified=false; hard-coded tool guardrails enforce this.</a:t>
+            </a:r>
+          </a:p>
+          <a:p>
+            <a:pPr>
+              <a:spcAft>
+                <a:spcPts val="700"/>
+              </a:spcAft>
+            </a:pPr>
+            <a:r>
+              <a:rPr b="1" sz="1100">
+                <a:solidFill>
+                  <a:srgbClr val="1E40AF"/>
+                </a:solidFill>
+                <a:latin typeface="Segoe UI"/>
+              </a:rPr>
+              <a:t>• </a:t>
+            </a:r>
+            <a:r>
+              <a:rPr b="1" sz="1100">
+                <a:solidFill>
+                  <a:srgbClr val="0F172A"/>
+                </a:solidFill>
+                <a:latin typeface="Segoe UI"/>
+              </a:rPr>
+              <a:t>Brute-Force Protection: </a:t>
+            </a:r>
+            <a:r>
+              <a:rPr sz="1050">
+                <a:solidFill>
+                  <a:srgbClr val="334155"/>
+                </a:solidFill>
+                <a:latin typeface="Segoe UI"/>
+              </a:rPr>
+              <a:t>Maximum 3 failed verification attempts before account lock and automated supervisor escalation (ESC-XXXXX).</a:t>
+            </a:r>
+          </a:p>
+          <a:p>
+            <a:pPr>
+              <a:spcAft>
+                <a:spcPts val="700"/>
+              </a:spcAft>
+            </a:pPr>
+            <a:r>
+              <a:rPr b="1" sz="1100">
+                <a:solidFill>
+                  <a:srgbClr val="1E40AF"/>
+                </a:solidFill>
+                <a:latin typeface="Segoe UI"/>
+              </a:rPr>
+              <a:t>• </a:t>
+            </a:r>
+            <a:r>
+              <a:rPr b="1" sz="1100">
+                <a:solidFill>
+                  <a:srgbClr val="0F172A"/>
+                </a:solidFill>
+                <a:latin typeface="Segoe UI"/>
+              </a:rPr>
+              <a:t>Caller Profile Integration: </a:t>
+            </a:r>
+            <a:r>
+              <a:rPr sz="1050">
+                <a:solidFill>
+                  <a:srgbClr val="334155"/>
+                </a:solidFill>
+                <a:latin typeface="Segoe UI"/>
+              </a:rPr>
+              <a:t>Verified callers instantly surface KYC profile, active loan accounts, and risk score on the operator desk.</a:t>
+            </a:r>
+          </a:p>
+        </p:txBody>
+      </p:sp>
+      <p:sp>
+        <p:nvSpPr>
+          <p:cNvPr id="7" name="Rounded Rectangle 6"/>
           <p:cNvSpPr/>
           <p:nvPr/>
         </p:nvSpPr>
         <p:spPr>
           <a:xfrm>
-            <a:off x="6144768" y="978408"/>
-            <a:ext cx="5358384" cy="5440680"/>
+            <a:off x="731520" y="5623560"/>
+            <a:ext cx="4937760" cy="868680"/>
+          </a:xfrm>
+          <a:prstGeom prst="roundRect">
+            <a:avLst/>
+          </a:prstGeom>
+          <a:solidFill>
+            <a:srgbClr val="F8FAFC"/>
+          </a:solidFill>
+          <a:ln w="12700">
+            <a:solidFill>
+              <a:srgbClr val="E2E8F0"/>
+            </a:solidFill>
+          </a:ln>
+        </p:spPr>
+        <p:style>
+          <a:lnRef idx="1">
+            <a:schemeClr val="accent1"/>
+          </a:lnRef>
+          <a:fillRef idx="3">
+            <a:schemeClr val="accent1"/>
+          </a:fillRef>
+          <a:effectRef idx="2">
+            <a:schemeClr val="accent1"/>
+          </a:effectRef>
+          <a:fontRef idx="minor">
+            <a:schemeClr val="lt1"/>
+          </a:fontRef>
+        </p:style>
+        <p:txBody>
+          <a:bodyPr rtlCol="0" anchor="ctr"/>
+          <a:lstStyle/>
+          <a:p>
+            <a:pPr algn="ctr"/>
+          </a:p>
+        </p:txBody>
+      </p:sp>
+      <p:sp>
+        <p:nvSpPr>
+          <p:cNvPr id="8" name="Rectangle 7"/>
+          <p:cNvSpPr/>
+          <p:nvPr/>
+        </p:nvSpPr>
+        <p:spPr>
+          <a:xfrm>
+            <a:off x="731520" y="5623560"/>
+            <a:ext cx="73152" cy="868680"/>
+          </a:xfrm>
+          <a:prstGeom prst="rect">
+            <a:avLst/>
+          </a:prstGeom>
+          <a:solidFill>
+            <a:srgbClr val="1E40AF"/>
+          </a:solidFill>
+          <a:ln>
+            <a:noFill/>
+          </a:ln>
+        </p:spPr>
+        <p:style>
+          <a:lnRef idx="1">
+            <a:schemeClr val="accent1"/>
+          </a:lnRef>
+          <a:fillRef idx="3">
+            <a:schemeClr val="accent1"/>
+          </a:fillRef>
+          <a:effectRef idx="2">
+            <a:schemeClr val="accent1"/>
+          </a:effectRef>
+          <a:fontRef idx="minor">
+            <a:schemeClr val="lt1"/>
+          </a:fontRef>
+        </p:style>
+        <p:txBody>
+          <a:bodyPr rtlCol="0" anchor="ctr"/>
+          <a:lstStyle/>
+          <a:p>
+            <a:pPr algn="ctr"/>
+          </a:p>
+        </p:txBody>
+      </p:sp>
+      <p:sp>
+        <p:nvSpPr>
+          <p:cNvPr id="9" name="TextBox 8"/>
+          <p:cNvSpPr txBox="1"/>
+          <p:nvPr/>
+        </p:nvSpPr>
+        <p:spPr>
+          <a:xfrm>
+            <a:off x="914400" y="5733288"/>
+            <a:ext cx="4572000" cy="649224"/>
+          </a:xfrm>
+          <a:prstGeom prst="rect">
+            <a:avLst/>
+          </a:prstGeom>
+          <a:noFill/>
+        </p:spPr>
+        <p:txBody>
+          <a:bodyPr wrap="square" lIns="0" tIns="0" rIns="0" bIns="0">
+            <a:spAutoFit/>
+          </a:bodyPr>
+          <a:lstStyle/>
+          <a:p>
+            <a:pPr>
+              <a:defRPr sz="1600" b="1">
+                <a:solidFill>
+                  <a:srgbClr val="1E40AF"/>
+                </a:solidFill>
+                <a:latin typeface="Segoe UI"/>
+              </a:defRPr>
+            </a:pPr>
+            <a:r>
+              <a:t>Zero Data Leaks</a:t>
+            </a:r>
+          </a:p>
+          <a:p>
+            <a:pPr>
+              <a:defRPr sz="950">
+                <a:solidFill>
+                  <a:srgbClr val="64748B"/>
+                </a:solidFill>
+                <a:latin typeface="Segoe UI"/>
+              </a:defRPr>
+            </a:pPr>
+            <a:r>
+              <a:t>Hardware-Enforced 2FA Gate &amp; Automatic Lockout</a:t>
+            </a:r>
+          </a:p>
+        </p:txBody>
+      </p:sp>
+      <p:sp>
+        <p:nvSpPr>
+          <p:cNvPr id="10" name="Rounded Rectangle 9"/>
+          <p:cNvSpPr/>
+          <p:nvPr/>
+        </p:nvSpPr>
+        <p:spPr>
+          <a:xfrm>
+            <a:off x="5870448" y="932688"/>
+            <a:ext cx="5724144" cy="4446270"/>
           </a:xfrm>
           <a:prstGeom prst="roundRect">
             <a:avLst/>
@@ -5926,7 +6950,7 @@
       </p:sp>
       <p:pic>
         <p:nvPicPr>
-          <p:cNvPr id="9" name="Picture 8" descr="03_kannada_call.png"/>
+          <p:cNvPr id="11" name="Picture 10" descr="03_kannada_call.png"/>
           <p:cNvPicPr>
             <a:picLocks noChangeAspect="1"/>
           </p:cNvPicPr>
@@ -5940,8 +6964,8 @@
         </p:blipFill>
         <p:spPr>
           <a:xfrm>
-            <a:off x="6217920" y="1051560"/>
-            <a:ext cx="5212080" cy="4663440"/>
+            <a:off x="5943600" y="1005840"/>
+            <a:ext cx="5577840" cy="3486150"/>
           </a:xfrm>
           <a:prstGeom prst="rect">
             <a:avLst/>
@@ -5950,14 +6974,14 @@
       </p:pic>
       <p:sp>
         <p:nvSpPr>
-          <p:cNvPr id="10" name="TextBox 9"/>
+          <p:cNvPr id="12" name="TextBox 11"/>
           <p:cNvSpPr txBox="1"/>
           <p:nvPr/>
         </p:nvSpPr>
         <p:spPr>
           <a:xfrm>
-            <a:off x="6217920" y="5806440"/>
-            <a:ext cx="5212080" cy="548640"/>
+            <a:off x="5989320" y="4565142"/>
+            <a:ext cx="5486400" cy="777240"/>
           </a:xfrm>
           <a:prstGeom prst="rect">
             <a:avLst/>
@@ -5965,20 +6989,52 @@
           <a:noFill/>
         </p:spPr>
         <p:txBody>
-          <a:bodyPr wrap="square">
+          <a:bodyPr wrap="square" lIns="0" tIns="0" rIns="0" bIns="0">
             <a:spAutoFit/>
           </a:bodyPr>
           <a:lstStyle/>
           <a:p>
             <a:pPr>
-              <a:defRPr sz="1000" b="1">
+              <a:defRPr>
+                <a:latin typeface="Segoe UI"/>
+              </a:defRPr>
+            </a:pPr>
+            <a:r>
+              <a:rPr sz="1000">
+                <a:solidFill>
+                  <a:srgbClr val="16A34A"/>
+                </a:solidFill>
+              </a:rPr>
+              <a:t>● </a:t>
+            </a:r>
+            <a:r>
+              <a:rPr b="1" sz="950">
+                <a:solidFill>
+                  <a:srgbClr val="0F172A"/>
+                </a:solidFill>
+              </a:rPr>
+              <a:t>CUSTOMER IDENTITY VERIFICATION CARD  </a:t>
+            </a:r>
+            <a:r>
+              <a:rPr sz="850">
+                <a:solidFill>
+                  <a:srgbClr val="1E40AF"/>
+                </a:solidFill>
+              </a:rPr>
+              <a:t>(http://localhost:5173/support/calls/475b0ac5-...)</a:t>
+            </a:r>
+          </a:p>
+          <a:p>
+            <a:pPr>
+              <a:defRPr sz="850">
                 <a:solidFill>
                   <a:srgbClr val="64748B"/>
                 </a:solidFill>
-              </a:defRPr>
-            </a:pPr>
-            <a:r>
-              <a:t>📷 Customer Identity Verification &amp; Security Card on localhost:5173</a:t>
+                <a:latin typeface="Segoe UI"/>
+              </a:defRPr>
+            </a:pPr>
+            <a:r>
+              <a:t>Tech Architecture: Deterministic 2FA Gate · 3-Strike Lockout · KYC Data Surface</a:t>
             </a:r>
           </a:p>
         </p:txBody>
@@ -6010,7 +7066,7 @@
         <p:spPr>
           <a:xfrm>
             <a:off x="0" y="0"/>
-            <a:ext cx="12191695" cy="777240"/>
+            <a:ext cx="12191695" cy="749808"/>
           </a:xfrm>
           <a:prstGeom prst="rect">
             <a:avLst/>
@@ -6053,7 +7109,7 @@
         <p:spPr>
           <a:xfrm>
             <a:off x="731520" y="164592"/>
-            <a:ext cx="6400800" cy="457200"/>
+            <a:ext cx="6858000" cy="411480"/>
           </a:xfrm>
           <a:prstGeom prst="rect">
             <a:avLst/>
@@ -6067,14 +7123,25 @@
           <a:lstStyle/>
           <a:p>
             <a:pPr>
-              <a:defRPr sz="1300" b="1">
+              <a:defRPr sz="1200" b="1">
+                <a:latin typeface="Segoe UI"/>
+              </a:defRPr>
+            </a:pPr>
+            <a:r>
+              <a:rPr>
                 <a:solidFill>
                   <a:srgbClr val="0EA5E9"/>
                 </a:solidFill>
-              </a:defRPr>
-            </a:pPr>
-            <a:r>
-              <a:t>AZENTIO-CSM  |  BFSI AUTONOMOUS CONVERSATIONAL AI</a:t>
+              </a:rPr>
+              <a:t>AZENTIO-CSM  </a:t>
+            </a:r>
+            <a:r>
+              <a:rPr sz="1100">
+                <a:solidFill>
+                  <a:srgbClr val="FFFFFF"/>
+                </a:solidFill>
+              </a:rPr>
+              <a:t>|  BFSI AUTONOMOUS CONVERSATIONAL VOICE PLATFORM</a:t>
             </a:r>
           </a:p>
         </p:txBody>
@@ -6088,7 +7155,7 @@
         <p:spPr>
           <a:xfrm>
             <a:off x="9601200" y="164592"/>
-            <a:ext cx="1828800" cy="457200"/>
+            <a:ext cx="1828800" cy="411480"/>
           </a:xfrm>
           <a:prstGeom prst="rect">
             <a:avLst/>
@@ -6102,10 +7169,11 @@
           <a:lstStyle/>
           <a:p>
             <a:pPr algn="r">
-              <a:defRPr sz="1200" b="1">
-                <a:solidFill>
-                  <a:srgbClr val="FFFFFF"/>
-                </a:solidFill>
+              <a:defRPr sz="1100" b="1">
+                <a:solidFill>
+                  <a:srgbClr val="CBD5E1"/>
+                </a:solidFill>
+                <a:latin typeface="Segoe UI"/>
               </a:defRPr>
             </a:pPr>
             <a:r>
@@ -6116,182 +7184,23 @@
       </p:sp>
       <p:sp>
         <p:nvSpPr>
-          <p:cNvPr id="5" name="TextBox 4"/>
-          <p:cNvSpPr txBox="1"/>
-          <p:nvPr/>
-        </p:nvSpPr>
-        <p:spPr>
-          <a:xfrm>
-            <a:off x="731520" y="960120"/>
-            <a:ext cx="5303520" cy="5394960"/>
-          </a:xfrm>
-          <a:prstGeom prst="rect">
-            <a:avLst/>
-          </a:prstGeom>
-          <a:noFill/>
-        </p:spPr>
-        <p:txBody>
-          <a:bodyPr wrap="square" lIns="0" tIns="0" rIns="0" bIns="0">
-            <a:spAutoFit/>
-          </a:bodyPr>
-          <a:lstStyle/>
-          <a:p>
-            <a:pPr>
-              <a:defRPr sz="1100" b="1">
-                <a:solidFill>
-                  <a:srgbClr val="2563EB"/>
-                </a:solidFill>
-              </a:defRPr>
-            </a:pPr>
-            <a:r>
-              <a:t>AUTONOMOUS OPERATIONS</a:t>
-            </a:r>
-          </a:p>
-          <a:p>
-            <a:pPr>
-              <a:spcAft>
-                <a:spcPts val="400"/>
-              </a:spcAft>
-              <a:defRPr sz="2000" b="1">
-                <a:solidFill>
-                  <a:srgbClr val="0F172A"/>
-                </a:solidFill>
-              </a:defRPr>
-            </a:pPr>
-            <a:r>
-              <a:t>Real-Time Service Request Execution</a:t>
-            </a:r>
-          </a:p>
-          <a:p>
-            <a:pPr>
-              <a:spcAft>
-                <a:spcPts val="1400"/>
-              </a:spcAft>
-              <a:defRPr sz="1200">
-                <a:solidFill>
-                  <a:srgbClr val="64748B"/>
-                </a:solidFill>
-              </a:defRPr>
-            </a:pPr>
-            <a:r>
-              <a:t>Automated Core Banking Transactions with Reference Generation</a:t>
-            </a:r>
-          </a:p>
-          <a:p>
-            <a:pPr>
-              <a:spcAft>
-                <a:spcPts val="800"/>
-              </a:spcAft>
-            </a:pPr>
-            <a:r>
-              <a:rPr b="1" sz="1150">
-                <a:solidFill>
-                  <a:srgbClr val="0F172A"/>
-                </a:solidFill>
-              </a:rPr>
-              <a:t>•  End-to-End API Execution: </a:t>
-            </a:r>
-            <a:r>
-              <a:rPr sz="1100">
-                <a:solidFill>
-                  <a:srgbClr val="1E293B"/>
-                </a:solidFill>
-              </a:rPr>
-              <a:t>The voice agent directly queries and updates the Core Banking Simulator (8090) in real-time.</a:t>
-            </a:r>
-          </a:p>
-          <a:p>
-            <a:pPr>
-              <a:spcAft>
-                <a:spcPts val="800"/>
-              </a:spcAft>
-            </a:pPr>
-            <a:r>
-              <a:rPr b="1" sz="1150">
-                <a:solidFill>
-                  <a:srgbClr val="0F172A"/>
-                </a:solidFill>
-              </a:rPr>
-              <a:t>•  Automated Service Requests: </a:t>
-            </a:r>
-            <a:r>
-              <a:rPr sz="1100">
-                <a:solidFill>
-                  <a:srgbClr val="1E293B"/>
-                </a:solidFill>
-              </a:rPr>
-              <a:t>Instant registration of loan statements, repayment schedules, and callback tickets with unique reference IDs (SR-1042).</a:t>
-            </a:r>
-          </a:p>
-          <a:p>
-            <a:pPr>
-              <a:spcAft>
-                <a:spcPts val="800"/>
-              </a:spcAft>
-            </a:pPr>
-            <a:r>
-              <a:rPr b="1" sz="1150">
-                <a:solidFill>
-                  <a:srgbClr val="0F172A"/>
-                </a:solidFill>
-              </a:rPr>
-              <a:t>•  Formal Complaint Lodging: </a:t>
-            </a:r>
-            <a:r>
-              <a:rPr sz="1100">
-                <a:solidFill>
-                  <a:srgbClr val="1E293B"/>
-                </a:solidFill>
-              </a:rPr>
-              <a:t>Logs grievances with category classification, department routing, and SLA tracking (CMP-3011).</a:t>
-            </a:r>
-          </a:p>
-          <a:p>
-            <a:pPr>
-              <a:spcAft>
-                <a:spcPts val="800"/>
-              </a:spcAft>
-            </a:pPr>
-            <a:r>
-              <a:rPr b="1" sz="1150">
-                <a:solidFill>
-                  <a:srgbClr val="0F172A"/>
-                </a:solidFill>
-              </a:rPr>
-              <a:t>•  Phonetic Reference Repair: </a:t>
-            </a:r>
-            <a:r>
-              <a:rPr sz="1100">
-                <a:solidFill>
-                  <a:srgbClr val="1E293B"/>
-                </a:solidFill>
-              </a:rPr>
-              <a:t>Spoken letters and numbers are phonetically spelled out and matched against active database records.</a:t>
-            </a:r>
-          </a:p>
-        </p:txBody>
-      </p:sp>
-      <p:sp>
-        <p:nvSpPr>
-          <p:cNvPr id="6" name="Rounded Rectangle 5"/>
+          <p:cNvPr id="5" name="Rounded Rectangle 4"/>
           <p:cNvSpPr/>
           <p:nvPr/>
         </p:nvSpPr>
         <p:spPr>
           <a:xfrm>
-            <a:off x="731520" y="5715000"/>
-            <a:ext cx="5120640" cy="777240"/>
+            <a:off x="731520" y="1005840"/>
+            <a:ext cx="2011680" cy="292608"/>
           </a:xfrm>
           <a:prstGeom prst="roundRect">
             <a:avLst/>
           </a:prstGeom>
           <a:solidFill>
-            <a:srgbClr val="F8FAFC"/>
+            <a:srgbClr val="EEF2FF"/>
           </a:solidFill>
-          <a:ln w="19050">
-            <a:solidFill>
-              <a:srgbClr val="0EA5E9"/>
-            </a:solidFill>
+          <a:ln>
+            <a:noFill/>
           </a:ln>
         </p:spPr>
         <p:style>
@@ -6312,20 +7221,30 @@
           <a:bodyPr rtlCol="0" anchor="ctr"/>
           <a:lstStyle/>
           <a:p>
-            <a:pPr algn="ctr"/>
-          </a:p>
-        </p:txBody>
-      </p:sp>
-      <p:sp>
-        <p:nvSpPr>
-          <p:cNvPr id="7" name="TextBox 6"/>
+            <a:pPr algn="ctr">
+              <a:defRPr sz="950" b="1">
+                <a:solidFill>
+                  <a:srgbClr val="312E81"/>
+                </a:solidFill>
+                <a:latin typeface="Segoe UI"/>
+              </a:defRPr>
+            </a:pPr>
+            <a:r>
+              <a:t>AUTONOMOUS OPERATIONS</a:t>
+            </a:r>
+          </a:p>
+        </p:txBody>
+      </p:sp>
+      <p:sp>
+        <p:nvSpPr>
+          <p:cNvPr id="6" name="TextBox 5"/>
           <p:cNvSpPr txBox="1"/>
           <p:nvPr/>
         </p:nvSpPr>
         <p:spPr>
           <a:xfrm>
-            <a:off x="868680" y="5779008"/>
-            <a:ext cx="4846320" cy="640080"/>
+            <a:off x="731520" y="1353312"/>
+            <a:ext cx="4937760" cy="4114800"/>
           </a:xfrm>
           <a:prstGeom prst="rect">
             <a:avLst/>
@@ -6333,16 +7252,296 @@
           <a:noFill/>
         </p:spPr>
         <p:txBody>
-          <a:bodyPr wrap="square">
+          <a:bodyPr wrap="square" lIns="0" tIns="0" rIns="0" bIns="0">
             <a:spAutoFit/>
           </a:bodyPr>
           <a:lstStyle/>
           <a:p>
             <a:pPr>
-              <a:defRPr sz="1500" b="1">
-                <a:solidFill>
-                  <a:srgbClr val="2563EB"/>
-                </a:solidFill>
+              <a:spcAft>
+                <a:spcPts val="400"/>
+              </a:spcAft>
+              <a:defRPr sz="2100" b="1">
+                <a:solidFill>
+                  <a:srgbClr val="0F172A"/>
+                </a:solidFill>
+                <a:latin typeface="Segoe UI"/>
+              </a:defRPr>
+            </a:pPr>
+            <a:r>
+              <a:t>Real-Time Service Request Execution</a:t>
+            </a:r>
+          </a:p>
+          <a:p>
+            <a:pPr>
+              <a:spcAft>
+                <a:spcPts val="1400"/>
+              </a:spcAft>
+              <a:defRPr sz="1150">
+                <a:solidFill>
+                  <a:srgbClr val="64748B"/>
+                </a:solidFill>
+                <a:latin typeface="Segoe UI"/>
+              </a:defRPr>
+            </a:pPr>
+            <a:r>
+              <a:t>Automated Core Banking Transactions with Reference Generation</a:t>
+            </a:r>
+          </a:p>
+          <a:p>
+            <a:pPr>
+              <a:spcAft>
+                <a:spcPts val="700"/>
+              </a:spcAft>
+            </a:pPr>
+            <a:r>
+              <a:rPr b="1" sz="1100">
+                <a:solidFill>
+                  <a:srgbClr val="1E40AF"/>
+                </a:solidFill>
+                <a:latin typeface="Segoe UI"/>
+              </a:rPr>
+              <a:t>• </a:t>
+            </a:r>
+            <a:r>
+              <a:rPr b="1" sz="1100">
+                <a:solidFill>
+                  <a:srgbClr val="0F172A"/>
+                </a:solidFill>
+                <a:latin typeface="Segoe UI"/>
+              </a:rPr>
+              <a:t>End-to-End API Execution: </a:t>
+            </a:r>
+            <a:r>
+              <a:rPr sz="1050">
+                <a:solidFill>
+                  <a:srgbClr val="334155"/>
+                </a:solidFill>
+                <a:latin typeface="Segoe UI"/>
+              </a:rPr>
+              <a:t>The voice agent directly queries and updates the Core Banking Simulator (8090) in real-time.</a:t>
+            </a:r>
+          </a:p>
+          <a:p>
+            <a:pPr>
+              <a:spcAft>
+                <a:spcPts val="700"/>
+              </a:spcAft>
+            </a:pPr>
+            <a:r>
+              <a:rPr b="1" sz="1100">
+                <a:solidFill>
+                  <a:srgbClr val="1E40AF"/>
+                </a:solidFill>
+                <a:latin typeface="Segoe UI"/>
+              </a:rPr>
+              <a:t>• </a:t>
+            </a:r>
+            <a:r>
+              <a:rPr b="1" sz="1100">
+                <a:solidFill>
+                  <a:srgbClr val="0F172A"/>
+                </a:solidFill>
+                <a:latin typeface="Segoe UI"/>
+              </a:rPr>
+              <a:t>Automated Service Requests: </a:t>
+            </a:r>
+            <a:r>
+              <a:rPr sz="1050">
+                <a:solidFill>
+                  <a:srgbClr val="334155"/>
+                </a:solidFill>
+                <a:latin typeface="Segoe UI"/>
+              </a:rPr>
+              <a:t>Instant registration of loan statements, repayment schedules, and callback tickets with unique reference IDs (SR-1042).</a:t>
+            </a:r>
+          </a:p>
+          <a:p>
+            <a:pPr>
+              <a:spcAft>
+                <a:spcPts val="700"/>
+              </a:spcAft>
+            </a:pPr>
+            <a:r>
+              <a:rPr b="1" sz="1100">
+                <a:solidFill>
+                  <a:srgbClr val="1E40AF"/>
+                </a:solidFill>
+                <a:latin typeface="Segoe UI"/>
+              </a:rPr>
+              <a:t>• </a:t>
+            </a:r>
+            <a:r>
+              <a:rPr b="1" sz="1100">
+                <a:solidFill>
+                  <a:srgbClr val="0F172A"/>
+                </a:solidFill>
+                <a:latin typeface="Segoe UI"/>
+              </a:rPr>
+              <a:t>Formal Complaint Lodging: </a:t>
+            </a:r>
+            <a:r>
+              <a:rPr sz="1050">
+                <a:solidFill>
+                  <a:srgbClr val="334155"/>
+                </a:solidFill>
+                <a:latin typeface="Segoe UI"/>
+              </a:rPr>
+              <a:t>Logs grievances with category classification, department routing, and SLA tracking (CMP-3011).</a:t>
+            </a:r>
+          </a:p>
+          <a:p>
+            <a:pPr>
+              <a:spcAft>
+                <a:spcPts val="700"/>
+              </a:spcAft>
+            </a:pPr>
+            <a:r>
+              <a:rPr b="1" sz="1100">
+                <a:solidFill>
+                  <a:srgbClr val="1E40AF"/>
+                </a:solidFill>
+                <a:latin typeface="Segoe UI"/>
+              </a:rPr>
+              <a:t>• </a:t>
+            </a:r>
+            <a:r>
+              <a:rPr b="1" sz="1100">
+                <a:solidFill>
+                  <a:srgbClr val="0F172A"/>
+                </a:solidFill>
+                <a:latin typeface="Segoe UI"/>
+              </a:rPr>
+              <a:t>Phonetic Reference Repair: </a:t>
+            </a:r>
+            <a:r>
+              <a:rPr sz="1050">
+                <a:solidFill>
+                  <a:srgbClr val="334155"/>
+                </a:solidFill>
+                <a:latin typeface="Segoe UI"/>
+              </a:rPr>
+              <a:t>Spoken letters and numbers are phonetically spelled out and matched against active database records.</a:t>
+            </a:r>
+          </a:p>
+        </p:txBody>
+      </p:sp>
+      <p:sp>
+        <p:nvSpPr>
+          <p:cNvPr id="7" name="Rounded Rectangle 6"/>
+          <p:cNvSpPr/>
+          <p:nvPr/>
+        </p:nvSpPr>
+        <p:spPr>
+          <a:xfrm>
+            <a:off x="731520" y="5623560"/>
+            <a:ext cx="4937760" cy="868680"/>
+          </a:xfrm>
+          <a:prstGeom prst="roundRect">
+            <a:avLst/>
+          </a:prstGeom>
+          <a:solidFill>
+            <a:srgbClr val="F8FAFC"/>
+          </a:solidFill>
+          <a:ln w="12700">
+            <a:solidFill>
+              <a:srgbClr val="E2E8F0"/>
+            </a:solidFill>
+          </a:ln>
+        </p:spPr>
+        <p:style>
+          <a:lnRef idx="1">
+            <a:schemeClr val="accent1"/>
+          </a:lnRef>
+          <a:fillRef idx="3">
+            <a:schemeClr val="accent1"/>
+          </a:fillRef>
+          <a:effectRef idx="2">
+            <a:schemeClr val="accent1"/>
+          </a:effectRef>
+          <a:fontRef idx="minor">
+            <a:schemeClr val="lt1"/>
+          </a:fontRef>
+        </p:style>
+        <p:txBody>
+          <a:bodyPr rtlCol="0" anchor="ctr"/>
+          <a:lstStyle/>
+          <a:p>
+            <a:pPr algn="ctr"/>
+          </a:p>
+        </p:txBody>
+      </p:sp>
+      <p:sp>
+        <p:nvSpPr>
+          <p:cNvPr id="8" name="Rectangle 7"/>
+          <p:cNvSpPr/>
+          <p:nvPr/>
+        </p:nvSpPr>
+        <p:spPr>
+          <a:xfrm>
+            <a:off x="731520" y="5623560"/>
+            <a:ext cx="73152" cy="868680"/>
+          </a:xfrm>
+          <a:prstGeom prst="rect">
+            <a:avLst/>
+          </a:prstGeom>
+          <a:solidFill>
+            <a:srgbClr val="1E40AF"/>
+          </a:solidFill>
+          <a:ln>
+            <a:noFill/>
+          </a:ln>
+        </p:spPr>
+        <p:style>
+          <a:lnRef idx="1">
+            <a:schemeClr val="accent1"/>
+          </a:lnRef>
+          <a:fillRef idx="3">
+            <a:schemeClr val="accent1"/>
+          </a:fillRef>
+          <a:effectRef idx="2">
+            <a:schemeClr val="accent1"/>
+          </a:effectRef>
+          <a:fontRef idx="minor">
+            <a:schemeClr val="lt1"/>
+          </a:fontRef>
+        </p:style>
+        <p:txBody>
+          <a:bodyPr rtlCol="0" anchor="ctr"/>
+          <a:lstStyle/>
+          <a:p>
+            <a:pPr algn="ctr"/>
+          </a:p>
+        </p:txBody>
+      </p:sp>
+      <p:sp>
+        <p:nvSpPr>
+          <p:cNvPr id="9" name="TextBox 8"/>
+          <p:cNvSpPr txBox="1"/>
+          <p:nvPr/>
+        </p:nvSpPr>
+        <p:spPr>
+          <a:xfrm>
+            <a:off x="914400" y="5733288"/>
+            <a:ext cx="4572000" cy="649224"/>
+          </a:xfrm>
+          <a:prstGeom prst="rect">
+            <a:avLst/>
+          </a:prstGeom>
+          <a:noFill/>
+        </p:spPr>
+        <p:txBody>
+          <a:bodyPr wrap="square" lIns="0" tIns="0" rIns="0" bIns="0">
+            <a:spAutoFit/>
+          </a:bodyPr>
+          <a:lstStyle/>
+          <a:p>
+            <a:pPr>
+              <a:defRPr sz="1600" b="1">
+                <a:solidFill>
+                  <a:srgbClr val="1E40AF"/>
+                </a:solidFill>
+                <a:latin typeface="Segoe UI"/>
               </a:defRPr>
             </a:pPr>
             <a:r>
@@ -6351,28 +7550,29 @@
           </a:p>
           <a:p>
             <a:pPr>
-              <a:defRPr sz="1000">
+              <a:defRPr sz="950">
                 <a:solidFill>
                   <a:srgbClr val="64748B"/>
                 </a:solidFill>
-              </a:defRPr>
-            </a:pPr>
-            <a:r>
-              <a:t>SR-1042 / CMP-3011 Real-Time Creation</a:t>
-            </a:r>
-          </a:p>
-        </p:txBody>
-      </p:sp>
-      <p:sp>
-        <p:nvSpPr>
-          <p:cNvPr id="8" name="Rounded Rectangle 7"/>
+                <a:latin typeface="Segoe UI"/>
+              </a:defRPr>
+            </a:pPr>
+            <a:r>
+              <a:t>SR-1042 / CMP-3011 Real-Time API Execution</a:t>
+            </a:r>
+          </a:p>
+        </p:txBody>
+      </p:sp>
+      <p:sp>
+        <p:nvSpPr>
+          <p:cNvPr id="10" name="Rounded Rectangle 9"/>
           <p:cNvSpPr/>
           <p:nvPr/>
         </p:nvSpPr>
         <p:spPr>
           <a:xfrm>
-            <a:off x="6144768" y="978408"/>
-            <a:ext cx="5358384" cy="5440680"/>
+            <a:off x="5870448" y="932688"/>
+            <a:ext cx="5724144" cy="4446270"/>
           </a:xfrm>
           <a:prstGeom prst="roundRect">
             <a:avLst/>
@@ -6410,7 +7610,7 @@
       </p:sp>
       <p:pic>
         <p:nvPicPr>
-          <p:cNvPr id="9" name="Picture 8" descr="01_support_desk.png"/>
+          <p:cNvPr id="11" name="Picture 10" descr="01_support_desk.png"/>
           <p:cNvPicPr>
             <a:picLocks noChangeAspect="1"/>
           </p:cNvPicPr>
@@ -6424,8 +7624,8 @@
         </p:blipFill>
         <p:spPr>
           <a:xfrm>
-            <a:off x="6217920" y="1051560"/>
-            <a:ext cx="5212080" cy="4663440"/>
+            <a:off x="5943600" y="1005840"/>
+            <a:ext cx="5577840" cy="3486150"/>
           </a:xfrm>
           <a:prstGeom prst="rect">
             <a:avLst/>
@@ -6434,14 +7634,14 @@
       </p:pic>
       <p:sp>
         <p:nvSpPr>
-          <p:cNvPr id="10" name="TextBox 9"/>
+          <p:cNvPr id="12" name="TextBox 11"/>
           <p:cNvSpPr txBox="1"/>
           <p:nvPr/>
         </p:nvSpPr>
         <p:spPr>
           <a:xfrm>
-            <a:off x="6217920" y="5806440"/>
-            <a:ext cx="5212080" cy="548640"/>
+            <a:off x="5989320" y="4565142"/>
+            <a:ext cx="5486400" cy="777240"/>
           </a:xfrm>
           <a:prstGeom prst="rect">
             <a:avLst/>
@@ -6449,20 +7649,52 @@
           <a:noFill/>
         </p:spPr>
         <p:txBody>
-          <a:bodyPr wrap="square">
+          <a:bodyPr wrap="square" lIns="0" tIns="0" rIns="0" bIns="0">
             <a:spAutoFit/>
           </a:bodyPr>
           <a:lstStyle/>
           <a:p>
             <a:pPr>
-              <a:defRPr sz="1000" b="1">
+              <a:defRPr>
+                <a:latin typeface="Segoe UI"/>
+              </a:defRPr>
+            </a:pPr>
+            <a:r>
+              <a:rPr sz="1000">
+                <a:solidFill>
+                  <a:srgbClr val="16A34A"/>
+                </a:solidFill>
+              </a:rPr>
+              <a:t>● </a:t>
+            </a:r>
+            <a:r>
+              <a:rPr b="1" sz="950">
+                <a:solidFill>
+                  <a:srgbClr val="0F172A"/>
+                </a:solidFill>
+              </a:rPr>
+              <a:t>CORE BANKING OPERATIONS LEDGER  </a:t>
+            </a:r>
+            <a:r>
+              <a:rPr sz="850">
+                <a:solidFill>
+                  <a:srgbClr val="1E40AF"/>
+                </a:solidFill>
+              </a:rPr>
+              <a:t>(http://localhost:5173/ (Tickets &amp; Complaints Tabs))</a:t>
+            </a:r>
+          </a:p>
+          <a:p>
+            <a:pPr>
+              <a:defRPr sz="850">
                 <a:solidFill>
                   <a:srgbClr val="64748B"/>
                 </a:solidFill>
-              </a:defRPr>
-            </a:pPr>
-            <a:r>
-              <a:t>📷 Live Core Banking Operations Ledger: Tickets, Complaints &amp; Service Requests</a:t>
+                <a:latin typeface="Segoe UI"/>
+              </a:defRPr>
+            </a:pPr>
+            <a:r>
+              <a:t>Tech Architecture: Simulated Core Banking (8090) · SQLite Backend · SLA Department Routing</a:t>
             </a:r>
           </a:p>
         </p:txBody>
@@ -6494,7 +7726,7 @@
         <p:spPr>
           <a:xfrm>
             <a:off x="0" y="0"/>
-            <a:ext cx="12191695" cy="777240"/>
+            <a:ext cx="12191695" cy="749808"/>
           </a:xfrm>
           <a:prstGeom prst="rect">
             <a:avLst/>
@@ -6537,7 +7769,7 @@
         <p:spPr>
           <a:xfrm>
             <a:off x="731520" y="164592"/>
-            <a:ext cx="6400800" cy="457200"/>
+            <a:ext cx="6858000" cy="411480"/>
           </a:xfrm>
           <a:prstGeom prst="rect">
             <a:avLst/>
@@ -6551,14 +7783,25 @@
           <a:lstStyle/>
           <a:p>
             <a:pPr>
-              <a:defRPr sz="1300" b="1">
+              <a:defRPr sz="1200" b="1">
+                <a:latin typeface="Segoe UI"/>
+              </a:defRPr>
+            </a:pPr>
+            <a:r>
+              <a:rPr>
                 <a:solidFill>
                   <a:srgbClr val="0EA5E9"/>
                 </a:solidFill>
-              </a:defRPr>
-            </a:pPr>
-            <a:r>
-              <a:t>AZENTIO-CSM  |  BFSI AUTONOMOUS CONVERSATIONAL AI</a:t>
+              </a:rPr>
+              <a:t>AZENTIO-CSM  </a:t>
+            </a:r>
+            <a:r>
+              <a:rPr sz="1100">
+                <a:solidFill>
+                  <a:srgbClr val="FFFFFF"/>
+                </a:solidFill>
+              </a:rPr>
+              <a:t>|  BFSI AUTONOMOUS CONVERSATIONAL VOICE PLATFORM</a:t>
             </a:r>
           </a:p>
         </p:txBody>
@@ -6572,7 +7815,7 @@
         <p:spPr>
           <a:xfrm>
             <a:off x="9601200" y="164592"/>
-            <a:ext cx="1828800" cy="457200"/>
+            <a:ext cx="1828800" cy="411480"/>
           </a:xfrm>
           <a:prstGeom prst="rect">
             <a:avLst/>
@@ -6586,10 +7829,11 @@
           <a:lstStyle/>
           <a:p>
             <a:pPr algn="r">
-              <a:defRPr sz="1200" b="1">
-                <a:solidFill>
-                  <a:srgbClr val="FFFFFF"/>
-                </a:solidFill>
+              <a:defRPr sz="1100" b="1">
+                <a:solidFill>
+                  <a:srgbClr val="CBD5E1"/>
+                </a:solidFill>
+                <a:latin typeface="Segoe UI"/>
               </a:defRPr>
             </a:pPr>
             <a:r>
@@ -6600,182 +7844,23 @@
       </p:sp>
       <p:sp>
         <p:nvSpPr>
-          <p:cNvPr id="5" name="TextBox 4"/>
-          <p:cNvSpPr txBox="1"/>
-          <p:nvPr/>
-        </p:nvSpPr>
-        <p:spPr>
-          <a:xfrm>
-            <a:off x="731520" y="960120"/>
-            <a:ext cx="5303520" cy="5394960"/>
-          </a:xfrm>
-          <a:prstGeom prst="rect">
-            <a:avLst/>
-          </a:prstGeom>
-          <a:noFill/>
-        </p:spPr>
-        <p:txBody>
-          <a:bodyPr wrap="square" lIns="0" tIns="0" rIns="0" bIns="0">
-            <a:spAutoFit/>
-          </a:bodyPr>
-          <a:lstStyle/>
-          <a:p>
-            <a:pPr>
-              <a:defRPr sz="1100" b="1">
-                <a:solidFill>
-                  <a:srgbClr val="2563EB"/>
-                </a:solidFill>
-              </a:defRPr>
-            </a:pPr>
-            <a:r>
-              <a:t>EXPLAINABILITY &amp; GROUNDING</a:t>
-            </a:r>
-          </a:p>
-          <a:p>
-            <a:pPr>
-              <a:spcAft>
-                <a:spcPts val="400"/>
-              </a:spcAft>
-              <a:defRPr sz="2000" b="1">
-                <a:solidFill>
-                  <a:srgbClr val="0F172A"/>
-                </a:solidFill>
-              </a:defRPr>
-            </a:pPr>
-            <a:r>
-              <a:t>Explainability: 'Why Did the Agent Say This?'</a:t>
-            </a:r>
-          </a:p>
-          <a:p>
-            <a:pPr>
-              <a:spcAft>
-                <a:spcPts val="1400"/>
-              </a:spcAft>
-              <a:defRPr sz="1200">
-                <a:solidFill>
-                  <a:srgbClr val="64748B"/>
-                </a:solidFill>
-              </a:defRPr>
-            </a:pPr>
-            <a:r>
-              <a:t>Structured Decision Rationale, Masked Tool Traces &amp; Fact Verification</a:t>
-            </a:r>
-          </a:p>
-          <a:p>
-            <a:pPr>
-              <a:spcAft>
-                <a:spcPts val="800"/>
-              </a:spcAft>
-            </a:pPr>
-            <a:r>
-              <a:rPr b="1" sz="1150">
-                <a:solidFill>
-                  <a:srgbClr val="0F172A"/>
-                </a:solidFill>
-              </a:rPr>
-              <a:t>•  Transparent Tool Execution: </a:t>
-            </a:r>
-            <a:r>
-              <a:rPr sz="1100">
-                <a:solidFill>
-                  <a:srgbClr val="1E293B"/>
-                </a:solidFill>
-              </a:rPr>
-              <a:t>Every agent utterance is accompanied by an expandable 'Retrieved' card showing the exact tool called and parameters used.</a:t>
-            </a:r>
-          </a:p>
-          <a:p>
-            <a:pPr>
-              <a:spcAft>
-                <a:spcPts val="800"/>
-              </a:spcAft>
-            </a:pPr>
-            <a:r>
-              <a:rPr b="1" sz="1150">
-                <a:solidFill>
-                  <a:srgbClr val="0F172A"/>
-                </a:solidFill>
-              </a:rPr>
-              <a:t>•  Pre-Speech Grounding Validator: </a:t>
-            </a:r>
-            <a:r>
-              <a:rPr sz="1100">
-                <a:solidFill>
-                  <a:srgbClr val="1E293B"/>
-                </a:solidFill>
-              </a:rPr>
-              <a:t>Extracts figures, dates, and amounts from draft replies and verifies existence in tool outputs before audio generation.</a:t>
-            </a:r>
-          </a:p>
-          <a:p>
-            <a:pPr>
-              <a:spcAft>
-                <a:spcPts val="800"/>
-              </a:spcAft>
-            </a:pPr>
-            <a:r>
-              <a:rPr b="1" sz="1150">
-                <a:solidFill>
-                  <a:srgbClr val="0F172A"/>
-                </a:solidFill>
-              </a:rPr>
-              <a:t>•  Anti-Hallucination Gate: </a:t>
-            </a:r>
-            <a:r>
-              <a:rPr sz="1100">
-                <a:solidFill>
-                  <a:srgbClr val="1E293B"/>
-                </a:solidFill>
-              </a:rPr>
-              <a:t>If a number cannot be verified in the bank simulator output, the draft reply is intercepted and safely deflected.</a:t>
-            </a:r>
-          </a:p>
-          <a:p>
-            <a:pPr>
-              <a:spcAft>
-                <a:spcPts val="800"/>
-              </a:spcAft>
-            </a:pPr>
-            <a:r>
-              <a:rPr b="1" sz="1150">
-                <a:solidFill>
-                  <a:srgbClr val="0F172A"/>
-                </a:solidFill>
-              </a:rPr>
-              <a:t>•  Raw JSON Auditability: </a:t>
-            </a:r>
-            <a:r>
-              <a:rPr sz="1100">
-                <a:solidFill>
-                  <a:srgbClr val="1E293B"/>
-                </a:solidFill>
-              </a:rPr>
-              <a:t>Operators and compliance officers can inspect the underlying JSON payload for every turn with one click.</a:t>
-            </a:r>
-          </a:p>
-        </p:txBody>
-      </p:sp>
-      <p:sp>
-        <p:nvSpPr>
-          <p:cNvPr id="6" name="Rounded Rectangle 5"/>
+          <p:cNvPr id="5" name="Rounded Rectangle 4"/>
           <p:cNvSpPr/>
           <p:nvPr/>
         </p:nvSpPr>
         <p:spPr>
           <a:xfrm>
-            <a:off x="731520" y="5715000"/>
-            <a:ext cx="5120640" cy="777240"/>
+            <a:off x="731520" y="1005840"/>
+            <a:ext cx="2011680" cy="292608"/>
           </a:xfrm>
           <a:prstGeom prst="roundRect">
             <a:avLst/>
           </a:prstGeom>
           <a:solidFill>
-            <a:srgbClr val="F8FAFC"/>
+            <a:srgbClr val="EEF2FF"/>
           </a:solidFill>
-          <a:ln w="19050">
-            <a:solidFill>
-              <a:srgbClr val="0EA5E9"/>
-            </a:solidFill>
+          <a:ln>
+            <a:noFill/>
           </a:ln>
         </p:spPr>
         <p:style>
@@ -6796,20 +7881,30 @@
           <a:bodyPr rtlCol="0" anchor="ctr"/>
           <a:lstStyle/>
           <a:p>
-            <a:pPr algn="ctr"/>
-          </a:p>
-        </p:txBody>
-      </p:sp>
-      <p:sp>
-        <p:nvSpPr>
-          <p:cNvPr id="7" name="TextBox 6"/>
+            <a:pPr algn="ctr">
+              <a:defRPr sz="950" b="1">
+                <a:solidFill>
+                  <a:srgbClr val="312E81"/>
+                </a:solidFill>
+                <a:latin typeface="Segoe UI"/>
+              </a:defRPr>
+            </a:pPr>
+            <a:r>
+              <a:t>EXPLAINABILITY &amp; GROUNDING</a:t>
+            </a:r>
+          </a:p>
+        </p:txBody>
+      </p:sp>
+      <p:sp>
+        <p:nvSpPr>
+          <p:cNvPr id="6" name="TextBox 5"/>
           <p:cNvSpPr txBox="1"/>
           <p:nvPr/>
         </p:nvSpPr>
         <p:spPr>
           <a:xfrm>
-            <a:off x="868680" y="5779008"/>
-            <a:ext cx="4846320" cy="640080"/>
+            <a:off x="731520" y="1353312"/>
+            <a:ext cx="4937760" cy="4114800"/>
           </a:xfrm>
           <a:prstGeom prst="rect">
             <a:avLst/>
@@ -6817,16 +7912,296 @@
           <a:noFill/>
         </p:spPr>
         <p:txBody>
-          <a:bodyPr wrap="square">
+          <a:bodyPr wrap="square" lIns="0" tIns="0" rIns="0" bIns="0">
             <a:spAutoFit/>
           </a:bodyPr>
           <a:lstStyle/>
           <a:p>
             <a:pPr>
-              <a:defRPr sz="1500" b="1">
-                <a:solidFill>
-                  <a:srgbClr val="2563EB"/>
-                </a:solidFill>
+              <a:spcAft>
+                <a:spcPts val="400"/>
+              </a:spcAft>
+              <a:defRPr sz="2100" b="1">
+                <a:solidFill>
+                  <a:srgbClr val="0F172A"/>
+                </a:solidFill>
+                <a:latin typeface="Segoe UI"/>
+              </a:defRPr>
+            </a:pPr>
+            <a:r>
+              <a:t>Explainability: 'Why Did the Agent Say This?'</a:t>
+            </a:r>
+          </a:p>
+          <a:p>
+            <a:pPr>
+              <a:spcAft>
+                <a:spcPts val="1400"/>
+              </a:spcAft>
+              <a:defRPr sz="1150">
+                <a:solidFill>
+                  <a:srgbClr val="64748B"/>
+                </a:solidFill>
+                <a:latin typeface="Segoe UI"/>
+              </a:defRPr>
+            </a:pPr>
+            <a:r>
+              <a:t>Structured Decision Rationale, Masked Tool Traces &amp; Fact Verification</a:t>
+            </a:r>
+          </a:p>
+          <a:p>
+            <a:pPr>
+              <a:spcAft>
+                <a:spcPts val="700"/>
+              </a:spcAft>
+            </a:pPr>
+            <a:r>
+              <a:rPr b="1" sz="1100">
+                <a:solidFill>
+                  <a:srgbClr val="1E40AF"/>
+                </a:solidFill>
+                <a:latin typeface="Segoe UI"/>
+              </a:rPr>
+              <a:t>• </a:t>
+            </a:r>
+            <a:r>
+              <a:rPr b="1" sz="1100">
+                <a:solidFill>
+                  <a:srgbClr val="0F172A"/>
+                </a:solidFill>
+                <a:latin typeface="Segoe UI"/>
+              </a:rPr>
+              <a:t>Transparent Tool Execution: </a:t>
+            </a:r>
+            <a:r>
+              <a:rPr sz="1050">
+                <a:solidFill>
+                  <a:srgbClr val="334155"/>
+                </a:solidFill>
+                <a:latin typeface="Segoe UI"/>
+              </a:rPr>
+              <a:t>Every agent utterance is accompanied by an expandable 'Retrieved' card showing the exact tool called and parameters used.</a:t>
+            </a:r>
+          </a:p>
+          <a:p>
+            <a:pPr>
+              <a:spcAft>
+                <a:spcPts val="700"/>
+              </a:spcAft>
+            </a:pPr>
+            <a:r>
+              <a:rPr b="1" sz="1100">
+                <a:solidFill>
+                  <a:srgbClr val="1E40AF"/>
+                </a:solidFill>
+                <a:latin typeface="Segoe UI"/>
+              </a:rPr>
+              <a:t>• </a:t>
+            </a:r>
+            <a:r>
+              <a:rPr b="1" sz="1100">
+                <a:solidFill>
+                  <a:srgbClr val="0F172A"/>
+                </a:solidFill>
+                <a:latin typeface="Segoe UI"/>
+              </a:rPr>
+              <a:t>Pre-Speech Grounding Validator: </a:t>
+            </a:r>
+            <a:r>
+              <a:rPr sz="1050">
+                <a:solidFill>
+                  <a:srgbClr val="334155"/>
+                </a:solidFill>
+                <a:latin typeface="Segoe UI"/>
+              </a:rPr>
+              <a:t>Extracts figures, dates, and amounts from draft replies and verifies existence in tool outputs before audio generation.</a:t>
+            </a:r>
+          </a:p>
+          <a:p>
+            <a:pPr>
+              <a:spcAft>
+                <a:spcPts val="700"/>
+              </a:spcAft>
+            </a:pPr>
+            <a:r>
+              <a:rPr b="1" sz="1100">
+                <a:solidFill>
+                  <a:srgbClr val="1E40AF"/>
+                </a:solidFill>
+                <a:latin typeface="Segoe UI"/>
+              </a:rPr>
+              <a:t>• </a:t>
+            </a:r>
+            <a:r>
+              <a:rPr b="1" sz="1100">
+                <a:solidFill>
+                  <a:srgbClr val="0F172A"/>
+                </a:solidFill>
+                <a:latin typeface="Segoe UI"/>
+              </a:rPr>
+              <a:t>Anti-Hallucination Gate: </a:t>
+            </a:r>
+            <a:r>
+              <a:rPr sz="1050">
+                <a:solidFill>
+                  <a:srgbClr val="334155"/>
+                </a:solidFill>
+                <a:latin typeface="Segoe UI"/>
+              </a:rPr>
+              <a:t>If a number cannot be verified in the bank simulator output, the draft reply is intercepted and safely deflected.</a:t>
+            </a:r>
+          </a:p>
+          <a:p>
+            <a:pPr>
+              <a:spcAft>
+                <a:spcPts val="700"/>
+              </a:spcAft>
+            </a:pPr>
+            <a:r>
+              <a:rPr b="1" sz="1100">
+                <a:solidFill>
+                  <a:srgbClr val="1E40AF"/>
+                </a:solidFill>
+                <a:latin typeface="Segoe UI"/>
+              </a:rPr>
+              <a:t>• </a:t>
+            </a:r>
+            <a:r>
+              <a:rPr b="1" sz="1100">
+                <a:solidFill>
+                  <a:srgbClr val="0F172A"/>
+                </a:solidFill>
+                <a:latin typeface="Segoe UI"/>
+              </a:rPr>
+              <a:t>Raw JSON Auditability: </a:t>
+            </a:r>
+            <a:r>
+              <a:rPr sz="1050">
+                <a:solidFill>
+                  <a:srgbClr val="334155"/>
+                </a:solidFill>
+                <a:latin typeface="Segoe UI"/>
+              </a:rPr>
+              <a:t>Operators and compliance officers can inspect the underlying JSON payload for every turn with one click.</a:t>
+            </a:r>
+          </a:p>
+        </p:txBody>
+      </p:sp>
+      <p:sp>
+        <p:nvSpPr>
+          <p:cNvPr id="7" name="Rounded Rectangle 6"/>
+          <p:cNvSpPr/>
+          <p:nvPr/>
+        </p:nvSpPr>
+        <p:spPr>
+          <a:xfrm>
+            <a:off x="731520" y="5623560"/>
+            <a:ext cx="4937760" cy="868680"/>
+          </a:xfrm>
+          <a:prstGeom prst="roundRect">
+            <a:avLst/>
+          </a:prstGeom>
+          <a:solidFill>
+            <a:srgbClr val="F8FAFC"/>
+          </a:solidFill>
+          <a:ln w="12700">
+            <a:solidFill>
+              <a:srgbClr val="E2E8F0"/>
+            </a:solidFill>
+          </a:ln>
+        </p:spPr>
+        <p:style>
+          <a:lnRef idx="1">
+            <a:schemeClr val="accent1"/>
+          </a:lnRef>
+          <a:fillRef idx="3">
+            <a:schemeClr val="accent1"/>
+          </a:fillRef>
+          <a:effectRef idx="2">
+            <a:schemeClr val="accent1"/>
+          </a:effectRef>
+          <a:fontRef idx="minor">
+            <a:schemeClr val="lt1"/>
+          </a:fontRef>
+        </p:style>
+        <p:txBody>
+          <a:bodyPr rtlCol="0" anchor="ctr"/>
+          <a:lstStyle/>
+          <a:p>
+            <a:pPr algn="ctr"/>
+          </a:p>
+        </p:txBody>
+      </p:sp>
+      <p:sp>
+        <p:nvSpPr>
+          <p:cNvPr id="8" name="Rectangle 7"/>
+          <p:cNvSpPr/>
+          <p:nvPr/>
+        </p:nvSpPr>
+        <p:spPr>
+          <a:xfrm>
+            <a:off x="731520" y="5623560"/>
+            <a:ext cx="73152" cy="868680"/>
+          </a:xfrm>
+          <a:prstGeom prst="rect">
+            <a:avLst/>
+          </a:prstGeom>
+          <a:solidFill>
+            <a:srgbClr val="1E40AF"/>
+          </a:solidFill>
+          <a:ln>
+            <a:noFill/>
+          </a:ln>
+        </p:spPr>
+        <p:style>
+          <a:lnRef idx="1">
+            <a:schemeClr val="accent1"/>
+          </a:lnRef>
+          <a:fillRef idx="3">
+            <a:schemeClr val="accent1"/>
+          </a:fillRef>
+          <a:effectRef idx="2">
+            <a:schemeClr val="accent1"/>
+          </a:effectRef>
+          <a:fontRef idx="minor">
+            <a:schemeClr val="lt1"/>
+          </a:fontRef>
+        </p:style>
+        <p:txBody>
+          <a:bodyPr rtlCol="0" anchor="ctr"/>
+          <a:lstStyle/>
+          <a:p>
+            <a:pPr algn="ctr"/>
+          </a:p>
+        </p:txBody>
+      </p:sp>
+      <p:sp>
+        <p:nvSpPr>
+          <p:cNvPr id="9" name="TextBox 8"/>
+          <p:cNvSpPr txBox="1"/>
+          <p:nvPr/>
+        </p:nvSpPr>
+        <p:spPr>
+          <a:xfrm>
+            <a:off x="914400" y="5733288"/>
+            <a:ext cx="4572000" cy="649224"/>
+          </a:xfrm>
+          <a:prstGeom prst="rect">
+            <a:avLst/>
+          </a:prstGeom>
+          <a:noFill/>
+        </p:spPr>
+        <p:txBody>
+          <a:bodyPr wrap="square" lIns="0" tIns="0" rIns="0" bIns="0">
+            <a:spAutoFit/>
+          </a:bodyPr>
+          <a:lstStyle/>
+          <a:p>
+            <a:pPr>
+              <a:defRPr sz="1600" b="1">
+                <a:solidFill>
+                  <a:srgbClr val="1E40AF"/>
+                </a:solidFill>
+                <a:latin typeface="Segoe UI"/>
               </a:defRPr>
             </a:pPr>
             <a:r>
@@ -6835,28 +8210,29 @@
           </a:p>
           <a:p>
             <a:pPr>
-              <a:defRPr sz="1000">
+              <a:defRPr sz="950">
                 <a:solidFill>
                   <a:srgbClr val="64748B"/>
                 </a:solidFill>
-              </a:defRPr>
-            </a:pPr>
-            <a:r>
-              <a:t>Every Claim Linked to Simulator Output</a:t>
-            </a:r>
-          </a:p>
-        </p:txBody>
-      </p:sp>
-      <p:sp>
-        <p:nvSpPr>
-          <p:cNvPr id="8" name="Rounded Rectangle 7"/>
+                <a:latin typeface="Segoe UI"/>
+              </a:defRPr>
+            </a:pPr>
+            <a:r>
+              <a:t>Every Claim Linked to Core Banking API Output</a:t>
+            </a:r>
+          </a:p>
+        </p:txBody>
+      </p:sp>
+      <p:sp>
+        <p:nvSpPr>
+          <p:cNvPr id="10" name="Rounded Rectangle 9"/>
           <p:cNvSpPr/>
           <p:nvPr/>
         </p:nvSpPr>
         <p:spPr>
           <a:xfrm>
-            <a:off x="6144768" y="978408"/>
-            <a:ext cx="5358384" cy="5440680"/>
+            <a:off x="5870448" y="932688"/>
+            <a:ext cx="5724144" cy="4446270"/>
           </a:xfrm>
           <a:prstGeom prst="roundRect">
             <a:avLst/>
@@ -6894,7 +8270,7 @@
       </p:sp>
       <p:pic>
         <p:nvPicPr>
-          <p:cNvPr id="9" name="Picture 8" descr="04_tool_trace.png"/>
+          <p:cNvPr id="11" name="Picture 10" descr="04_tool_trace.png"/>
           <p:cNvPicPr>
             <a:picLocks noChangeAspect="1"/>
           </p:cNvPicPr>
@@ -6908,8 +8284,8 @@
         </p:blipFill>
         <p:spPr>
           <a:xfrm>
-            <a:off x="6217920" y="1051560"/>
-            <a:ext cx="5212080" cy="4663440"/>
+            <a:off x="5943600" y="1005840"/>
+            <a:ext cx="5577840" cy="3486150"/>
           </a:xfrm>
           <a:prstGeom prst="rect">
             <a:avLst/>
@@ -6918,14 +8294,14 @@
       </p:pic>
       <p:sp>
         <p:nvSpPr>
-          <p:cNvPr id="10" name="TextBox 9"/>
+          <p:cNvPr id="12" name="TextBox 11"/>
           <p:cNvSpPr txBox="1"/>
           <p:nvPr/>
         </p:nvSpPr>
         <p:spPr>
           <a:xfrm>
-            <a:off x="6217920" y="5806440"/>
-            <a:ext cx="5212080" cy="548640"/>
+            <a:off x="5989320" y="4565142"/>
+            <a:ext cx="5486400" cy="777240"/>
           </a:xfrm>
           <a:prstGeom prst="rect">
             <a:avLst/>
@@ -6933,20 +8309,52 @@
           <a:noFill/>
         </p:spPr>
         <p:txBody>
-          <a:bodyPr wrap="square">
+          <a:bodyPr wrap="square" lIns="0" tIns="0" rIns="0" bIns="0">
             <a:spAutoFit/>
           </a:bodyPr>
           <a:lstStyle/>
           <a:p>
             <a:pPr>
-              <a:defRPr sz="1000" b="1">
+              <a:defRPr>
+                <a:latin typeface="Segoe UI"/>
+              </a:defRPr>
+            </a:pPr>
+            <a:r>
+              <a:rPr sz="1000">
+                <a:solidFill>
+                  <a:srgbClr val="16A34A"/>
+                </a:solidFill>
+              </a:rPr>
+              <a:t>● </a:t>
+            </a:r>
+            <a:r>
+              <a:rPr b="1" sz="950">
+                <a:solidFill>
+                  <a:srgbClr val="0F172A"/>
+                </a:solidFill>
+              </a:rPr>
+              <a:t>EXPANDABLE TOOL TRACE &amp; GROUNDING CARD  </a:t>
+            </a:r>
+            <a:r>
+              <a:rPr sz="850">
+                <a:solidFill>
+                  <a:srgbClr val="1E40AF"/>
+                </a:solidFill>
+              </a:rPr>
+              <a:t>(http://localhost:5173/support/calls/475b0ac5-...)</a:t>
+            </a:r>
+          </a:p>
+          <a:p>
+            <a:pPr>
+              <a:defRPr sz="850">
                 <a:solidFill>
                   <a:srgbClr val="64748B"/>
                 </a:solidFill>
-              </a:defRPr>
-            </a:pPr>
-            <a:r>
-              <a:t>📷 Tool Trace Rationale Card: Masked Arguments, Status &amp; Retrieved Records</a:t>
+                <a:latin typeface="Segoe UI"/>
+              </a:defRPr>
+            </a:pPr>
+            <a:r>
+              <a:t>Tech Architecture: Structured Tool Trace · Masked Arguments · Raw JSON Inspection</a:t>
             </a:r>
           </a:p>
         </p:txBody>
@@ -6978,7 +8386,7 @@
         <p:spPr>
           <a:xfrm>
             <a:off x="0" y="0"/>
-            <a:ext cx="12191695" cy="777240"/>
+            <a:ext cx="12191695" cy="749808"/>
           </a:xfrm>
           <a:prstGeom prst="rect">
             <a:avLst/>
@@ -7021,7 +8429,7 @@
         <p:spPr>
           <a:xfrm>
             <a:off x="731520" y="164592"/>
-            <a:ext cx="6400800" cy="457200"/>
+            <a:ext cx="6858000" cy="411480"/>
           </a:xfrm>
           <a:prstGeom prst="rect">
             <a:avLst/>
@@ -7035,14 +8443,25 @@
           <a:lstStyle/>
           <a:p>
             <a:pPr>
-              <a:defRPr sz="1300" b="1">
+              <a:defRPr sz="1200" b="1">
+                <a:latin typeface="Segoe UI"/>
+              </a:defRPr>
+            </a:pPr>
+            <a:r>
+              <a:rPr>
                 <a:solidFill>
                   <a:srgbClr val="0EA5E9"/>
                 </a:solidFill>
-              </a:defRPr>
-            </a:pPr>
-            <a:r>
-              <a:t>AZENTIO-CSM  |  BFSI AUTONOMOUS CONVERSATIONAL AI</a:t>
+              </a:rPr>
+              <a:t>AZENTIO-CSM  </a:t>
+            </a:r>
+            <a:r>
+              <a:rPr sz="1100">
+                <a:solidFill>
+                  <a:srgbClr val="FFFFFF"/>
+                </a:solidFill>
+              </a:rPr>
+              <a:t>|  BFSI AUTONOMOUS CONVERSATIONAL VOICE PLATFORM</a:t>
             </a:r>
           </a:p>
         </p:txBody>
@@ -7056,7 +8475,7 @@
         <p:spPr>
           <a:xfrm>
             <a:off x="9601200" y="164592"/>
-            <a:ext cx="1828800" cy="457200"/>
+            <a:ext cx="1828800" cy="411480"/>
           </a:xfrm>
           <a:prstGeom prst="rect">
             <a:avLst/>
@@ -7070,10 +8489,11 @@
           <a:lstStyle/>
           <a:p>
             <a:pPr algn="r">
-              <a:defRPr sz="1200" b="1">
-                <a:solidFill>
-                  <a:srgbClr val="FFFFFF"/>
-                </a:solidFill>
+              <a:defRPr sz="1100" b="1">
+                <a:solidFill>
+                  <a:srgbClr val="CBD5E1"/>
+                </a:solidFill>
+                <a:latin typeface="Segoe UI"/>
               </a:defRPr>
             </a:pPr>
             <a:r>
@@ -7084,182 +8504,23 @@
       </p:sp>
       <p:sp>
         <p:nvSpPr>
-          <p:cNvPr id="5" name="TextBox 4"/>
-          <p:cNvSpPr txBox="1"/>
-          <p:nvPr/>
-        </p:nvSpPr>
-        <p:spPr>
-          <a:xfrm>
-            <a:off x="731520" y="960120"/>
-            <a:ext cx="5303520" cy="5394960"/>
-          </a:xfrm>
-          <a:prstGeom prst="rect">
-            <a:avLst/>
-          </a:prstGeom>
-          <a:noFill/>
-        </p:spPr>
-        <p:txBody>
-          <a:bodyPr wrap="square" lIns="0" tIns="0" rIns="0" bIns="0">
-            <a:spAutoFit/>
-          </a:bodyPr>
-          <a:lstStyle/>
-          <a:p>
-            <a:pPr>
-              <a:defRPr sz="1100" b="1">
-                <a:solidFill>
-                  <a:srgbClr val="2563EB"/>
-                </a:solidFill>
-              </a:defRPr>
-            </a:pPr>
-            <a:r>
-              <a:t>AUDITABILITY &amp; COMPLIANCE</a:t>
-            </a:r>
-          </a:p>
-          <a:p>
-            <a:pPr>
-              <a:spcAft>
-                <a:spcPts val="400"/>
-              </a:spcAft>
-              <a:defRPr sz="2000" b="1">
-                <a:solidFill>
-                  <a:srgbClr val="0F172A"/>
-                </a:solidFill>
-              </a:defRPr>
-            </a:pPr>
-            <a:r>
-              <a:t>Cryptographic SHA-256 Hash Chaining</a:t>
-            </a:r>
-          </a:p>
-          <a:p>
-            <a:pPr>
-              <a:spcAft>
-                <a:spcPts val="1400"/>
-              </a:spcAft>
-              <a:defRPr sz="1200">
-                <a:solidFill>
-                  <a:srgbClr val="64748B"/>
-                </a:solidFill>
-              </a:defRPr>
-            </a:pPr>
-            <a:r>
-              <a:t>Append-Only, Tamper-Evident Record of Every Customer Interaction</a:t>
-            </a:r>
-          </a:p>
-          <a:p>
-            <a:pPr>
-              <a:spcAft>
-                <a:spcPts val="800"/>
-              </a:spcAft>
-            </a:pPr>
-            <a:r>
-              <a:rPr b="1" sz="1150">
-                <a:solidFill>
-                  <a:srgbClr val="0F172A"/>
-                </a:solidFill>
-              </a:rPr>
-              <a:t>•  Mathematical Hash Chaining: </a:t>
-            </a:r>
-            <a:r>
-              <a:rPr sz="1100">
-                <a:solidFill>
-                  <a:srgbClr val="1E293B"/>
-                </a:solidFill>
-              </a:rPr>
-              <a:t>Every action produces hash = sha256(prev_hash | actor | action | payload | timestamp) rooted at Genesis 0000...</a:t>
-            </a:r>
-          </a:p>
-          <a:p>
-            <a:pPr>
-              <a:spcAft>
-                <a:spcPts val="800"/>
-              </a:spcAft>
-            </a:pPr>
-            <a:r>
-              <a:rPr b="1" sz="1150">
-                <a:solidFill>
-                  <a:srgbClr val="0F172A"/>
-                </a:solidFill>
-              </a:rPr>
-              <a:t>•  1-Click Integrity Verification: </a:t>
-            </a:r>
-            <a:r>
-              <a:rPr sz="1100">
-                <a:solidFill>
-                  <a:srgbClr val="1E293B"/>
-                </a:solidFill>
-              </a:rPr>
-              <a:t>'Verify Chain' button executes cryptographic audit across all historical events; flags any modified, inserted or deleted records.</a:t>
-            </a:r>
-          </a:p>
-          <a:p>
-            <a:pPr>
-              <a:spcAft>
-                <a:spcPts val="800"/>
-              </a:spcAft>
-            </a:pPr>
-            <a:r>
-              <a:rPr b="1" sz="1150">
-                <a:solidFill>
-                  <a:srgbClr val="0F172A"/>
-                </a:solidFill>
-              </a:rPr>
-              <a:t>•  Four-Eyes Governance: </a:t>
-            </a:r>
-            <a:r>
-              <a:rPr sz="1100">
-                <a:solidFill>
-                  <a:srgbClr val="1E293B"/>
-                </a:solidFill>
-              </a:rPr>
-              <a:t>Reviewers who initiated or handled a case are cryptographically prevented from approving it.</a:t>
-            </a:r>
-          </a:p>
-          <a:p>
-            <a:pPr>
-              <a:spcAft>
-                <a:spcPts val="800"/>
-              </a:spcAft>
-            </a:pPr>
-            <a:r>
-              <a:rPr b="1" sz="1150">
-                <a:solidFill>
-                  <a:srgbClr val="0F172A"/>
-                </a:solidFill>
-              </a:rPr>
-              <a:t>•  Regulatory Export Ready: </a:t>
-            </a:r>
-            <a:r>
-              <a:rPr sz="1100">
-                <a:solidFill>
-                  <a:srgbClr val="1E293B"/>
-                </a:solidFill>
-              </a:rPr>
-              <a:t>Export entire conversation trails with cryptographic signatures for RBI / SEBI audit compliance.</a:t>
-            </a:r>
-          </a:p>
-        </p:txBody>
-      </p:sp>
-      <p:sp>
-        <p:nvSpPr>
-          <p:cNvPr id="6" name="Rounded Rectangle 5"/>
+          <p:cNvPr id="5" name="Rounded Rectangle 4"/>
           <p:cNvSpPr/>
           <p:nvPr/>
         </p:nvSpPr>
         <p:spPr>
           <a:xfrm>
-            <a:off x="731520" y="5715000"/>
-            <a:ext cx="5120640" cy="777240"/>
+            <a:off x="731520" y="1005840"/>
+            <a:ext cx="2011680" cy="292608"/>
           </a:xfrm>
           <a:prstGeom prst="roundRect">
             <a:avLst/>
           </a:prstGeom>
           <a:solidFill>
-            <a:srgbClr val="F8FAFC"/>
+            <a:srgbClr val="EEF2FF"/>
           </a:solidFill>
-          <a:ln w="19050">
-            <a:solidFill>
-              <a:srgbClr val="0EA5E9"/>
-            </a:solidFill>
+          <a:ln>
+            <a:noFill/>
           </a:ln>
         </p:spPr>
         <p:style>
@@ -7280,20 +8541,30 @@
           <a:bodyPr rtlCol="0" anchor="ctr"/>
           <a:lstStyle/>
           <a:p>
-            <a:pPr algn="ctr"/>
-          </a:p>
-        </p:txBody>
-      </p:sp>
-      <p:sp>
-        <p:nvSpPr>
-          <p:cNvPr id="7" name="TextBox 6"/>
+            <a:pPr algn="ctr">
+              <a:defRPr sz="950" b="1">
+                <a:solidFill>
+                  <a:srgbClr val="312E81"/>
+                </a:solidFill>
+                <a:latin typeface="Segoe UI"/>
+              </a:defRPr>
+            </a:pPr>
+            <a:r>
+              <a:t>AUDITABILITY &amp; COMPLIANCE</a:t>
+            </a:r>
+          </a:p>
+        </p:txBody>
+      </p:sp>
+      <p:sp>
+        <p:nvSpPr>
+          <p:cNvPr id="6" name="TextBox 5"/>
           <p:cNvSpPr txBox="1"/>
           <p:nvPr/>
         </p:nvSpPr>
         <p:spPr>
           <a:xfrm>
-            <a:off x="868680" y="5779008"/>
-            <a:ext cx="4846320" cy="640080"/>
+            <a:off x="731520" y="1353312"/>
+            <a:ext cx="4937760" cy="4114800"/>
           </a:xfrm>
           <a:prstGeom prst="rect">
             <a:avLst/>
@@ -7301,16 +8572,296 @@
           <a:noFill/>
         </p:spPr>
         <p:txBody>
-          <a:bodyPr wrap="square">
+          <a:bodyPr wrap="square" lIns="0" tIns="0" rIns="0" bIns="0">
             <a:spAutoFit/>
           </a:bodyPr>
           <a:lstStyle/>
           <a:p>
             <a:pPr>
-              <a:defRPr sz="1500" b="1">
-                <a:solidFill>
-                  <a:srgbClr val="2563EB"/>
-                </a:solidFill>
+              <a:spcAft>
+                <a:spcPts val="400"/>
+              </a:spcAft>
+              <a:defRPr sz="2100" b="1">
+                <a:solidFill>
+                  <a:srgbClr val="0F172A"/>
+                </a:solidFill>
+                <a:latin typeface="Segoe UI"/>
+              </a:defRPr>
+            </a:pPr>
+            <a:r>
+              <a:t>Cryptographic SHA-256 Hash Chaining</a:t>
+            </a:r>
+          </a:p>
+          <a:p>
+            <a:pPr>
+              <a:spcAft>
+                <a:spcPts val="1400"/>
+              </a:spcAft>
+              <a:defRPr sz="1150">
+                <a:solidFill>
+                  <a:srgbClr val="64748B"/>
+                </a:solidFill>
+                <a:latin typeface="Segoe UI"/>
+              </a:defRPr>
+            </a:pPr>
+            <a:r>
+              <a:t>Append-Only, Tamper-Evident Record of Every Customer Interaction</a:t>
+            </a:r>
+          </a:p>
+          <a:p>
+            <a:pPr>
+              <a:spcAft>
+                <a:spcPts val="700"/>
+              </a:spcAft>
+            </a:pPr>
+            <a:r>
+              <a:rPr b="1" sz="1100">
+                <a:solidFill>
+                  <a:srgbClr val="1E40AF"/>
+                </a:solidFill>
+                <a:latin typeface="Segoe UI"/>
+              </a:rPr>
+              <a:t>• </a:t>
+            </a:r>
+            <a:r>
+              <a:rPr b="1" sz="1100">
+                <a:solidFill>
+                  <a:srgbClr val="0F172A"/>
+                </a:solidFill>
+                <a:latin typeface="Segoe UI"/>
+              </a:rPr>
+              <a:t>Mathematical Hash Chaining: </a:t>
+            </a:r>
+            <a:r>
+              <a:rPr sz="1050">
+                <a:solidFill>
+                  <a:srgbClr val="334155"/>
+                </a:solidFill>
+                <a:latin typeface="Segoe UI"/>
+              </a:rPr>
+              <a:t>Every action produces hash = sha256(prev_hash | actor | action | payload | timestamp) rooted at Genesis 0000...</a:t>
+            </a:r>
+          </a:p>
+          <a:p>
+            <a:pPr>
+              <a:spcAft>
+                <a:spcPts val="700"/>
+              </a:spcAft>
+            </a:pPr>
+            <a:r>
+              <a:rPr b="1" sz="1100">
+                <a:solidFill>
+                  <a:srgbClr val="1E40AF"/>
+                </a:solidFill>
+                <a:latin typeface="Segoe UI"/>
+              </a:rPr>
+              <a:t>• </a:t>
+            </a:r>
+            <a:r>
+              <a:rPr b="1" sz="1100">
+                <a:solidFill>
+                  <a:srgbClr val="0F172A"/>
+                </a:solidFill>
+                <a:latin typeface="Segoe UI"/>
+              </a:rPr>
+              <a:t>1-Click Integrity Verification: </a:t>
+            </a:r>
+            <a:r>
+              <a:rPr sz="1050">
+                <a:solidFill>
+                  <a:srgbClr val="334155"/>
+                </a:solidFill>
+                <a:latin typeface="Segoe UI"/>
+              </a:rPr>
+              <a:t>'Verify Chain' button executes cryptographic audit across all historical events; flags any modified, inserted or deleted records.</a:t>
+            </a:r>
+          </a:p>
+          <a:p>
+            <a:pPr>
+              <a:spcAft>
+                <a:spcPts val="700"/>
+              </a:spcAft>
+            </a:pPr>
+            <a:r>
+              <a:rPr b="1" sz="1100">
+                <a:solidFill>
+                  <a:srgbClr val="1E40AF"/>
+                </a:solidFill>
+                <a:latin typeface="Segoe UI"/>
+              </a:rPr>
+              <a:t>• </a:t>
+            </a:r>
+            <a:r>
+              <a:rPr b="1" sz="1100">
+                <a:solidFill>
+                  <a:srgbClr val="0F172A"/>
+                </a:solidFill>
+                <a:latin typeface="Segoe UI"/>
+              </a:rPr>
+              <a:t>Four-Eyes Governance: </a:t>
+            </a:r>
+            <a:r>
+              <a:rPr sz="1050">
+                <a:solidFill>
+                  <a:srgbClr val="334155"/>
+                </a:solidFill>
+                <a:latin typeface="Segoe UI"/>
+              </a:rPr>
+              <a:t>Reviewers who initiated or handled a case are cryptographically prevented from approving it.</a:t>
+            </a:r>
+          </a:p>
+          <a:p>
+            <a:pPr>
+              <a:spcAft>
+                <a:spcPts val="700"/>
+              </a:spcAft>
+            </a:pPr>
+            <a:r>
+              <a:rPr b="1" sz="1100">
+                <a:solidFill>
+                  <a:srgbClr val="1E40AF"/>
+                </a:solidFill>
+                <a:latin typeface="Segoe UI"/>
+              </a:rPr>
+              <a:t>• </a:t>
+            </a:r>
+            <a:r>
+              <a:rPr b="1" sz="1100">
+                <a:solidFill>
+                  <a:srgbClr val="0F172A"/>
+                </a:solidFill>
+                <a:latin typeface="Segoe UI"/>
+              </a:rPr>
+              <a:t>Regulatory Export Ready: </a:t>
+            </a:r>
+            <a:r>
+              <a:rPr sz="1050">
+                <a:solidFill>
+                  <a:srgbClr val="334155"/>
+                </a:solidFill>
+                <a:latin typeface="Segoe UI"/>
+              </a:rPr>
+              <a:t>Export entire conversation trails with cryptographic signatures for RBI / SEBI audit compliance.</a:t>
+            </a:r>
+          </a:p>
+        </p:txBody>
+      </p:sp>
+      <p:sp>
+        <p:nvSpPr>
+          <p:cNvPr id="7" name="Rounded Rectangle 6"/>
+          <p:cNvSpPr/>
+          <p:nvPr/>
+        </p:nvSpPr>
+        <p:spPr>
+          <a:xfrm>
+            <a:off x="731520" y="5623560"/>
+            <a:ext cx="4937760" cy="868680"/>
+          </a:xfrm>
+          <a:prstGeom prst="roundRect">
+            <a:avLst/>
+          </a:prstGeom>
+          <a:solidFill>
+            <a:srgbClr val="F8FAFC"/>
+          </a:solidFill>
+          <a:ln w="12700">
+            <a:solidFill>
+              <a:srgbClr val="E2E8F0"/>
+            </a:solidFill>
+          </a:ln>
+        </p:spPr>
+        <p:style>
+          <a:lnRef idx="1">
+            <a:schemeClr val="accent1"/>
+          </a:lnRef>
+          <a:fillRef idx="3">
+            <a:schemeClr val="accent1"/>
+          </a:fillRef>
+          <a:effectRef idx="2">
+            <a:schemeClr val="accent1"/>
+          </a:effectRef>
+          <a:fontRef idx="minor">
+            <a:schemeClr val="lt1"/>
+          </a:fontRef>
+        </p:style>
+        <p:txBody>
+          <a:bodyPr rtlCol="0" anchor="ctr"/>
+          <a:lstStyle/>
+          <a:p>
+            <a:pPr algn="ctr"/>
+          </a:p>
+        </p:txBody>
+      </p:sp>
+      <p:sp>
+        <p:nvSpPr>
+          <p:cNvPr id="8" name="Rectangle 7"/>
+          <p:cNvSpPr/>
+          <p:nvPr/>
+        </p:nvSpPr>
+        <p:spPr>
+          <a:xfrm>
+            <a:off x="731520" y="5623560"/>
+            <a:ext cx="73152" cy="868680"/>
+          </a:xfrm>
+          <a:prstGeom prst="rect">
+            <a:avLst/>
+          </a:prstGeom>
+          <a:solidFill>
+            <a:srgbClr val="1E40AF"/>
+          </a:solidFill>
+          <a:ln>
+            <a:noFill/>
+          </a:ln>
+        </p:spPr>
+        <p:style>
+          <a:lnRef idx="1">
+            <a:schemeClr val="accent1"/>
+          </a:lnRef>
+          <a:fillRef idx="3">
+            <a:schemeClr val="accent1"/>
+          </a:fillRef>
+          <a:effectRef idx="2">
+            <a:schemeClr val="accent1"/>
+          </a:effectRef>
+          <a:fontRef idx="minor">
+            <a:schemeClr val="lt1"/>
+          </a:fontRef>
+        </p:style>
+        <p:txBody>
+          <a:bodyPr rtlCol="0" anchor="ctr"/>
+          <a:lstStyle/>
+          <a:p>
+            <a:pPr algn="ctr"/>
+          </a:p>
+        </p:txBody>
+      </p:sp>
+      <p:sp>
+        <p:nvSpPr>
+          <p:cNvPr id="9" name="TextBox 8"/>
+          <p:cNvSpPr txBox="1"/>
+          <p:nvPr/>
+        </p:nvSpPr>
+        <p:spPr>
+          <a:xfrm>
+            <a:off x="914400" y="5733288"/>
+            <a:ext cx="4572000" cy="649224"/>
+          </a:xfrm>
+          <a:prstGeom prst="rect">
+            <a:avLst/>
+          </a:prstGeom>
+          <a:noFill/>
+        </p:spPr>
+        <p:txBody>
+          <a:bodyPr wrap="square" lIns="0" tIns="0" rIns="0" bIns="0">
+            <a:spAutoFit/>
+          </a:bodyPr>
+          <a:lstStyle/>
+          <a:p>
+            <a:pPr>
+              <a:defRPr sz="1600" b="1">
+                <a:solidFill>
+                  <a:srgbClr val="1E40AF"/>
+                </a:solidFill>
+                <a:latin typeface="Segoe UI"/>
               </a:defRPr>
             </a:pPr>
             <a:r>
@@ -7319,28 +8870,29 @@
           </a:p>
           <a:p>
             <a:pPr>
-              <a:defRPr sz="1000">
+              <a:defRPr sz="950">
                 <a:solidFill>
                   <a:srgbClr val="64748B"/>
                 </a:solidFill>
-              </a:defRPr>
-            </a:pPr>
-            <a:r>
-              <a:t>Cryptographically Verifiable Hash Chain</a:t>
-            </a:r>
-          </a:p>
-        </p:txBody>
-      </p:sp>
-      <p:sp>
-        <p:nvSpPr>
-          <p:cNvPr id="8" name="Rounded Rectangle 7"/>
+                <a:latin typeface="Segoe UI"/>
+              </a:defRPr>
+            </a:pPr>
+            <a:r>
+              <a:t>Cryptographically Verifiable Hash Chain with Genesis Root</a:t>
+            </a:r>
+          </a:p>
+        </p:txBody>
+      </p:sp>
+      <p:sp>
+        <p:nvSpPr>
+          <p:cNvPr id="10" name="Rounded Rectangle 9"/>
           <p:cNvSpPr/>
           <p:nvPr/>
         </p:nvSpPr>
         <p:spPr>
           <a:xfrm>
-            <a:off x="6144768" y="978408"/>
-            <a:ext cx="5358384" cy="5440680"/>
+            <a:off x="5870448" y="932688"/>
+            <a:ext cx="5724144" cy="4446270"/>
           </a:xfrm>
           <a:prstGeom prst="roundRect">
             <a:avLst/>
@@ -7378,7 +8930,7 @@
       </p:sp>
       <p:pic>
         <p:nvPicPr>
-          <p:cNvPr id="9" name="Picture 8" descr="03_kannada_call.png"/>
+          <p:cNvPr id="11" name="Picture 10" descr="03_kannada_call.png"/>
           <p:cNvPicPr>
             <a:picLocks noChangeAspect="1"/>
           </p:cNvPicPr>
@@ -7392,8 +8944,8 @@
         </p:blipFill>
         <p:spPr>
           <a:xfrm>
-            <a:off x="6217920" y="1051560"/>
-            <a:ext cx="5212080" cy="4663440"/>
+            <a:off x="5943600" y="1005840"/>
+            <a:ext cx="5577840" cy="3486150"/>
           </a:xfrm>
           <a:prstGeom prst="rect">
             <a:avLst/>
@@ -7402,14 +8954,14 @@
       </p:pic>
       <p:sp>
         <p:nvSpPr>
-          <p:cNvPr id="10" name="TextBox 9"/>
+          <p:cNvPr id="12" name="TextBox 11"/>
           <p:cNvSpPr txBox="1"/>
           <p:nvPr/>
         </p:nvSpPr>
         <p:spPr>
           <a:xfrm>
-            <a:off x="6217920" y="5806440"/>
-            <a:ext cx="5212080" cy="548640"/>
+            <a:off x="5989320" y="4565142"/>
+            <a:ext cx="5486400" cy="777240"/>
           </a:xfrm>
           <a:prstGeom prst="rect">
             <a:avLst/>
@@ -7417,20 +8969,52 @@
           <a:noFill/>
         </p:spPr>
         <p:txBody>
-          <a:bodyPr wrap="square">
+          <a:bodyPr wrap="square" lIns="0" tIns="0" rIns="0" bIns="0">
             <a:spAutoFit/>
           </a:bodyPr>
           <a:lstStyle/>
           <a:p>
             <a:pPr>
-              <a:defRPr sz="1000" b="1">
+              <a:defRPr>
+                <a:latin typeface="Segoe UI"/>
+              </a:defRPr>
+            </a:pPr>
+            <a:r>
+              <a:rPr sz="1000">
+                <a:solidFill>
+                  <a:srgbClr val="16A34A"/>
+                </a:solidFill>
+              </a:rPr>
+              <a:t>● </a:t>
+            </a:r>
+            <a:r>
+              <a:rPr b="1" sz="950">
+                <a:solidFill>
+                  <a:srgbClr val="0F172A"/>
+                </a:solidFill>
+              </a:rPr>
+              <a:t>CASE WORKSPACE AUDIT TRAIL &amp; VERIFY PROOF  </a:t>
+            </a:r>
+            <a:r>
+              <a:rPr sz="850">
+                <a:solidFill>
+                  <a:srgbClr val="1E40AF"/>
+                </a:solidFill>
+              </a:rPr>
+              <a:t>(http://localhost:5173/cases/475b0ac5-...#audit)</a:t>
+            </a:r>
+          </a:p>
+          <a:p>
+            <a:pPr>
+              <a:defRPr sz="850">
                 <a:solidFill>
                   <a:srgbClr val="64748B"/>
                 </a:solidFill>
-              </a:defRPr>
-            </a:pPr>
-            <a:r>
-              <a:t>📷 Case Workspace Cryptographic Audit Trail with 'Verify Chain' Banner</a:t>
+                <a:latin typeface="Segoe UI"/>
+              </a:defRPr>
+            </a:pPr>
+            <a:r>
+              <a:t>Tech Architecture: SHA-256 Chaining · Genesis 0000 Anchor · Four-Eyes Access Guard</a:t>
             </a:r>
           </a:p>
         </p:txBody>
@@ -7462,7 +9046,7 @@
         <p:spPr>
           <a:xfrm>
             <a:off x="0" y="0"/>
-            <a:ext cx="12191695" cy="777240"/>
+            <a:ext cx="12191695" cy="749808"/>
           </a:xfrm>
           <a:prstGeom prst="rect">
             <a:avLst/>
@@ -7505,7 +9089,7 @@
         <p:spPr>
           <a:xfrm>
             <a:off x="731520" y="164592"/>
-            <a:ext cx="6400800" cy="457200"/>
+            <a:ext cx="6858000" cy="411480"/>
           </a:xfrm>
           <a:prstGeom prst="rect">
             <a:avLst/>
@@ -7519,14 +9103,25 @@
           <a:lstStyle/>
           <a:p>
             <a:pPr>
-              <a:defRPr sz="1300" b="1">
+              <a:defRPr sz="1200" b="1">
+                <a:latin typeface="Segoe UI"/>
+              </a:defRPr>
+            </a:pPr>
+            <a:r>
+              <a:rPr>
                 <a:solidFill>
                   <a:srgbClr val="0EA5E9"/>
                 </a:solidFill>
-              </a:defRPr>
-            </a:pPr>
-            <a:r>
-              <a:t>AZENTIO-CSM  |  BFSI AUTONOMOUS CONVERSATIONAL AI</a:t>
+              </a:rPr>
+              <a:t>AZENTIO-CSM  </a:t>
+            </a:r>
+            <a:r>
+              <a:rPr sz="1100">
+                <a:solidFill>
+                  <a:srgbClr val="FFFFFF"/>
+                </a:solidFill>
+              </a:rPr>
+              <a:t>|  BFSI AUTONOMOUS CONVERSATIONAL VOICE PLATFORM</a:t>
             </a:r>
           </a:p>
         </p:txBody>
@@ -7540,7 +9135,7 @@
         <p:spPr>
           <a:xfrm>
             <a:off x="9601200" y="164592"/>
-            <a:ext cx="1828800" cy="457200"/>
+            <a:ext cx="1828800" cy="411480"/>
           </a:xfrm>
           <a:prstGeom prst="rect">
             <a:avLst/>
@@ -7554,10 +9149,11 @@
           <a:lstStyle/>
           <a:p>
             <a:pPr algn="r">
-              <a:defRPr sz="1200" b="1">
-                <a:solidFill>
-                  <a:srgbClr val="FFFFFF"/>
-                </a:solidFill>
+              <a:defRPr sz="1100" b="1">
+                <a:solidFill>
+                  <a:srgbClr val="CBD5E1"/>
+                </a:solidFill>
+                <a:latin typeface="Segoe UI"/>
               </a:defRPr>
             </a:pPr>
             <a:r>
@@ -7568,182 +9164,23 @@
       </p:sp>
       <p:sp>
         <p:nvSpPr>
-          <p:cNvPr id="5" name="TextBox 4"/>
-          <p:cNvSpPr txBox="1"/>
-          <p:nvPr/>
-        </p:nvSpPr>
-        <p:spPr>
-          <a:xfrm>
-            <a:off x="731520" y="960120"/>
-            <a:ext cx="5303520" cy="5394960"/>
-          </a:xfrm>
-          <a:prstGeom prst="rect">
-            <a:avLst/>
-          </a:prstGeom>
-          <a:noFill/>
-        </p:spPr>
-        <p:txBody>
-          <a:bodyPr wrap="square" lIns="0" tIns="0" rIns="0" bIns="0">
-            <a:spAutoFit/>
-          </a:bodyPr>
-          <a:lstStyle/>
-          <a:p>
-            <a:pPr>
-              <a:defRPr sz="1100" b="1">
-                <a:solidFill>
-                  <a:srgbClr val="2563EB"/>
-                </a:solidFill>
-              </a:defRPr>
-            </a:pPr>
-            <a:r>
-              <a:t>OPERATOR WORKSPACE</a:t>
-            </a:r>
-          </a:p>
-          <a:p>
-            <a:pPr>
-              <a:spcAft>
-                <a:spcPts val="400"/>
-              </a:spcAft>
-              <a:defRPr sz="2000" b="1">
-                <a:solidFill>
-                  <a:srgbClr val="0F172A"/>
-                </a:solidFill>
-              </a:defRPr>
-            </a:pPr>
-            <a:r>
-              <a:t>Enterprise Review Queue &amp; Temporal Filtering</a:t>
-            </a:r>
-          </a:p>
-          <a:p>
-            <a:pPr>
-              <a:spcAft>
-                <a:spcPts val="1400"/>
-              </a:spcAft>
-              <a:defRPr sz="1200">
-                <a:solidFill>
-                  <a:srgbClr val="64748B"/>
-                </a:solidFill>
-              </a:defRPr>
-            </a:pPr>
-            <a:r>
-              <a:t>Risk-Prioritized Case Sorting with Intuitive Date Boundaries</a:t>
-            </a:r>
-          </a:p>
-          <a:p>
-            <a:pPr>
-              <a:spcAft>
-                <a:spcPts val="800"/>
-              </a:spcAft>
-            </a:pPr>
-            <a:r>
-              <a:rPr b="1" sz="1150">
-                <a:solidFill>
-                  <a:srgbClr val="0F172A"/>
-                </a:solidFill>
-              </a:rPr>
-              <a:t>•  Financial Risk Prioritization: </a:t>
-            </a:r>
-            <a:r>
-              <a:rPr sz="1100">
-                <a:solidFill>
-                  <a:srgbClr val="1E293B"/>
-                </a:solidFill>
-              </a:rPr>
-              <a:t>Sorts cases by highest ₹ amount at risk and AI finding severity first, optimizing reviewer bandwidth.</a:t>
-            </a:r>
-          </a:p>
-          <a:p>
-            <a:pPr>
-              <a:spcAft>
-                <a:spcPts val="800"/>
-              </a:spcAft>
-            </a:pPr>
-            <a:r>
-              <a:rPr b="1" sz="1150">
-                <a:solidFill>
-                  <a:srgbClr val="0F172A"/>
-                </a:solidFill>
-              </a:rPr>
-              <a:t>•  Temporal Date Filtering: </a:t>
-            </a:r>
-            <a:r>
-              <a:rPr sz="1100">
-                <a:solidFill>
-                  <a:srgbClr val="1E293B"/>
-                </a:solidFill>
-              </a:rPr>
-              <a:t>New preset selector (Today, Yesterday, Past 7 Days, Past 30 Days) plus custom calendar date range pickers.</a:t>
-            </a:r>
-          </a:p>
-          <a:p>
-            <a:pPr>
-              <a:spcAft>
-                <a:spcPts val="800"/>
-              </a:spcAft>
-            </a:pPr>
-            <a:r>
-              <a:rPr b="1" sz="1150">
-                <a:solidFill>
-                  <a:srgbClr val="0F172A"/>
-                </a:solidFill>
-              </a:rPr>
-              <a:t>•  Persistent URL Synchronization: </a:t>
-            </a:r>
-            <a:r>
-              <a:rPr sz="1100">
-                <a:solidFill>
-                  <a:srgbClr val="1E293B"/>
-                </a:solidFill>
-              </a:rPr>
-              <a:t>Filter states are preserved across search params (?datePreset=today), bookmarks, and supervisor reloads.</a:t>
-            </a:r>
-          </a:p>
-          <a:p>
-            <a:pPr>
-              <a:spcAft>
-                <a:spcPts val="800"/>
-              </a:spcAft>
-            </a:pPr>
-            <a:r>
-              <a:rPr b="1" sz="1150">
-                <a:solidFill>
-                  <a:srgbClr val="0F172A"/>
-                </a:solidFill>
-              </a:rPr>
-              <a:t>•  3-Second Real-Time Polling: </a:t>
-            </a:r>
-            <a:r>
-              <a:rPr sz="1100">
-                <a:solidFill>
-                  <a:srgbClr val="1E293B"/>
-                </a:solidFill>
-              </a:rPr>
-              <a:t>Automatically detects new cases and audio uploads without requiring manual browser page refreshes.</a:t>
-            </a:r>
-          </a:p>
-        </p:txBody>
-      </p:sp>
-      <p:sp>
-        <p:nvSpPr>
-          <p:cNvPr id="6" name="Rounded Rectangle 5"/>
+          <p:cNvPr id="5" name="Rounded Rectangle 4"/>
           <p:cNvSpPr/>
           <p:nvPr/>
         </p:nvSpPr>
         <p:spPr>
           <a:xfrm>
-            <a:off x="731520" y="5715000"/>
-            <a:ext cx="5120640" cy="777240"/>
+            <a:off x="731520" y="1005840"/>
+            <a:ext cx="2011680" cy="292608"/>
           </a:xfrm>
           <a:prstGeom prst="roundRect">
             <a:avLst/>
           </a:prstGeom>
           <a:solidFill>
-            <a:srgbClr val="F8FAFC"/>
+            <a:srgbClr val="EEF2FF"/>
           </a:solidFill>
-          <a:ln w="19050">
-            <a:solidFill>
-              <a:srgbClr val="0EA5E9"/>
-            </a:solidFill>
+          <a:ln>
+            <a:noFill/>
           </a:ln>
         </p:spPr>
         <p:style>
@@ -7764,20 +9201,30 @@
           <a:bodyPr rtlCol="0" anchor="ctr"/>
           <a:lstStyle/>
           <a:p>
-            <a:pPr algn="ctr"/>
-          </a:p>
-        </p:txBody>
-      </p:sp>
-      <p:sp>
-        <p:nvSpPr>
-          <p:cNvPr id="7" name="TextBox 6"/>
+            <a:pPr algn="ctr">
+              <a:defRPr sz="950" b="1">
+                <a:solidFill>
+                  <a:srgbClr val="312E81"/>
+                </a:solidFill>
+                <a:latin typeface="Segoe UI"/>
+              </a:defRPr>
+            </a:pPr>
+            <a:r>
+              <a:t>OPERATOR WORKSPACE</a:t>
+            </a:r>
+          </a:p>
+        </p:txBody>
+      </p:sp>
+      <p:sp>
+        <p:nvSpPr>
+          <p:cNvPr id="6" name="TextBox 5"/>
           <p:cNvSpPr txBox="1"/>
           <p:nvPr/>
         </p:nvSpPr>
         <p:spPr>
           <a:xfrm>
-            <a:off x="868680" y="5779008"/>
-            <a:ext cx="4846320" cy="640080"/>
+            <a:off x="731520" y="1353312"/>
+            <a:ext cx="4937760" cy="4114800"/>
           </a:xfrm>
           <a:prstGeom prst="rect">
             <a:avLst/>
@@ -7785,16 +9232,296 @@
           <a:noFill/>
         </p:spPr>
         <p:txBody>
-          <a:bodyPr wrap="square">
+          <a:bodyPr wrap="square" lIns="0" tIns="0" rIns="0" bIns="0">
             <a:spAutoFit/>
           </a:bodyPr>
           <a:lstStyle/>
           <a:p>
             <a:pPr>
-              <a:defRPr sz="1500" b="1">
-                <a:solidFill>
-                  <a:srgbClr val="2563EB"/>
-                </a:solidFill>
+              <a:spcAft>
+                <a:spcPts val="400"/>
+              </a:spcAft>
+              <a:defRPr sz="2100" b="1">
+                <a:solidFill>
+                  <a:srgbClr val="0F172A"/>
+                </a:solidFill>
+                <a:latin typeface="Segoe UI"/>
+              </a:defRPr>
+            </a:pPr>
+            <a:r>
+              <a:t>Enterprise Review Queue &amp; Temporal Filtering</a:t>
+            </a:r>
+          </a:p>
+          <a:p>
+            <a:pPr>
+              <a:spcAft>
+                <a:spcPts val="1400"/>
+              </a:spcAft>
+              <a:defRPr sz="1150">
+                <a:solidFill>
+                  <a:srgbClr val="64748B"/>
+                </a:solidFill>
+                <a:latin typeface="Segoe UI"/>
+              </a:defRPr>
+            </a:pPr>
+            <a:r>
+              <a:t>Risk-Prioritized Case Sorting with Intuitive Date Boundaries</a:t>
+            </a:r>
+          </a:p>
+          <a:p>
+            <a:pPr>
+              <a:spcAft>
+                <a:spcPts val="700"/>
+              </a:spcAft>
+            </a:pPr>
+            <a:r>
+              <a:rPr b="1" sz="1100">
+                <a:solidFill>
+                  <a:srgbClr val="1E40AF"/>
+                </a:solidFill>
+                <a:latin typeface="Segoe UI"/>
+              </a:rPr>
+              <a:t>• </a:t>
+            </a:r>
+            <a:r>
+              <a:rPr b="1" sz="1100">
+                <a:solidFill>
+                  <a:srgbClr val="0F172A"/>
+                </a:solidFill>
+                <a:latin typeface="Segoe UI"/>
+              </a:rPr>
+              <a:t>Financial Risk Prioritization: </a:t>
+            </a:r>
+            <a:r>
+              <a:rPr sz="1050">
+                <a:solidFill>
+                  <a:srgbClr val="334155"/>
+                </a:solidFill>
+                <a:latin typeface="Segoe UI"/>
+              </a:rPr>
+              <a:t>Sorts cases by highest ₹ amount at risk and AI finding severity first, optimizing reviewer bandwidth.</a:t>
+            </a:r>
+          </a:p>
+          <a:p>
+            <a:pPr>
+              <a:spcAft>
+                <a:spcPts val="700"/>
+              </a:spcAft>
+            </a:pPr>
+            <a:r>
+              <a:rPr b="1" sz="1100">
+                <a:solidFill>
+                  <a:srgbClr val="1E40AF"/>
+                </a:solidFill>
+                <a:latin typeface="Segoe UI"/>
+              </a:rPr>
+              <a:t>• </a:t>
+            </a:r>
+            <a:r>
+              <a:rPr b="1" sz="1100">
+                <a:solidFill>
+                  <a:srgbClr val="0F172A"/>
+                </a:solidFill>
+                <a:latin typeface="Segoe UI"/>
+              </a:rPr>
+              <a:t>Temporal Date Filtering: </a:t>
+            </a:r>
+            <a:r>
+              <a:rPr sz="1050">
+                <a:solidFill>
+                  <a:srgbClr val="334155"/>
+                </a:solidFill>
+                <a:latin typeface="Segoe UI"/>
+              </a:rPr>
+              <a:t>New preset selector (Today, Yesterday, Past 7 Days, Past 30 Days) plus custom calendar date range pickers.</a:t>
+            </a:r>
+          </a:p>
+          <a:p>
+            <a:pPr>
+              <a:spcAft>
+                <a:spcPts val="700"/>
+              </a:spcAft>
+            </a:pPr>
+            <a:r>
+              <a:rPr b="1" sz="1100">
+                <a:solidFill>
+                  <a:srgbClr val="1E40AF"/>
+                </a:solidFill>
+                <a:latin typeface="Segoe UI"/>
+              </a:rPr>
+              <a:t>• </a:t>
+            </a:r>
+            <a:r>
+              <a:rPr b="1" sz="1100">
+                <a:solidFill>
+                  <a:srgbClr val="0F172A"/>
+                </a:solidFill>
+                <a:latin typeface="Segoe UI"/>
+              </a:rPr>
+              <a:t>Persistent URL Synchronization: </a:t>
+            </a:r>
+            <a:r>
+              <a:rPr sz="1050">
+                <a:solidFill>
+                  <a:srgbClr val="334155"/>
+                </a:solidFill>
+                <a:latin typeface="Segoe UI"/>
+              </a:rPr>
+              <a:t>Filter states are preserved across search params (?datePreset=today), bookmarks, and supervisor reloads.</a:t>
+            </a:r>
+          </a:p>
+          <a:p>
+            <a:pPr>
+              <a:spcAft>
+                <a:spcPts val="700"/>
+              </a:spcAft>
+            </a:pPr>
+            <a:r>
+              <a:rPr b="1" sz="1100">
+                <a:solidFill>
+                  <a:srgbClr val="1E40AF"/>
+                </a:solidFill>
+                <a:latin typeface="Segoe UI"/>
+              </a:rPr>
+              <a:t>• </a:t>
+            </a:r>
+            <a:r>
+              <a:rPr b="1" sz="1100">
+                <a:solidFill>
+                  <a:srgbClr val="0F172A"/>
+                </a:solidFill>
+                <a:latin typeface="Segoe UI"/>
+              </a:rPr>
+              <a:t>3-Second Real-Time Polling: </a:t>
+            </a:r>
+            <a:r>
+              <a:rPr sz="1050">
+                <a:solidFill>
+                  <a:srgbClr val="334155"/>
+                </a:solidFill>
+                <a:latin typeface="Segoe UI"/>
+              </a:rPr>
+              <a:t>Automatically detects new cases and audio uploads without requiring manual browser page refreshes.</a:t>
+            </a:r>
+          </a:p>
+        </p:txBody>
+      </p:sp>
+      <p:sp>
+        <p:nvSpPr>
+          <p:cNvPr id="7" name="Rounded Rectangle 6"/>
+          <p:cNvSpPr/>
+          <p:nvPr/>
+        </p:nvSpPr>
+        <p:spPr>
+          <a:xfrm>
+            <a:off x="731520" y="5623560"/>
+            <a:ext cx="4937760" cy="868680"/>
+          </a:xfrm>
+          <a:prstGeom prst="roundRect">
+            <a:avLst/>
+          </a:prstGeom>
+          <a:solidFill>
+            <a:srgbClr val="F8FAFC"/>
+          </a:solidFill>
+          <a:ln w="12700">
+            <a:solidFill>
+              <a:srgbClr val="E2E8F0"/>
+            </a:solidFill>
+          </a:ln>
+        </p:spPr>
+        <p:style>
+          <a:lnRef idx="1">
+            <a:schemeClr val="accent1"/>
+          </a:lnRef>
+          <a:fillRef idx="3">
+            <a:schemeClr val="accent1"/>
+          </a:fillRef>
+          <a:effectRef idx="2">
+            <a:schemeClr val="accent1"/>
+          </a:effectRef>
+          <a:fontRef idx="minor">
+            <a:schemeClr val="lt1"/>
+          </a:fontRef>
+        </p:style>
+        <p:txBody>
+          <a:bodyPr rtlCol="0" anchor="ctr"/>
+          <a:lstStyle/>
+          <a:p>
+            <a:pPr algn="ctr"/>
+          </a:p>
+        </p:txBody>
+      </p:sp>
+      <p:sp>
+        <p:nvSpPr>
+          <p:cNvPr id="8" name="Rectangle 7"/>
+          <p:cNvSpPr/>
+          <p:nvPr/>
+        </p:nvSpPr>
+        <p:spPr>
+          <a:xfrm>
+            <a:off x="731520" y="5623560"/>
+            <a:ext cx="73152" cy="868680"/>
+          </a:xfrm>
+          <a:prstGeom prst="rect">
+            <a:avLst/>
+          </a:prstGeom>
+          <a:solidFill>
+            <a:srgbClr val="1E40AF"/>
+          </a:solidFill>
+          <a:ln>
+            <a:noFill/>
+          </a:ln>
+        </p:spPr>
+        <p:style>
+          <a:lnRef idx="1">
+            <a:schemeClr val="accent1"/>
+          </a:lnRef>
+          <a:fillRef idx="3">
+            <a:schemeClr val="accent1"/>
+          </a:fillRef>
+          <a:effectRef idx="2">
+            <a:schemeClr val="accent1"/>
+          </a:effectRef>
+          <a:fontRef idx="minor">
+            <a:schemeClr val="lt1"/>
+          </a:fontRef>
+        </p:style>
+        <p:txBody>
+          <a:bodyPr rtlCol="0" anchor="ctr"/>
+          <a:lstStyle/>
+          <a:p>
+            <a:pPr algn="ctr"/>
+          </a:p>
+        </p:txBody>
+      </p:sp>
+      <p:sp>
+        <p:nvSpPr>
+          <p:cNvPr id="9" name="TextBox 8"/>
+          <p:cNvSpPr txBox="1"/>
+          <p:nvPr/>
+        </p:nvSpPr>
+        <p:spPr>
+          <a:xfrm>
+            <a:off x="914400" y="5733288"/>
+            <a:ext cx="4572000" cy="649224"/>
+          </a:xfrm>
+          <a:prstGeom prst="rect">
+            <a:avLst/>
+          </a:prstGeom>
+          <a:noFill/>
+        </p:spPr>
+        <p:txBody>
+          <a:bodyPr wrap="square" lIns="0" tIns="0" rIns="0" bIns="0">
+            <a:spAutoFit/>
+          </a:bodyPr>
+          <a:lstStyle/>
+          <a:p>
+            <a:pPr>
+              <a:defRPr sz="1600" b="1">
+                <a:solidFill>
+                  <a:srgbClr val="1E40AF"/>
+                </a:solidFill>
+                <a:latin typeface="Segoe UI"/>
               </a:defRPr>
             </a:pPr>
             <a:r>
@@ -7803,28 +9530,29 @@
           </a:p>
           <a:p>
             <a:pPr>
-              <a:defRPr sz="1000">
+              <a:defRPr sz="950">
                 <a:solidFill>
                   <a:srgbClr val="64748B"/>
                 </a:solidFill>
-              </a:defRPr>
-            </a:pPr>
-            <a:r>
-              <a:t>Today, 7D, 30D &amp; Custom Date Bounds</a:t>
-            </a:r>
-          </a:p>
-        </p:txBody>
-      </p:sp>
-      <p:sp>
-        <p:nvSpPr>
-          <p:cNvPr id="8" name="Rounded Rectangle 7"/>
+                <a:latin typeface="Segoe UI"/>
+              </a:defRPr>
+            </a:pPr>
+            <a:r>
+              <a:t>Today, Yesterday, 7D, 30D &amp; Custom Date Bounds</a:t>
+            </a:r>
+          </a:p>
+        </p:txBody>
+      </p:sp>
+      <p:sp>
+        <p:nvSpPr>
+          <p:cNvPr id="10" name="Rounded Rectangle 9"/>
           <p:cNvSpPr/>
           <p:nvPr/>
         </p:nvSpPr>
         <p:spPr>
           <a:xfrm>
-            <a:off x="6144768" y="978408"/>
-            <a:ext cx="5358384" cy="5440680"/>
+            <a:off x="5870448" y="932688"/>
+            <a:ext cx="5724144" cy="4446270"/>
           </a:xfrm>
           <a:prstGeom prst="roundRect">
             <a:avLst/>
@@ -7862,7 +9590,7 @@
       </p:sp>
       <p:pic>
         <p:nvPicPr>
-          <p:cNvPr id="9" name="Picture 8" descr="08_queue_date_filter.png"/>
+          <p:cNvPr id="11" name="Picture 10" descr="08_queue_date_filter.png"/>
           <p:cNvPicPr>
             <a:picLocks noChangeAspect="1"/>
           </p:cNvPicPr>
@@ -7876,8 +9604,8 @@
         </p:blipFill>
         <p:spPr>
           <a:xfrm>
-            <a:off x="6217920" y="1051560"/>
-            <a:ext cx="5212080" cy="4663440"/>
+            <a:off x="5943600" y="1005840"/>
+            <a:ext cx="5577840" cy="3486150"/>
           </a:xfrm>
           <a:prstGeom prst="rect">
             <a:avLst/>
@@ -7886,14 +9614,14 @@
       </p:pic>
       <p:sp>
         <p:nvSpPr>
-          <p:cNvPr id="10" name="TextBox 9"/>
+          <p:cNvPr id="12" name="TextBox 11"/>
           <p:cNvSpPr txBox="1"/>
           <p:nvPr/>
         </p:nvSpPr>
         <p:spPr>
           <a:xfrm>
-            <a:off x="6217920" y="5806440"/>
-            <a:ext cx="5212080" cy="548640"/>
+            <a:off x="5989320" y="4565142"/>
+            <a:ext cx="5486400" cy="777240"/>
           </a:xfrm>
           <a:prstGeom prst="rect">
             <a:avLst/>
@@ -7901,20 +9629,52 @@
           <a:noFill/>
         </p:spPr>
         <p:txBody>
-          <a:bodyPr wrap="square">
+          <a:bodyPr wrap="square" lIns="0" tIns="0" rIns="0" bIns="0">
             <a:spAutoFit/>
           </a:bodyPr>
           <a:lstStyle/>
           <a:p>
             <a:pPr>
-              <a:defRPr sz="1000" b="1">
+              <a:defRPr>
+                <a:latin typeface="Segoe UI"/>
+              </a:defRPr>
+            </a:pPr>
+            <a:r>
+              <a:rPr sz="1000">
+                <a:solidFill>
+                  <a:srgbClr val="16A34A"/>
+                </a:solidFill>
+              </a:rPr>
+              <a:t>● </a:t>
+            </a:r>
+            <a:r>
+              <a:rPr b="1" sz="950">
+                <a:solidFill>
+                  <a:srgbClr val="0F172A"/>
+                </a:solidFill>
+              </a:rPr>
+              <a:t>REVIEW QUEUE WITH TEMPORAL DATE FILTERS  </a:t>
+            </a:r>
+            <a:r>
+              <a:rPr sz="850">
+                <a:solidFill>
+                  <a:srgbClr val="1E40AF"/>
+                </a:solidFill>
+              </a:rPr>
+              <a:t>(http://localhost:5173/queue?datePreset=today)</a:t>
+            </a:r>
+          </a:p>
+          <a:p>
+            <a:pPr>
+              <a:defRPr sz="850">
                 <a:solidFill>
                   <a:srgbClr val="64748B"/>
                 </a:solidFill>
-              </a:defRPr>
-            </a:pPr>
-            <a:r>
-              <a:t>📷 Review Queue with New Date Range Presets &amp; Risk Sorting (localhost:5173/queue)</a:t>
+                <a:latin typeface="Segoe UI"/>
+              </a:defRPr>
+            </a:pPr>
+            <a:r>
+              <a:t>Tech Architecture: Dual Client/SQL Filtering · ISO Bounds · Real-time 3s Polling</a:t>
             </a:r>
           </a:p>
         </p:txBody>
